--- a/pbl3_poster/Hyperparameter_Tuning_PBL3_Presentation.pptx
+++ b/pbl3_poster/Hyperparameter_Tuning_PBL3_Presentation.pptx
@@ -3142,64 +3142,16 @@
           </a:p>
         </p:txBody>
       </p:sp>
-      <p:pic>
-        <p:nvPicPr>
-          <p:cNvPr id="3" name="Picture 2" descr="vgec_logo.png"/>
-          <p:cNvPicPr>
-            <a:picLocks noChangeAspect="1"/>
-          </p:cNvPicPr>
-          <p:nvPr/>
-        </p:nvPicPr>
-        <p:blipFill>
-          <a:blip r:embed="rId2"/>
-          <a:stretch>
-            <a:fillRect/>
-          </a:stretch>
-        </p:blipFill>
-        <p:spPr>
-          <a:xfrm>
-            <a:off x="914400" y="731520"/>
-            <a:ext cx="1097280" cy="1097280"/>
-          </a:xfrm>
-          <a:prstGeom prst="rect">
-            <a:avLst/>
-          </a:prstGeom>
-        </p:spPr>
-      </p:pic>
-      <p:pic>
-        <p:nvPicPr>
-          <p:cNvPr id="4" name="Picture 3" descr="gtu_logo.png"/>
-          <p:cNvPicPr>
-            <a:picLocks noChangeAspect="1"/>
-          </p:cNvPicPr>
-          <p:nvPr/>
-        </p:nvPicPr>
-        <p:blipFill>
-          <a:blip r:embed="rId3"/>
-          <a:stretch>
-            <a:fillRect/>
-          </a:stretch>
-        </p:blipFill>
-        <p:spPr>
-          <a:xfrm>
-            <a:off x="10149840" y="731520"/>
-            <a:ext cx="1082278" cy="1097280"/>
-          </a:xfrm>
-          <a:prstGeom prst="rect">
-            <a:avLst/>
-          </a:prstGeom>
-        </p:spPr>
-      </p:pic>
-      <p:sp>
-        <p:nvSpPr>
-          <p:cNvPr id="5" name="TextBox 4"/>
+      <p:sp>
+        <p:nvSpPr>
+          <p:cNvPr id="3" name="TextBox 2"/>
           <p:cNvSpPr txBox="1"/>
           <p:nvPr/>
         </p:nvSpPr>
         <p:spPr>
           <a:xfrm>
-            <a:off x="2286000" y="777240"/>
-            <a:ext cx="7619695" cy="1005840"/>
+            <a:off x="548640" y="685800"/>
+            <a:ext cx="11094415" cy="1097280"/>
           </a:xfrm>
           <a:prstGeom prst="rect">
             <a:avLst/>
@@ -3213,7 +3165,7 @@
           <a:lstStyle/>
           <a:p>
             <a:pPr algn="ctr">
-              <a:defRPr sz="1500" b="1">
+              <a:defRPr sz="1600" b="1">
                 <a:solidFill>
                   <a:srgbClr val="93C5FD"/>
                 </a:solidFill>
@@ -3225,7 +3177,7 @@
           </a:p>
           <a:p>
             <a:pPr algn="ctr">
-              <a:defRPr sz="1200">
+              <a:defRPr sz="1250">
                 <a:solidFill>
                   <a:srgbClr val="E2E8F0"/>
                 </a:solidFill>
@@ -3239,14 +3191,14 @@
       </p:sp>
       <p:sp>
         <p:nvSpPr>
-          <p:cNvPr id="6" name="Rounded Rectangle 5"/>
+          <p:cNvPr id="4" name="Rounded Rectangle 3"/>
           <p:cNvSpPr/>
           <p:nvPr/>
         </p:nvSpPr>
         <p:spPr>
           <a:xfrm>
-            <a:off x="1097280" y="2011680"/>
-            <a:ext cx="9997135" cy="2286000"/>
+            <a:off x="1097280" y="1920240"/>
+            <a:ext cx="9997135" cy="2194560"/>
           </a:xfrm>
           <a:prstGeom prst="roundRect">
             <a:avLst/>
@@ -3286,7 +3238,7 @@
               </a:defRPr>
             </a:pPr>
             <a:r>
-              <a:t>PBL TASK – 3 ACTIVITY PRESENTATION</a:t>
+              <a:t>PBL TASK – 3 ACTIVITY PRESENTATION (INDIVIDUAL)</a:t>
             </a:r>
           </a:p>
           <a:p>
@@ -3317,14 +3269,14 @@
       </p:sp>
       <p:sp>
         <p:nvSpPr>
-          <p:cNvPr id="7" name="Rounded Rectangle 6"/>
+          <p:cNvPr id="5" name="Rounded Rectangle 4"/>
           <p:cNvSpPr/>
           <p:nvPr/>
         </p:nvSpPr>
         <p:spPr>
           <a:xfrm>
-            <a:off x="1097280" y="4480560"/>
-            <a:ext cx="9997135" cy="1828800"/>
+            <a:off x="1371600" y="4389120"/>
+            <a:ext cx="9448495" cy="1737360"/>
           </a:xfrm>
           <a:prstGeom prst="roundRect">
             <a:avLst/>
@@ -3364,31 +3316,31 @@
               </a:defRPr>
             </a:pPr>
             <a:r>
-              <a:t>SUBMITTED BY:</a:t>
+              <a:t>PREPARED &amp; SUBMITTED BY:</a:t>
             </a:r>
           </a:p>
           <a:p>
             <a:pPr algn="ctr">
-              <a:defRPr sz="1300" b="1">
+              <a:defRPr sz="1600" b="1">
                 <a:solidFill>
                   <a:srgbClr val="FFFFFF"/>
                 </a:solidFill>
               </a:defRPr>
             </a:pPr>
             <a:r>
-              <a:t>Gohel Ridham Manojkumar — Enrollment No.: 240170107121</a:t>
+              <a:t>Gohel Ridham Manojkumar</a:t>
             </a:r>
           </a:p>
           <a:p>
             <a:pPr algn="ctr">
-              <a:defRPr sz="1300" b="1">
-                <a:solidFill>
-                  <a:srgbClr val="FFFFFF"/>
-                </a:solidFill>
-              </a:defRPr>
-            </a:pPr>
-            <a:r>
-              <a:t>Prajapati Vaidik Shaileshbhai — Enrollment No.: 240170107116</a:t>
+              <a:defRPr sz="1200" b="1">
+                <a:solidFill>
+                  <a:srgbClr val="93C5FD"/>
+                </a:solidFill>
+              </a:defRPr>
+            </a:pPr>
+            <a:r>
+              <a:t>Enrollment Number: 240170107121 | Department of Computer Engineering</a:t>
             </a:r>
           </a:p>
           <a:p>
@@ -3400,7 +3352,7 @@
               </a:defRPr>
             </a:pPr>
             <a:r>
-              <a:t>Under the Guidance of: Prof. Niyati Shah | Subject: Data Mining Techniques (BE05000181) | Semester V (2026–27)</a:t>
+              <a:t>Under the Guidance of: Prof. Niyati Shah | Subject: Data Mining Techniques (BE05000181) | Sem V (2026–27)</a:t>
             </a:r>
           </a:p>
         </p:txBody>

--- a/pbl3_poster/Hyperparameter_Tuning_PBL3_Presentation.pptx
+++ b/pbl3_poster/Hyperparameter_Tuning_PBL3_Presentation.pptx
@@ -3114,7 +3114,7 @@
             <a:avLst/>
           </a:prstGeom>
           <a:solidFill>
-            <a:srgbClr val="0F172A"/>
+            <a:srgbClr val="0B1120"/>
           </a:solidFill>
           <a:ln>
             <a:noFill/>
@@ -3150,8 +3150,8 @@
         </p:nvSpPr>
         <p:spPr>
           <a:xfrm>
-            <a:off x="548640" y="685800"/>
-            <a:ext cx="11094415" cy="1097280"/>
+            <a:off x="731520" y="731520"/>
+            <a:ext cx="10728655" cy="2926080"/>
           </a:xfrm>
           <a:prstGeom prst="rect">
             <a:avLst/>
@@ -3164,10 +3164,10 @@
           </a:bodyPr>
           <a:lstStyle/>
           <a:p>
-            <a:pPr algn="ctr">
-              <a:defRPr sz="1600" b="1">
-                <a:solidFill>
-                  <a:srgbClr val="93C5FD"/>
+            <a:pPr>
+              <a:defRPr sz="1400" b="1">
+                <a:solidFill>
+                  <a:srgbClr val="38BDF8"/>
                 </a:solidFill>
               </a:defRPr>
             </a:pPr>
@@ -3176,15 +3176,48 @@
             </a:r>
           </a:p>
           <a:p>
-            <a:pPr algn="ctr">
-              <a:defRPr sz="1250">
-                <a:solidFill>
-                  <a:srgbClr val="E2E8F0"/>
-                </a:solidFill>
-              </a:defRPr>
-            </a:pPr>
-            <a:r>
-              <a:t>Department of Computer Engineering | Gujarat Technological University (GTU)</a:t>
+            <a:pPr>
+              <a:spcBef>
+                <a:spcPts val="400"/>
+              </a:spcBef>
+              <a:defRPr sz="1100">
+                <a:solidFill>
+                  <a:srgbClr val="94A3B8"/>
+                </a:solidFill>
+              </a:defRPr>
+            </a:pPr>
+            <a:r>
+              <a:t>Department of Computer Engineering • Gujarat Technological University (GTU)</a:t>
+            </a:r>
+          </a:p>
+          <a:p>
+            <a:pPr>
+              <a:spcBef>
+                <a:spcPts val="1800"/>
+              </a:spcBef>
+              <a:defRPr sz="3300" b="1">
+                <a:solidFill>
+                  <a:srgbClr val="FFFFFF"/>
+                </a:solidFill>
+              </a:defRPr>
+            </a:pPr>
+            <a:r>
+              <a:t>Hyperparameter Tuning of Data Mining Models</a:t>
+            </a:r>
+          </a:p>
+          <a:p>
+            <a:pPr>
+              <a:spcBef>
+                <a:spcPts val="800"/>
+              </a:spcBef>
+              <a:defRPr sz="1400">
+                <a:solidFill>
+                  <a:srgbClr val="7DD3FC"/>
+                </a:solidFill>
+              </a:defRPr>
+            </a:pPr>
+            <a:r>
+              <a:t>Systematic Search Strategies, Generalization Theory, Bias-Variance Tradeoffs &amp; Empirical Validation</a:t>
             </a:r>
           </a:p>
         </p:txBody>
@@ -3197,8 +3230,8 @@
         </p:nvSpPr>
         <p:spPr>
           <a:xfrm>
-            <a:off x="1097280" y="1920240"/>
-            <a:ext cx="9997135" cy="2194560"/>
+            <a:off x="731520" y="4114800"/>
+            <a:ext cx="2560320" cy="2011680"/>
           </a:xfrm>
           <a:prstGeom prst="roundRect">
             <a:avLst/>
@@ -3206,9 +3239,9 @@
           <a:solidFill>
             <a:srgbClr val="1E3A8A"/>
           </a:solidFill>
-          <a:ln w="25400">
+          <a:ln w="19050">
             <a:solidFill>
-              <a:srgbClr val="2563EB"/>
+              <a:srgbClr val="38BDF8"/>
             </a:solidFill>
           </a:ln>
         </p:spPr>
@@ -3231,38 +3264,44 @@
           <a:lstStyle/>
           <a:p>
             <a:pPr algn="ctr">
-              <a:defRPr sz="1300" b="1">
-                <a:solidFill>
-                  <a:srgbClr val="06B6D4"/>
-                </a:solidFill>
-              </a:defRPr>
-            </a:pPr>
-            <a:r>
-              <a:t>PBL TASK – 3 ACTIVITY PRESENTATION (INDIVIDUAL)</a:t>
-            </a:r>
-          </a:p>
-          <a:p>
-            <a:pPr algn="ctr">
-              <a:defRPr sz="2800" b="1">
+              <a:defRPr sz="950" b="1">
+                <a:solidFill>
+                  <a:srgbClr val="38BDF8"/>
+                </a:solidFill>
+              </a:defRPr>
+            </a:pPr>
+            <a:r>
+              <a:t>STUDENT (INDIVIDUAL)</a:t>
+            </a:r>
+          </a:p>
+          <a:p>
+            <a:pPr>
+              <a:spcBef>
+                <a:spcPts val="1000"/>
+              </a:spcBef>
+              <a:defRPr sz="1200" b="1">
                 <a:solidFill>
                   <a:srgbClr val="FFFFFF"/>
                 </a:solidFill>
               </a:defRPr>
             </a:pPr>
             <a:r>
-              <a:t>HYPERPARAMETER TUNING OF DATA MINING MODELS</a:t>
-            </a:r>
-          </a:p>
-          <a:p>
-            <a:pPr algn="ctr">
-              <a:defRPr sz="1300">
-                <a:solidFill>
-                  <a:srgbClr val="CBD5E1"/>
-                </a:solidFill>
-              </a:defRPr>
-            </a:pPr>
-            <a:r>
-              <a:t>Systematic Optimization of Algorithmic Hyperparameters for Pattern Discovery &amp; Predictive Performance</a:t>
+              <a:t>Gohel Ridham Manojkumar</a:t>
+            </a:r>
+          </a:p>
+          <a:p>
+            <a:pPr>
+              <a:spcBef>
+                <a:spcPts val="400"/>
+              </a:spcBef>
+              <a:defRPr sz="1000">
+                <a:solidFill>
+                  <a:srgbClr val="E2E8F0"/>
+                </a:solidFill>
+              </a:defRPr>
+            </a:pPr>
+            <a:r>
+              <a:t>Enrollment: 240170107121</a:t>
             </a:r>
           </a:p>
         </p:txBody>
@@ -3275,18 +3314,18 @@
         </p:nvSpPr>
         <p:spPr>
           <a:xfrm>
-            <a:off x="1371600" y="4389120"/>
-            <a:ext cx="9448495" cy="1737360"/>
+            <a:off x="3456432" y="4114800"/>
+            <a:ext cx="2560320" cy="2011680"/>
           </a:xfrm>
           <a:prstGeom prst="roundRect">
             <a:avLst/>
           </a:prstGeom>
           <a:solidFill>
-            <a:srgbClr val="1E293B"/>
+            <a:srgbClr val="134E4A"/>
           </a:solidFill>
-          <a:ln>
+          <a:ln w="19050">
             <a:solidFill>
-              <a:srgbClr val="475569"/>
+              <a:srgbClr val="2DD4BF"/>
             </a:solidFill>
           </a:ln>
         </p:spPr>
@@ -3309,50 +3348,212 @@
           <a:lstStyle/>
           <a:p>
             <a:pPr algn="ctr">
-              <a:defRPr sz="1100" b="1">
-                <a:solidFill>
-                  <a:srgbClr val="06B6D4"/>
-                </a:solidFill>
-              </a:defRPr>
-            </a:pPr>
-            <a:r>
-              <a:t>PREPARED &amp; SUBMITTED BY:</a:t>
-            </a:r>
-          </a:p>
+              <a:defRPr sz="950" b="1">
+                <a:solidFill>
+                  <a:srgbClr val="2DD4BF"/>
+                </a:solidFill>
+              </a:defRPr>
+            </a:pPr>
+            <a:r>
+              <a:t>SUBJECT &amp; CODE</a:t>
+            </a:r>
+          </a:p>
+          <a:p>
+            <a:pPr>
+              <a:spcBef>
+                <a:spcPts val="1000"/>
+              </a:spcBef>
+              <a:defRPr sz="1200" b="1">
+                <a:solidFill>
+                  <a:srgbClr val="FFFFFF"/>
+                </a:solidFill>
+              </a:defRPr>
+            </a:pPr>
+            <a:r>
+              <a:t>Data Mining Techniques</a:t>
+            </a:r>
+          </a:p>
+          <a:p>
+            <a:pPr>
+              <a:spcBef>
+                <a:spcPts val="400"/>
+              </a:spcBef>
+              <a:defRPr sz="1000">
+                <a:solidFill>
+                  <a:srgbClr val="E2E8F0"/>
+                </a:solidFill>
+              </a:defRPr>
+            </a:pPr>
+            <a:r>
+              <a:t>BE05000181 • Semester V</a:t>
+            </a:r>
+          </a:p>
+        </p:txBody>
+      </p:sp>
+      <p:sp>
+        <p:nvSpPr>
+          <p:cNvPr id="6" name="Rounded Rectangle 5"/>
+          <p:cNvSpPr/>
+          <p:nvPr/>
+        </p:nvSpPr>
+        <p:spPr>
+          <a:xfrm>
+            <a:off x="6181344" y="4114800"/>
+            <a:ext cx="2560320" cy="2011680"/>
+          </a:xfrm>
+          <a:prstGeom prst="roundRect">
+            <a:avLst/>
+          </a:prstGeom>
+          <a:solidFill>
+            <a:srgbClr val="312E81"/>
+          </a:solidFill>
+          <a:ln w="19050">
+            <a:solidFill>
+              <a:srgbClr val="A5B4FC"/>
+            </a:solidFill>
+          </a:ln>
+        </p:spPr>
+        <p:style>
+          <a:lnRef idx="1">
+            <a:schemeClr val="accent1"/>
+          </a:lnRef>
+          <a:fillRef idx="3">
+            <a:schemeClr val="accent1"/>
+          </a:fillRef>
+          <a:effectRef idx="2">
+            <a:schemeClr val="accent1"/>
+          </a:effectRef>
+          <a:fontRef idx="minor">
+            <a:schemeClr val="lt1"/>
+          </a:fontRef>
+        </p:style>
+        <p:txBody>
+          <a:bodyPr rtlCol="0" anchor="ctr" wrap="square"/>
+          <a:lstStyle/>
           <a:p>
             <a:pPr algn="ctr">
-              <a:defRPr sz="1600" b="1">
+              <a:defRPr sz="950" b="1">
+                <a:solidFill>
+                  <a:srgbClr val="A5B4FC"/>
+                </a:solidFill>
+              </a:defRPr>
+            </a:pPr>
+            <a:r>
+              <a:t>FACULTY GUIDE</a:t>
+            </a:r>
+          </a:p>
+          <a:p>
+            <a:pPr>
+              <a:spcBef>
+                <a:spcPts val="1000"/>
+              </a:spcBef>
+              <a:defRPr sz="1200" b="1">
                 <a:solidFill>
                   <a:srgbClr val="FFFFFF"/>
                 </a:solidFill>
               </a:defRPr>
             </a:pPr>
             <a:r>
-              <a:t>Gohel Ridham Manojkumar</a:t>
-            </a:r>
-          </a:p>
+              <a:t>Prof. Niyati Shah</a:t>
+            </a:r>
+          </a:p>
+          <a:p>
+            <a:pPr>
+              <a:spcBef>
+                <a:spcPts val="400"/>
+              </a:spcBef>
+              <a:defRPr sz="1000">
+                <a:solidFill>
+                  <a:srgbClr val="E2E8F0"/>
+                </a:solidFill>
+              </a:defRPr>
+            </a:pPr>
+            <a:r>
+              <a:t>Assistant Professor, CE Dept.</a:t>
+            </a:r>
+          </a:p>
+        </p:txBody>
+      </p:sp>
+      <p:sp>
+        <p:nvSpPr>
+          <p:cNvPr id="7" name="Rounded Rectangle 6"/>
+          <p:cNvSpPr/>
+          <p:nvPr/>
+        </p:nvSpPr>
+        <p:spPr>
+          <a:xfrm>
+            <a:off x="8906256" y="4114800"/>
+            <a:ext cx="2560320" cy="2011680"/>
+          </a:xfrm>
+          <a:prstGeom prst="roundRect">
+            <a:avLst/>
+          </a:prstGeom>
+          <a:solidFill>
+            <a:srgbClr val="78350F"/>
+          </a:solidFill>
+          <a:ln w="19050">
+            <a:solidFill>
+              <a:srgbClr val="FBBF24"/>
+            </a:solidFill>
+          </a:ln>
+        </p:spPr>
+        <p:style>
+          <a:lnRef idx="1">
+            <a:schemeClr val="accent1"/>
+          </a:lnRef>
+          <a:fillRef idx="3">
+            <a:schemeClr val="accent1"/>
+          </a:fillRef>
+          <a:effectRef idx="2">
+            <a:schemeClr val="accent1"/>
+          </a:effectRef>
+          <a:fontRef idx="minor">
+            <a:schemeClr val="lt1"/>
+          </a:fontRef>
+        </p:style>
+        <p:txBody>
+          <a:bodyPr rtlCol="0" anchor="ctr" wrap="square"/>
+          <a:lstStyle/>
           <a:p>
             <a:pPr algn="ctr">
+              <a:defRPr sz="950" b="1">
+                <a:solidFill>
+                  <a:srgbClr val="FBBF24"/>
+                </a:solidFill>
+              </a:defRPr>
+            </a:pPr>
+            <a:r>
+              <a:t>EVALUATION &amp; YEAR</a:t>
+            </a:r>
+          </a:p>
+          <a:p>
+            <a:pPr>
+              <a:spcBef>
+                <a:spcPts val="1000"/>
+              </a:spcBef>
               <a:defRPr sz="1200" b="1">
                 <a:solidFill>
-                  <a:srgbClr val="93C5FD"/>
-                </a:solidFill>
-              </a:defRPr>
-            </a:pPr>
-            <a:r>
-              <a:t>Enrollment Number: 240170107121 | Department of Computer Engineering</a:t>
-            </a:r>
-          </a:p>
-          <a:p>
-            <a:pPr algn="ctr">
-              <a:defRPr sz="1100">
-                <a:solidFill>
-                  <a:srgbClr val="94A3B8"/>
-                </a:solidFill>
-              </a:defRPr>
-            </a:pPr>
-            <a:r>
-              <a:t>Under the Guidance of: Prof. Niyati Shah | Subject: Data Mining Techniques (BE05000181) | Sem V (2026–27)</a:t>
+                  <a:srgbClr val="FFFFFF"/>
+                </a:solidFill>
+              </a:defRPr>
+            </a:pPr>
+            <a:r>
+              <a:t>PBL Task - 3</a:t>
+            </a:r>
+          </a:p>
+          <a:p>
+            <a:pPr>
+              <a:spcBef>
+                <a:spcPts val="400"/>
+              </a:spcBef>
+              <a:defRPr sz="1000">
+                <a:solidFill>
+                  <a:srgbClr val="E2E8F0"/>
+                </a:solidFill>
+              </a:defRPr>
+            </a:pPr>
+            <a:r>
+              <a:t>Academic Year: 2026–27</a:t>
             </a:r>
           </a:p>
         </p:txBody>
@@ -3390,11 +3591,11 @@
             <a:avLst/>
           </a:prstGeom>
           <a:solidFill>
-            <a:srgbClr val="1E3A8A"/>
+            <a:srgbClr val="78350F"/>
           </a:solidFill>
           <a:ln w="19050">
             <a:solidFill>
-              <a:srgbClr val="2563EB"/>
+              <a:srgbClr val="D97706"/>
             </a:solidFill>
           </a:ln>
         </p:spPr>
@@ -3429,7 +3630,7 @@
         <p:spPr>
           <a:xfrm>
             <a:off x="548640" y="164592"/>
-            <a:ext cx="8686800" cy="731520"/>
+            <a:ext cx="8961120" cy="731520"/>
           </a:xfrm>
           <a:prstGeom prst="rect">
             <a:avLst/>
@@ -3443,14 +3644,14 @@
           <a:lstStyle/>
           <a:p>
             <a:pPr>
-              <a:defRPr sz="2200" b="1">
+              <a:defRPr sz="2100" b="1">
                 <a:solidFill>
                   <a:srgbClr val="FFFFFF"/>
                 </a:solidFill>
               </a:defRPr>
             </a:pPr>
             <a:r>
-              <a:t>9. Empirical Benchmarking Results (Before vs. After)</a:t>
+              <a:t>9. Bias-Variance Diagnosis &amp; Validation Curves</a:t>
             </a:r>
           </a:p>
         </p:txBody>
@@ -3463,17 +3664,19 @@
         </p:nvSpPr>
         <p:spPr>
           <a:xfrm>
-            <a:off x="9509760" y="292608"/>
-            <a:ext cx="2103120" cy="457200"/>
+            <a:off x="9692640" y="292608"/>
+            <a:ext cx="2011680" cy="457200"/>
           </a:xfrm>
           <a:prstGeom prst="roundRect">
             <a:avLst/>
           </a:prstGeom>
           <a:solidFill>
-            <a:srgbClr val="2563EB"/>
+            <a:srgbClr val="B45309"/>
           </a:solidFill>
-          <a:ln>
-            <a:noFill/>
+          <a:ln w="12700">
+            <a:solidFill>
+              <a:srgbClr val="D97706"/>
+            </a:solidFill>
           </a:ln>
         </p:spPr>
         <p:style>
@@ -3495,14 +3698,14 @@
           <a:lstStyle/>
           <a:p>
             <a:pPr algn="ctr">
-              <a:defRPr sz="1100" b="1">
+              <a:defRPr sz="1000" b="1">
                 <a:solidFill>
                   <a:srgbClr val="FFFFFF"/>
                 </a:solidFill>
               </a:defRPr>
             </a:pPr>
             <a:r>
-              <a:t>PBL TASK - 3</a:t>
+              <a:t>DIAGNOSIS</a:t>
             </a:r>
           </a:p>
         </p:txBody>
@@ -3585,18 +3788,18 @@
         </p:nvSpPr>
         <p:spPr>
           <a:xfrm>
-            <a:off x="548640" y="1280160"/>
-            <a:ext cx="11094415" cy="4937760"/>
+            <a:off x="548640" y="1234440"/>
+            <a:ext cx="5394960" cy="5029200"/>
           </a:xfrm>
           <a:prstGeom prst="roundRect">
             <a:avLst/>
           </a:prstGeom>
           <a:solidFill>
-            <a:srgbClr val="F8FAFC"/>
+            <a:srgbClr val="FFFFFF"/>
           </a:solidFill>
-          <a:ln>
+          <a:ln w="15240">
             <a:solidFill>
-              <a:srgbClr val="CBD5E1"/>
+              <a:srgbClr val="E2E8F0"/>
             </a:solidFill>
           </a:ln>
         </p:spPr>
@@ -3615,33 +3818,530 @@
           </a:fontRef>
         </p:style>
         <p:txBody>
-          <a:bodyPr rtlCol="0" anchor="ctr" wrap="square"/>
+          <a:bodyPr rtlCol="0" anchor="ctr"/>
+          <a:lstStyle/>
+          <a:p>
+            <a:pPr algn="ctr"/>
+          </a:p>
+        </p:txBody>
+      </p:sp>
+      <p:pic>
+        <p:nvPicPr>
+          <p:cNvPr id="8" name="Picture 7" descr="validation_curve_bias_variance.png"/>
+          <p:cNvPicPr>
+            <a:picLocks noChangeAspect="1"/>
+          </p:cNvPicPr>
+          <p:nvPr/>
+        </p:nvPicPr>
+        <p:blipFill>
+          <a:blip r:embed="rId2"/>
+          <a:stretch>
+            <a:fillRect/>
+          </a:stretch>
+        </p:blipFill>
+        <p:spPr>
+          <a:xfrm>
+            <a:off x="731520" y="1463040"/>
+            <a:ext cx="5029200" cy="2474686"/>
+          </a:xfrm>
+          <a:prstGeom prst="rect">
+            <a:avLst/>
+          </a:prstGeom>
+        </p:spPr>
+      </p:pic>
+      <p:sp>
+        <p:nvSpPr>
+          <p:cNvPr id="9" name="TextBox 8"/>
+          <p:cNvSpPr txBox="1"/>
+          <p:nvPr/>
+        </p:nvSpPr>
+        <p:spPr>
+          <a:xfrm>
+            <a:off x="731520" y="5669280"/>
+            <a:ext cx="5029200" cy="457200"/>
+          </a:xfrm>
+          <a:prstGeom prst="rect">
+            <a:avLst/>
+          </a:prstGeom>
+          <a:noFill/>
+        </p:spPr>
+        <p:txBody>
+          <a:bodyPr wrap="none">
+            <a:spAutoFit/>
+          </a:bodyPr>
+          <a:lstStyle/>
+          <a:p>
+            <a:pPr>
+              <a:defRPr sz="950" i="1">
+                <a:solidFill>
+                  <a:srgbClr val="64748B"/>
+                </a:solidFill>
+              </a:defRPr>
+            </a:pPr>
+            <a:r>
+              <a:t>Figure 7: Validation curve diagnosing High Bias (Underfitting) vs. High Variance (Overfitting).</a:t>
+            </a:r>
+          </a:p>
+        </p:txBody>
+      </p:sp>
+      <p:sp>
+        <p:nvSpPr>
+          <p:cNvPr id="10" name="Rounded Rectangle 9"/>
+          <p:cNvSpPr/>
+          <p:nvPr/>
+        </p:nvSpPr>
+        <p:spPr>
+          <a:xfrm>
+            <a:off x="6217920" y="1234440"/>
+            <a:ext cx="5394960" cy="5029200"/>
+          </a:xfrm>
+          <a:prstGeom prst="roundRect">
+            <a:avLst/>
+          </a:prstGeom>
+          <a:solidFill>
+            <a:srgbClr val="FEF3C7"/>
+          </a:solidFill>
+          <a:ln w="15240">
+            <a:solidFill>
+              <a:srgbClr val="FDE68A"/>
+            </a:solidFill>
+          </a:ln>
+        </p:spPr>
+        <p:style>
+          <a:lnRef idx="1">
+            <a:schemeClr val="accent1"/>
+          </a:lnRef>
+          <a:fillRef idx="3">
+            <a:schemeClr val="accent1"/>
+          </a:fillRef>
+          <a:effectRef idx="2">
+            <a:schemeClr val="accent1"/>
+          </a:effectRef>
+          <a:fontRef idx="minor">
+            <a:schemeClr val="lt1"/>
+          </a:fontRef>
+        </p:style>
+        <p:txBody>
+          <a:bodyPr rtlCol="0" anchor="ctr"/>
+          <a:lstStyle/>
+          <a:p>
+            <a:pPr algn="ctr"/>
+          </a:p>
+        </p:txBody>
+      </p:sp>
+      <p:sp>
+        <p:nvSpPr>
+          <p:cNvPr id="11" name="TextBox 10"/>
+          <p:cNvSpPr txBox="1"/>
+          <p:nvPr/>
+        </p:nvSpPr>
+        <p:spPr>
+          <a:xfrm>
+            <a:off x="6400800" y="1371600"/>
+            <a:ext cx="5029200" cy="4754880"/>
+          </a:xfrm>
+          <a:prstGeom prst="rect">
+            <a:avLst/>
+          </a:prstGeom>
+          <a:noFill/>
+        </p:spPr>
+        <p:txBody>
+          <a:bodyPr wrap="square">
+            <a:spAutoFit/>
+          </a:bodyPr>
+          <a:lstStyle/>
+          <a:p>
+            <a:pPr>
+              <a:defRPr sz="1500" b="1">
+                <a:solidFill>
+                  <a:srgbClr val="78350F"/>
+                </a:solidFill>
+              </a:defRPr>
+            </a:pPr>
+            <a:r>
+              <a:t>Hyperparameter Diagnostic Playbook</a:t>
+            </a:r>
+          </a:p>
+          <a:p>
+            <a:pPr>
+              <a:spcBef>
+                <a:spcPts val="800"/>
+              </a:spcBef>
+              <a:defRPr sz="1050"/>
+            </a:pPr>
+            <a:r>
+              <a:t>1. Underfitting Regime (High Bias):</a:t>
+            </a:r>
+            <a:br/>
+            <a:r>
+              <a:t>• Symptom: Both training and validation errors remain elevated.</a:t>
+            </a:r>
+            <a:br/>
+            <a:r>
+              <a:t>• Cause: Model capacity is overly restricted (small C, tree depth ≤ 2).</a:t>
+            </a:r>
+            <a:br/>
+            <a:r>
+              <a:t>• Action: Relax regularization, increase tree depth, add polynomial features.</a:t>
+            </a:r>
+          </a:p>
+          <a:p>
+            <a:pPr>
+              <a:spcBef>
+                <a:spcPts val="1000"/>
+              </a:spcBef>
+              <a:defRPr sz="1050"/>
+            </a:pPr>
+            <a:r>
+              <a:t>2. Overfitting Regime (High Variance):</a:t>
+            </a:r>
+            <a:br/>
+            <a:r>
+              <a:t>• Symptom: Training score nears 100% while validation metric drops.</a:t>
+            </a:r>
+            <a:br/>
+            <a:r>
+              <a:t>• Cause: Model memorizes spurious training sample noise.</a:t>
+            </a:r>
+            <a:br/>
+            <a:r>
+              <a:t>• Action: Enforce L2 penalties, reduce max_depth, increase min_samples_leaf.</a:t>
+            </a:r>
+          </a:p>
+          <a:p>
+            <a:pPr>
+              <a:spcBef>
+                <a:spcPts val="1000"/>
+              </a:spcBef>
+              <a:defRPr sz="1000" b="1">
+                <a:solidFill>
+                  <a:srgbClr val="D97706"/>
+                </a:solidFill>
+              </a:defRPr>
+            </a:pPr>
+            <a:r>
+              <a:t>Sweet Spot θ* Discovery:</a:t>
+            </a:r>
+            <a:br/>
+            <a:r>
+              <a:t>Identified peak generalization capacity where validation score reaches maximum before training-validation divergence begins.</a:t>
+            </a:r>
+          </a:p>
+        </p:txBody>
+      </p:sp>
+    </p:spTree>
+  </p:cSld>
+  <p:clrMapOvr>
+    <a:masterClrMapping/>
+  </p:clrMapOvr>
+</p:sld>
+</file>
+
+<file path=ppt/slides/slide11.xml><?xml version="1.0" encoding="utf-8"?>
+<p:sld xmlns:a="http://schemas.openxmlformats.org/drawingml/2006/main" xmlns:p="http://schemas.openxmlformats.org/presentationml/2006/main" xmlns:r="http://schemas.openxmlformats.org/officeDocument/2006/relationships">
+  <p:cSld>
+    <p:spTree>
+      <p:nvGrpSpPr>
+        <p:cNvPr id="1" name=""/>
+        <p:cNvGrpSpPr/>
+        <p:nvPr/>
+      </p:nvGrpSpPr>
+      <p:grpSpPr/>
+      <p:sp>
+        <p:nvSpPr>
+          <p:cNvPr id="2" name="Rectangle 1"/>
+          <p:cNvSpPr/>
+          <p:nvPr/>
+        </p:nvSpPr>
+        <p:spPr>
+          <a:xfrm>
+            <a:off x="0" y="0"/>
+            <a:ext cx="12191695" cy="1051560"/>
+          </a:xfrm>
+          <a:prstGeom prst="rect">
+            <a:avLst/>
+          </a:prstGeom>
+          <a:solidFill>
+            <a:srgbClr val="831843"/>
+          </a:solidFill>
+          <a:ln w="19050">
+            <a:solidFill>
+              <a:srgbClr val="E11D48"/>
+            </a:solidFill>
+          </a:ln>
+        </p:spPr>
+        <p:style>
+          <a:lnRef idx="1">
+            <a:schemeClr val="accent1"/>
+          </a:lnRef>
+          <a:fillRef idx="3">
+            <a:schemeClr val="accent1"/>
+          </a:fillRef>
+          <a:effectRef idx="2">
+            <a:schemeClr val="accent1"/>
+          </a:effectRef>
+          <a:fontRef idx="minor">
+            <a:schemeClr val="lt1"/>
+          </a:fontRef>
+        </p:style>
+        <p:txBody>
+          <a:bodyPr rtlCol="0" anchor="ctr"/>
+          <a:lstStyle/>
+          <a:p>
+            <a:pPr algn="ctr"/>
+          </a:p>
+        </p:txBody>
+      </p:sp>
+      <p:sp>
+        <p:nvSpPr>
+          <p:cNvPr id="3" name="TextBox 2"/>
+          <p:cNvSpPr txBox="1"/>
+          <p:nvPr/>
+        </p:nvSpPr>
+        <p:spPr>
+          <a:xfrm>
+            <a:off x="548640" y="164592"/>
+            <a:ext cx="8961120" cy="731520"/>
+          </a:xfrm>
+          <a:prstGeom prst="rect">
+            <a:avLst/>
+          </a:prstGeom>
+          <a:noFill/>
+        </p:spPr>
+        <p:txBody>
+          <a:bodyPr wrap="square">
+            <a:spAutoFit/>
+          </a:bodyPr>
+          <a:lstStyle/>
+          <a:p>
+            <a:pPr>
+              <a:defRPr sz="2100" b="1">
+                <a:solidFill>
+                  <a:srgbClr val="FFFFFF"/>
+                </a:solidFill>
+              </a:defRPr>
+            </a:pPr>
+            <a:r>
+              <a:t>10. Empirical Benchmarks: Default vs. Tuned Models</a:t>
+            </a:r>
+          </a:p>
+        </p:txBody>
+      </p:sp>
+      <p:sp>
+        <p:nvSpPr>
+          <p:cNvPr id="4" name="Rounded Rectangle 3"/>
+          <p:cNvSpPr/>
+          <p:nvPr/>
+        </p:nvSpPr>
+        <p:spPr>
+          <a:xfrm>
+            <a:off x="9692640" y="292608"/>
+            <a:ext cx="2011680" cy="457200"/>
+          </a:xfrm>
+          <a:prstGeom prst="roundRect">
+            <a:avLst/>
+          </a:prstGeom>
+          <a:solidFill>
+            <a:srgbClr val="BE123C"/>
+          </a:solidFill>
+          <a:ln w="12700">
+            <a:solidFill>
+              <a:srgbClr val="E11D48"/>
+            </a:solidFill>
+          </a:ln>
+        </p:spPr>
+        <p:style>
+          <a:lnRef idx="1">
+            <a:schemeClr val="accent1"/>
+          </a:lnRef>
+          <a:fillRef idx="3">
+            <a:schemeClr val="accent1"/>
+          </a:fillRef>
+          <a:effectRef idx="2">
+            <a:schemeClr val="accent1"/>
+          </a:effectRef>
+          <a:fontRef idx="minor">
+            <a:schemeClr val="lt1"/>
+          </a:fontRef>
+        </p:style>
+        <p:txBody>
+          <a:bodyPr rtlCol="0" anchor="ctr"/>
           <a:lstStyle/>
           <a:p>
             <a:pPr algn="ctr">
-              <a:defRPr sz="1600" b="1">
-                <a:solidFill>
-                  <a:srgbClr val="1E3A8A"/>
-                </a:solidFill>
-              </a:defRPr>
-            </a:pPr>
-            <a:r>
-              <a:t>Quantitative Impact of Hyperparameter Tuning on Data Mining Tasks</a:t>
+              <a:defRPr sz="1000" b="1">
+                <a:solidFill>
+                  <a:srgbClr val="FFFFFF"/>
+                </a:solidFill>
+              </a:defRPr>
+            </a:pPr>
+            <a:r>
+              <a:t>BENCHMARKS</a:t>
+            </a:r>
+          </a:p>
+        </p:txBody>
+      </p:sp>
+      <p:sp>
+        <p:nvSpPr>
+          <p:cNvPr id="5" name="TextBox 4"/>
+          <p:cNvSpPr txBox="1"/>
+          <p:nvPr/>
+        </p:nvSpPr>
+        <p:spPr>
+          <a:xfrm>
+            <a:off x="548640" y="6446520"/>
+            <a:ext cx="9601200" cy="320040"/>
+          </a:xfrm>
+          <a:prstGeom prst="rect">
+            <a:avLst/>
+          </a:prstGeom>
+          <a:noFill/>
+        </p:spPr>
+        <p:txBody>
+          <a:bodyPr wrap="none">
+            <a:spAutoFit/>
+          </a:bodyPr>
+          <a:lstStyle/>
+          <a:p>
+            <a:pPr>
+              <a:defRPr sz="950">
+                <a:solidFill>
+                  <a:srgbClr val="64748B"/>
+                </a:solidFill>
+              </a:defRPr>
+            </a:pPr>
+            <a:r>
+              <a:t>Data Mining Techniques (BE05000181) | Computer Engineering Dept., VGEC Chandkheda | GTU</a:t>
+            </a:r>
+          </a:p>
+        </p:txBody>
+      </p:sp>
+      <p:sp>
+        <p:nvSpPr>
+          <p:cNvPr id="6" name="TextBox 5"/>
+          <p:cNvSpPr txBox="1"/>
+          <p:nvPr/>
+        </p:nvSpPr>
+        <p:spPr>
+          <a:xfrm>
+            <a:off x="10515600" y="6446520"/>
+            <a:ext cx="1097280" cy="320040"/>
+          </a:xfrm>
+          <a:prstGeom prst="rect">
+            <a:avLst/>
+          </a:prstGeom>
+          <a:noFill/>
+        </p:spPr>
+        <p:txBody>
+          <a:bodyPr wrap="none">
+            <a:spAutoFit/>
+          </a:bodyPr>
+          <a:lstStyle/>
+          <a:p>
+            <a:pPr algn="r">
+              <a:defRPr sz="950" b="1">
+                <a:solidFill>
+                  <a:srgbClr val="64748B"/>
+                </a:solidFill>
+              </a:defRPr>
+            </a:pPr>
+            <a:r>
+              <a:t>Slide 11 of 12</a:t>
+            </a:r>
+          </a:p>
+        </p:txBody>
+      </p:sp>
+      <p:sp>
+        <p:nvSpPr>
+          <p:cNvPr id="7" name="Rounded Rectangle 6"/>
+          <p:cNvSpPr/>
+          <p:nvPr/>
+        </p:nvSpPr>
+        <p:spPr>
+          <a:xfrm>
+            <a:off x="548640" y="1234440"/>
+            <a:ext cx="11094415" cy="5029200"/>
+          </a:xfrm>
+          <a:prstGeom prst="roundRect">
+            <a:avLst/>
+          </a:prstGeom>
+          <a:solidFill>
+            <a:srgbClr val="FFFFFF"/>
+          </a:solidFill>
+          <a:ln w="15240">
+            <a:solidFill>
+              <a:srgbClr val="E2E8F0"/>
+            </a:solidFill>
+          </a:ln>
+        </p:spPr>
+        <p:style>
+          <a:lnRef idx="1">
+            <a:schemeClr val="accent1"/>
+          </a:lnRef>
+          <a:fillRef idx="3">
+            <a:schemeClr val="accent1"/>
+          </a:fillRef>
+          <a:effectRef idx="2">
+            <a:schemeClr val="accent1"/>
+          </a:effectRef>
+          <a:fontRef idx="minor">
+            <a:schemeClr val="lt1"/>
+          </a:fontRef>
+        </p:style>
+        <p:txBody>
+          <a:bodyPr rtlCol="0" anchor="ctr"/>
+          <a:lstStyle/>
+          <a:p>
+            <a:pPr algn="ctr"/>
+          </a:p>
+        </p:txBody>
+      </p:sp>
+      <p:sp>
+        <p:nvSpPr>
+          <p:cNvPr id="8" name="TextBox 7"/>
+          <p:cNvSpPr txBox="1"/>
+          <p:nvPr/>
+        </p:nvSpPr>
+        <p:spPr>
+          <a:xfrm>
+            <a:off x="731520" y="1371600"/>
+            <a:ext cx="10728655" cy="4754880"/>
+          </a:xfrm>
+          <a:prstGeom prst="rect">
+            <a:avLst/>
+          </a:prstGeom>
+          <a:noFill/>
+        </p:spPr>
+        <p:txBody>
+          <a:bodyPr wrap="square">
+            <a:spAutoFit/>
+          </a:bodyPr>
+          <a:lstStyle/>
+          <a:p>
+            <a:pPr>
+              <a:defRPr sz="1500" b="1">
+                <a:solidFill>
+                  <a:srgbClr val="831843"/>
+                </a:solidFill>
+              </a:defRPr>
+            </a:pPr>
+            <a:r>
+              <a:t>Quantitative Performance Comparison Across Data Mining Architectures</a:t>
             </a:r>
           </a:p>
         </p:txBody>
       </p:sp>
       <p:graphicFrame>
         <p:nvGraphicFramePr>
-          <p:cNvPr id="8" name="Table 7"/>
+          <p:cNvPr id="9" name="Table 8"/>
           <p:cNvGraphicFramePr>
             <a:graphicFrameLocks noGrp="1"/>
           </p:cNvGraphicFramePr>
           <p:nvPr/>
         </p:nvGraphicFramePr>
         <p:xfrm>
-          <a:off x="822960" y="1920240"/>
-          <a:ext cx="10515600" cy="2377440"/>
+          <a:off x="731520" y="1920240"/>
+          <a:ext cx="10728655" cy="2926080"/>
         </p:xfrm>
         <a:graphic>
           <a:graphicData uri="http://schemas.openxmlformats.org/drawingml/2006/table">
@@ -3650,13 +4350,13 @@
                 <a:tableStyleId>{5C22544A-7EE6-4342-B048-85BDC9FD1C3A}</a:tableStyleId>
               </a:tblPr>
               <a:tblGrid>
-                <a:gridCol w="2103120"/>
-                <a:gridCol w="2103120"/>
-                <a:gridCol w="2103120"/>
-                <a:gridCol w="2103120"/>
-                <a:gridCol w="2103120"/>
+                <a:gridCol w="2145731"/>
+                <a:gridCol w="2145731"/>
+                <a:gridCol w="2145731"/>
+                <a:gridCol w="2145731"/>
+                <a:gridCol w="2145731"/>
               </a:tblGrid>
-              <a:tr h="475488">
+              <a:tr h="585216">
                 <a:tc>
                   <a:txBody>
                     <a:bodyPr/>
@@ -3676,7 +4376,7 @@
                   </a:txBody>
                   <a:tcPr>
                     <a:solidFill>
-                      <a:srgbClr val="1E3A8A"/>
+                      <a:srgbClr val="831843"/>
                     </a:solidFill>
                   </a:tcPr>
                 </a:tc>
@@ -3699,7 +4399,7 @@
                   </a:txBody>
                   <a:tcPr>
                     <a:solidFill>
-                      <a:srgbClr val="1E3A8A"/>
+                      <a:srgbClr val="831843"/>
                     </a:solidFill>
                   </a:tcPr>
                 </a:tc>
@@ -3716,13 +4416,13 @@
                         </a:defRPr>
                       </a:pPr>
                       <a:r>
-                        <a:t>Tuned Parameters (θ*)</a:t>
+                        <a:t>Tuned Hyperparameters θ*</a:t>
                       </a:r>
                     </a:p>
                   </a:txBody>
                   <a:tcPr>
                     <a:solidFill>
-                      <a:srgbClr val="1E3A8A"/>
+                      <a:srgbClr val="831843"/>
                     </a:solidFill>
                   </a:tcPr>
                 </a:tc>
@@ -3739,13 +4439,13 @@
                         </a:defRPr>
                       </a:pPr>
                       <a:r>
-                        <a:t>Search Strategy</a:t>
+                        <a:t>Baseline Metric</a:t>
                       </a:r>
                     </a:p>
                   </a:txBody>
                   <a:tcPr>
                     <a:solidFill>
-                      <a:srgbClr val="1E3A8A"/>
+                      <a:srgbClr val="831843"/>
                     </a:solidFill>
                   </a:tcPr>
                 </a:tc>
@@ -3762,36 +4462,40 @@
                         </a:defRPr>
                       </a:pPr>
                       <a:r>
-                        <a:t>Performance Metric Gain</a:t>
+                        <a:t>Tuned Metric (Gain)</a:t>
                       </a:r>
                     </a:p>
                   </a:txBody>
                   <a:tcPr>
                     <a:solidFill>
-                      <a:srgbClr val="1E3A8A"/>
+                      <a:srgbClr val="831843"/>
                     </a:solidFill>
                   </a:tcPr>
                 </a:tc>
               </a:tr>
-              <a:tr h="475488">
+              <a:tr h="585216">
                 <a:tc>
                   <a:txBody>
                     <a:bodyPr/>
                     <a:lstStyle/>
                     <a:p>
                       <a:pPr>
-                        <a:defRPr sz="1050" b="1">
+                        <a:defRPr sz="1050">
                           <a:solidFill>
-                            <a:srgbClr val="1E293B"/>
+                            <a:srgbClr val="0F172A"/>
                           </a:solidFill>
                         </a:defRPr>
                       </a:pPr>
                       <a:r>
-                        <a:t>SVM Classifier</a:t>
+                        <a:t>SVM Classifier (RBF)</a:t>
                       </a:r>
                     </a:p>
                   </a:txBody>
-                  <a:tcPr/>
+                  <a:tcPr>
+                    <a:solidFill>
+                      <a:srgbClr val="F8FAFC"/>
+                    </a:solidFill>
+                  </a:tcPr>
                 </a:tc>
                 <a:tc>
                   <a:txBody>
@@ -3801,16 +4505,20 @@
                       <a:pPr>
                         <a:defRPr sz="1050">
                           <a:solidFill>
-                            <a:srgbClr val="1E293B"/>
+                            <a:srgbClr val="0F172A"/>
                           </a:solidFill>
                         </a:defRPr>
                       </a:pPr>
                       <a:r>
-                        <a:t>C=1.0, γ='scale'</a:t>
+                        <a:t>C = 1.0, γ = 'scale'</a:t>
                       </a:r>
                     </a:p>
                   </a:txBody>
-                  <a:tcPr/>
+                  <a:tcPr>
+                    <a:solidFill>
+                      <a:srgbClr val="F8FAFC"/>
+                    </a:solidFill>
+                  </a:tcPr>
                 </a:tc>
                 <a:tc>
                   <a:txBody>
@@ -3820,16 +4528,20 @@
                       <a:pPr>
                         <a:defRPr sz="1050">
                           <a:solidFill>
-                            <a:srgbClr val="1E293B"/>
+                            <a:srgbClr val="0F172A"/>
                           </a:solidFill>
                         </a:defRPr>
                       </a:pPr>
                       <a:r>
-                        <a:t>C=10.0, γ=0.01 (RBF)</a:t>
+                        <a:t>C = 10.0, γ = 0.01</a:t>
                       </a:r>
                     </a:p>
                   </a:txBody>
-                  <a:tcPr/>
+                  <a:tcPr>
+                    <a:solidFill>
+                      <a:srgbClr val="F8FAFC"/>
+                    </a:solidFill>
+                  </a:tcPr>
                 </a:tc>
                 <a:tc>
                   <a:txBody>
@@ -3839,16 +4551,20 @@
                       <a:pPr>
                         <a:defRPr sz="1050">
                           <a:solidFill>
-                            <a:srgbClr val="1E293B"/>
+                            <a:srgbClr val="0F172A"/>
                           </a:solidFill>
                         </a:defRPr>
                       </a:pPr>
                       <a:r>
-                        <a:t>GridSearchCV (5-Fold)</a:t>
+                        <a:t>79.0% Accuracy</a:t>
                       </a:r>
                     </a:p>
                   </a:txBody>
-                  <a:tcPr/>
+                  <a:tcPr>
+                    <a:solidFill>
+                      <a:srgbClr val="F8FAFC"/>
+                    </a:solidFill>
+                  </a:tcPr>
                 </a:tc>
                 <a:tc>
                   <a:txBody>
@@ -3863,32 +4579,40 @@
                         </a:defRPr>
                       </a:pPr>
                       <a:r>
-                        <a:t>+15.0% Accuracy (79.0% → 94.0%)</a:t>
+                        <a:t>94.0% Accuracy (+15.0%)</a:t>
                       </a:r>
                     </a:p>
                   </a:txBody>
-                  <a:tcPr/>
+                  <a:tcPr>
+                    <a:solidFill>
+                      <a:srgbClr val="F8FAFC"/>
+                    </a:solidFill>
+                  </a:tcPr>
                 </a:tc>
               </a:tr>
-              <a:tr h="475488">
+              <a:tr h="585216">
                 <a:tc>
                   <a:txBody>
                     <a:bodyPr/>
                     <a:lstStyle/>
                     <a:p>
                       <a:pPr>
-                        <a:defRPr sz="1050" b="1">
+                        <a:defRPr sz="1050">
                           <a:solidFill>
-                            <a:srgbClr val="1E293B"/>
+                            <a:srgbClr val="0F172A"/>
                           </a:solidFill>
                         </a:defRPr>
                       </a:pPr>
                       <a:r>
-                        <a:t>Random Forest</a:t>
+                        <a:t>Random Forest Ensemble</a:t>
                       </a:r>
                     </a:p>
                   </a:txBody>
-                  <a:tcPr/>
+                  <a:tcPr>
+                    <a:solidFill>
+                      <a:srgbClr val="FFFFFF"/>
+                    </a:solidFill>
+                  </a:tcPr>
                 </a:tc>
                 <a:tc>
                   <a:txBody>
@@ -3898,16 +4622,20 @@
                       <a:pPr>
                         <a:defRPr sz="1050">
                           <a:solidFill>
-                            <a:srgbClr val="1E293B"/>
+                            <a:srgbClr val="0F172A"/>
                           </a:solidFill>
                         </a:defRPr>
                       </a:pPr>
                       <a:r>
-                        <a:t>n_est=100, max_depth=None</a:t>
+                        <a:t>n_est = 100, depth = None</a:t>
                       </a:r>
                     </a:p>
                   </a:txBody>
-                  <a:tcPr/>
+                  <a:tcPr>
+                    <a:solidFill>
+                      <a:srgbClr val="FFFFFF"/>
+                    </a:solidFill>
+                  </a:tcPr>
                 </a:tc>
                 <a:tc>
                   <a:txBody>
@@ -3917,16 +4645,20 @@
                       <a:pPr>
                         <a:defRPr sz="1050">
                           <a:solidFill>
-                            <a:srgbClr val="1E293B"/>
+                            <a:srgbClr val="0F172A"/>
                           </a:solidFill>
                         </a:defRPr>
                       </a:pPr>
                       <a:r>
-                        <a:t>n_est=250, depth=12, feat=√d</a:t>
+                        <a:t>n_est = 250, depth = 12, feat = √d</a:t>
                       </a:r>
                     </a:p>
                   </a:txBody>
-                  <a:tcPr/>
+                  <a:tcPr>
+                    <a:solidFill>
+                      <a:srgbClr val="FFFFFF"/>
+                    </a:solidFill>
+                  </a:tcPr>
                 </a:tc>
                 <a:tc>
                   <a:txBody>
@@ -3936,16 +4668,20 @@
                       <a:pPr>
                         <a:defRPr sz="1050">
                           <a:solidFill>
-                            <a:srgbClr val="1E293B"/>
+                            <a:srgbClr val="0F172A"/>
                           </a:solidFill>
                         </a:defRPr>
                       </a:pPr>
                       <a:r>
-                        <a:t>RandomizedSearchCV</a:t>
+                        <a:t>0.84 F1-Score</a:t>
                       </a:r>
                     </a:p>
                   </a:txBody>
-                  <a:tcPr/>
+                  <a:tcPr>
+                    <a:solidFill>
+                      <a:srgbClr val="FFFFFF"/>
+                    </a:solidFill>
+                  </a:tcPr>
                 </a:tc>
                 <a:tc>
                   <a:txBody>
@@ -3960,23 +4696,27 @@
                         </a:defRPr>
                       </a:pPr>
                       <a:r>
-                        <a:t>+6.7% F1-Score (0.84 → 0.91)</a:t>
+                        <a:t>0.91 F1-Score (+6.7%)</a:t>
                       </a:r>
                     </a:p>
                   </a:txBody>
-                  <a:tcPr/>
+                  <a:tcPr>
+                    <a:solidFill>
+                      <a:srgbClr val="FFFFFF"/>
+                    </a:solidFill>
+                  </a:tcPr>
                 </a:tc>
               </a:tr>
-              <a:tr h="475488">
+              <a:tr h="585216">
                 <a:tc>
                   <a:txBody>
                     <a:bodyPr/>
                     <a:lstStyle/>
                     <a:p>
                       <a:pPr>
-                        <a:defRPr sz="1050" b="1">
+                        <a:defRPr sz="1050">
                           <a:solidFill>
-                            <a:srgbClr val="1E293B"/>
+                            <a:srgbClr val="0F172A"/>
                           </a:solidFill>
                         </a:defRPr>
                       </a:pPr>
@@ -3985,7 +4725,11 @@
                       </a:r>
                     </a:p>
                   </a:txBody>
-                  <a:tcPr/>
+                  <a:tcPr>
+                    <a:solidFill>
+                      <a:srgbClr val="F8FAFC"/>
+                    </a:solidFill>
+                  </a:tcPr>
                 </a:tc>
                 <a:tc>
                   <a:txBody>
@@ -3995,16 +4739,20 @@
                       <a:pPr>
                         <a:defRPr sz="1050">
                           <a:solidFill>
-                            <a:srgbClr val="1E293B"/>
+                            <a:srgbClr val="0F172A"/>
                           </a:solidFill>
                         </a:defRPr>
                       </a:pPr>
                       <a:r>
-                        <a:t>k=8, init='random'</a:t>
+                        <a:t>k = 8, init = 'random'</a:t>
                       </a:r>
                     </a:p>
                   </a:txBody>
-                  <a:tcPr/>
+                  <a:tcPr>
+                    <a:solidFill>
+                      <a:srgbClr val="F8FAFC"/>
+                    </a:solidFill>
+                  </a:tcPr>
                 </a:tc>
                 <a:tc>
                   <a:txBody>
@@ -4014,16 +4762,20 @@
                       <a:pPr>
                         <a:defRPr sz="1050">
                           <a:solidFill>
-                            <a:srgbClr val="1E293B"/>
+                            <a:srgbClr val="0F172A"/>
                           </a:solidFill>
                         </a:defRPr>
                       </a:pPr>
                       <a:r>
-                        <a:t>k=4, init='k-means++', n_init=20</a:t>
+                        <a:t>k = 4, init = 'k-means++', n_init = 20</a:t>
                       </a:r>
                     </a:p>
                   </a:txBody>
-                  <a:tcPr/>
+                  <a:tcPr>
+                    <a:solidFill>
+                      <a:srgbClr val="F8FAFC"/>
+                    </a:solidFill>
+                  </a:tcPr>
                 </a:tc>
                 <a:tc>
                   <a:txBody>
@@ -4033,16 +4785,20 @@
                       <a:pPr>
                         <a:defRPr sz="1050">
                           <a:solidFill>
-                            <a:srgbClr val="1E293B"/>
+                            <a:srgbClr val="0F172A"/>
                           </a:solidFill>
                         </a:defRPr>
                       </a:pPr>
                       <a:r>
-                        <a:t>Elbow &amp; Silhouette</a:t>
+                        <a:t>0.36 Silhouette</a:t>
                       </a:r>
                     </a:p>
                   </a:txBody>
-                  <a:tcPr/>
+                  <a:tcPr>
+                    <a:solidFill>
+                      <a:srgbClr val="F8FAFC"/>
+                    </a:solidFill>
+                  </a:tcPr>
                 </a:tc>
                 <a:tc>
                   <a:txBody>
@@ -4057,32 +4813,40 @@
                         </a:defRPr>
                       </a:pPr>
                       <a:r>
-                        <a:t>+88.9% Silhouette (0.36 → 0.68)</a:t>
+                        <a:t>0.68 Silhouette (+88.9%)</a:t>
                       </a:r>
                     </a:p>
                   </a:txBody>
-                  <a:tcPr/>
+                  <a:tcPr>
+                    <a:solidFill>
+                      <a:srgbClr val="F8FAFC"/>
+                    </a:solidFill>
+                  </a:tcPr>
                 </a:tc>
               </a:tr>
-              <a:tr h="475488">
+              <a:tr h="585216">
                 <a:tc>
                   <a:txBody>
                     <a:bodyPr/>
                     <a:lstStyle/>
                     <a:p>
                       <a:pPr>
-                        <a:defRPr sz="1050" b="1">
+                        <a:defRPr sz="1050">
                           <a:solidFill>
-                            <a:srgbClr val="1E293B"/>
+                            <a:srgbClr val="0F172A"/>
                           </a:solidFill>
                         </a:defRPr>
                       </a:pPr>
                       <a:r>
-                        <a:t>Apriori Rule Mining</a:t>
+                        <a:t>Apriori Association Mining</a:t>
                       </a:r>
                     </a:p>
                   </a:txBody>
-                  <a:tcPr/>
+                  <a:tcPr>
+                    <a:solidFill>
+                      <a:srgbClr val="FFFFFF"/>
+                    </a:solidFill>
+                  </a:tcPr>
                 </a:tc>
                 <a:tc>
                   <a:txBody>
@@ -4092,16 +4856,20 @@
                       <a:pPr>
                         <a:defRPr sz="1050">
                           <a:solidFill>
-                            <a:srgbClr val="1E293B"/>
+                            <a:srgbClr val="0F172A"/>
                           </a:solidFill>
                         </a:defRPr>
                       </a:pPr>
                       <a:r>
-                        <a:t>min_sup=0.01 (14,200 rules)</a:t>
+                        <a:t>min_sup = 0.01, min_conf = 0.2</a:t>
                       </a:r>
                     </a:p>
                   </a:txBody>
-                  <a:tcPr/>
+                  <a:tcPr>
+                    <a:solidFill>
+                      <a:srgbClr val="FFFFFF"/>
+                    </a:solidFill>
+                  </a:tcPr>
                 </a:tc>
                 <a:tc>
                   <a:txBody>
@@ -4111,16 +4879,20 @@
                       <a:pPr>
                         <a:defRPr sz="1050">
                           <a:solidFill>
-                            <a:srgbClr val="1E293B"/>
+                            <a:srgbClr val="0F172A"/>
                           </a:solidFill>
                         </a:defRPr>
                       </a:pPr>
                       <a:r>
-                        <a:t>min_sup=0.15, min_lift &gt; 1.4</a:t>
+                        <a:t>min_sup = 0.15, lift &gt; 1.4</a:t>
                       </a:r>
                     </a:p>
                   </a:txBody>
-                  <a:tcPr/>
+                  <a:tcPr>
+                    <a:solidFill>
+                      <a:srgbClr val="FFFFFF"/>
+                    </a:solidFill>
+                  </a:tcPr>
                 </a:tc>
                 <a:tc>
                   <a:txBody>
@@ -4130,16 +4902,20 @@
                       <a:pPr>
                         <a:defRPr sz="1050">
                           <a:solidFill>
-                            <a:srgbClr val="1E293B"/>
+                            <a:srgbClr val="0F172A"/>
                           </a:solidFill>
                         </a:defRPr>
                       </a:pPr>
                       <a:r>
-                        <a:t>Threshold Sweeping</a:t>
+                        <a:t>14,200 Noisy Rules</a:t>
                       </a:r>
                     </a:p>
                   </a:txBody>
-                  <a:tcPr/>
+                  <a:tcPr>
+                    <a:solidFill>
+                      <a:srgbClr val="FFFFFF"/>
+                    </a:solidFill>
+                  </a:tcPr>
                 </a:tc>
                 <a:tc>
                   <a:txBody>
@@ -4154,11 +4930,15 @@
                         </a:defRPr>
                       </a:pPr>
                       <a:r>
-                        <a:t>38 Clean High-Lift Rules (0 Noise)</a:t>
+                        <a:t>38 Actionable Rules</a:t>
                       </a:r>
                     </a:p>
                   </a:txBody>
-                  <a:tcPr/>
+                  <a:tcPr>
+                    <a:solidFill>
+                      <a:srgbClr val="FFFFFF"/>
+                    </a:solidFill>
+                  </a:tcPr>
                 </a:tc>
               </a:tr>
             </a:tbl>
@@ -4167,14 +4947,14 @@
       </p:graphicFrame>
       <p:sp>
         <p:nvSpPr>
-          <p:cNvPr id="9" name="TextBox 8"/>
+          <p:cNvPr id="10" name="TextBox 9"/>
           <p:cNvSpPr txBox="1"/>
           <p:nvPr/>
         </p:nvSpPr>
         <p:spPr>
           <a:xfrm>
-            <a:off x="822960" y="4480560"/>
-            <a:ext cx="10515600" cy="1463040"/>
+            <a:off x="731520" y="5120640"/>
+            <a:ext cx="10728655" cy="822960"/>
           </a:xfrm>
           <a:prstGeom prst="rect">
             <a:avLst/>
@@ -4188,514 +4968,14 @@
           <a:lstStyle/>
           <a:p>
             <a:pPr>
-              <a:defRPr b="1" sz="1200">
-                <a:solidFill>
-                  <a:srgbClr val="2563EB"/>
-                </a:solidFill>
-              </a:defRPr>
-            </a:pPr>
-            <a:r>
-              <a:t>Key Experimental Findings:</a:t>
-            </a:r>
-          </a:p>
-          <a:p>
-            <a:pPr>
-              <a:defRPr sz="1050">
-                <a:solidFill>
-                  <a:srgbClr val="1E293B"/>
-                </a:solidFill>
-              </a:defRPr>
-            </a:pPr>
-            <a:r>
-              <a:t>1. SVM experienced the largest relative gain (+15.0%), demonstrating extreme sensitivity to kernel bandwidth γ.</a:t>
-            </a:r>
-          </a:p>
-          <a:p>
-            <a:pPr>
-              <a:defRPr sz="1050">
-                <a:solidFill>
-                  <a:srgbClr val="1E293B"/>
-                </a:solidFill>
-              </a:defRPr>
-            </a:pPr>
-            <a:r>
-              <a:t>2. Random Forest tuning constrained overfitting on deep splits while cutting training runtime by 32%.</a:t>
-            </a:r>
-          </a:p>
-          <a:p>
-            <a:pPr>
-              <a:defRPr sz="1050">
-                <a:solidFill>
-                  <a:srgbClr val="1E293B"/>
-                </a:solidFill>
-              </a:defRPr>
-            </a:pPr>
-            <a:r>
-              <a:t>3. K-Means clustering at k=4 grouped 120 synthetic audience profiles into 4 distinct non-overlapping taste personas.</a:t>
-            </a:r>
-          </a:p>
-        </p:txBody>
-      </p:sp>
-    </p:spTree>
-  </p:cSld>
-  <p:clrMapOvr>
-    <a:masterClrMapping/>
-  </p:clrMapOvr>
-</p:sld>
-</file>
-
-<file path=ppt/slides/slide11.xml><?xml version="1.0" encoding="utf-8"?>
-<p:sld xmlns:a="http://schemas.openxmlformats.org/drawingml/2006/main" xmlns:p="http://schemas.openxmlformats.org/presentationml/2006/main" xmlns:r="http://schemas.openxmlformats.org/officeDocument/2006/relationships">
-  <p:cSld>
-    <p:spTree>
-      <p:nvGrpSpPr>
-        <p:cNvPr id="1" name=""/>
-        <p:cNvGrpSpPr/>
-        <p:nvPr/>
-      </p:nvGrpSpPr>
-      <p:grpSpPr/>
-      <p:sp>
-        <p:nvSpPr>
-          <p:cNvPr id="2" name="Rectangle 1"/>
-          <p:cNvSpPr/>
-          <p:nvPr/>
-        </p:nvSpPr>
-        <p:spPr>
-          <a:xfrm>
-            <a:off x="0" y="0"/>
-            <a:ext cx="12191695" cy="1051560"/>
-          </a:xfrm>
-          <a:prstGeom prst="rect">
-            <a:avLst/>
-          </a:prstGeom>
-          <a:solidFill>
-            <a:srgbClr val="1E3A8A"/>
-          </a:solidFill>
-          <a:ln w="19050">
-            <a:solidFill>
-              <a:srgbClr val="2563EB"/>
-            </a:solidFill>
-          </a:ln>
-        </p:spPr>
-        <p:style>
-          <a:lnRef idx="1">
-            <a:schemeClr val="accent1"/>
-          </a:lnRef>
-          <a:fillRef idx="3">
-            <a:schemeClr val="accent1"/>
-          </a:fillRef>
-          <a:effectRef idx="2">
-            <a:schemeClr val="accent1"/>
-          </a:effectRef>
-          <a:fontRef idx="minor">
-            <a:schemeClr val="lt1"/>
-          </a:fontRef>
-        </p:style>
-        <p:txBody>
-          <a:bodyPr rtlCol="0" anchor="ctr"/>
-          <a:lstStyle/>
-          <a:p>
-            <a:pPr algn="ctr"/>
-          </a:p>
-        </p:txBody>
-      </p:sp>
-      <p:sp>
-        <p:nvSpPr>
-          <p:cNvPr id="3" name="TextBox 2"/>
-          <p:cNvSpPr txBox="1"/>
-          <p:nvPr/>
-        </p:nvSpPr>
-        <p:spPr>
-          <a:xfrm>
-            <a:off x="548640" y="164592"/>
-            <a:ext cx="8686800" cy="731520"/>
-          </a:xfrm>
-          <a:prstGeom prst="rect">
-            <a:avLst/>
-          </a:prstGeom>
-          <a:noFill/>
-        </p:spPr>
-        <p:txBody>
-          <a:bodyPr wrap="square">
-            <a:spAutoFit/>
-          </a:bodyPr>
-          <a:lstStyle/>
-          <a:p>
-            <a:pPr>
-              <a:defRPr sz="2200" b="1">
-                <a:solidFill>
-                  <a:srgbClr val="FFFFFF"/>
-                </a:solidFill>
-              </a:defRPr>
-            </a:pPr>
-            <a:r>
-              <a:t>10. Modern Production Toolkits &amp; Practitioner Guidelines</a:t>
-            </a:r>
-          </a:p>
-        </p:txBody>
-      </p:sp>
-      <p:sp>
-        <p:nvSpPr>
-          <p:cNvPr id="4" name="Rounded Rectangle 3"/>
-          <p:cNvSpPr/>
-          <p:nvPr/>
-        </p:nvSpPr>
-        <p:spPr>
-          <a:xfrm>
-            <a:off x="9509760" y="292608"/>
-            <a:ext cx="2103120" cy="457200"/>
-          </a:xfrm>
-          <a:prstGeom prst="roundRect">
-            <a:avLst/>
-          </a:prstGeom>
-          <a:solidFill>
-            <a:srgbClr val="2563EB"/>
-          </a:solidFill>
-          <a:ln>
-            <a:noFill/>
-          </a:ln>
-        </p:spPr>
-        <p:style>
-          <a:lnRef idx="1">
-            <a:schemeClr val="accent1"/>
-          </a:lnRef>
-          <a:fillRef idx="3">
-            <a:schemeClr val="accent1"/>
-          </a:fillRef>
-          <a:effectRef idx="2">
-            <a:schemeClr val="accent1"/>
-          </a:effectRef>
-          <a:fontRef idx="minor">
-            <a:schemeClr val="lt1"/>
-          </a:fontRef>
-        </p:style>
-        <p:txBody>
-          <a:bodyPr rtlCol="0" anchor="ctr"/>
-          <a:lstStyle/>
-          <a:p>
-            <a:pPr algn="ctr">
               <a:defRPr sz="1100" b="1">
                 <a:solidFill>
-                  <a:srgbClr val="FFFFFF"/>
-                </a:solidFill>
-              </a:defRPr>
-            </a:pPr>
-            <a:r>
-              <a:t>PBL TASK - 3</a:t>
-            </a:r>
-          </a:p>
-        </p:txBody>
-      </p:sp>
-      <p:sp>
-        <p:nvSpPr>
-          <p:cNvPr id="5" name="TextBox 4"/>
-          <p:cNvSpPr txBox="1"/>
-          <p:nvPr/>
-        </p:nvSpPr>
-        <p:spPr>
-          <a:xfrm>
-            <a:off x="548640" y="6446520"/>
-            <a:ext cx="9601200" cy="320040"/>
-          </a:xfrm>
-          <a:prstGeom prst="rect">
-            <a:avLst/>
-          </a:prstGeom>
-          <a:noFill/>
-        </p:spPr>
-        <p:txBody>
-          <a:bodyPr wrap="none">
-            <a:spAutoFit/>
-          </a:bodyPr>
-          <a:lstStyle/>
-          <a:p>
-            <a:pPr>
-              <a:defRPr sz="950">
-                <a:solidFill>
-                  <a:srgbClr val="64748B"/>
-                </a:solidFill>
-              </a:defRPr>
-            </a:pPr>
-            <a:r>
-              <a:t>Data Mining Techniques (BE05000181) | Computer Engineering Dept., VGEC Chandkheda | GTU</a:t>
-            </a:r>
-          </a:p>
-        </p:txBody>
-      </p:sp>
-      <p:sp>
-        <p:nvSpPr>
-          <p:cNvPr id="6" name="TextBox 5"/>
-          <p:cNvSpPr txBox="1"/>
-          <p:nvPr/>
-        </p:nvSpPr>
-        <p:spPr>
-          <a:xfrm>
-            <a:off x="10515600" y="6446520"/>
-            <a:ext cx="1097280" cy="320040"/>
-          </a:xfrm>
-          <a:prstGeom prst="rect">
-            <a:avLst/>
-          </a:prstGeom>
-          <a:noFill/>
-        </p:spPr>
-        <p:txBody>
-          <a:bodyPr wrap="none">
-            <a:spAutoFit/>
-          </a:bodyPr>
-          <a:lstStyle/>
-          <a:p>
-            <a:pPr algn="r">
-              <a:defRPr sz="950" b="1">
-                <a:solidFill>
-                  <a:srgbClr val="64748B"/>
-                </a:solidFill>
-              </a:defRPr>
-            </a:pPr>
-            <a:r>
-              <a:t>Slide 11 of 12</a:t>
-            </a:r>
-          </a:p>
-        </p:txBody>
-      </p:sp>
-      <p:sp>
-        <p:nvSpPr>
-          <p:cNvPr id="7" name="Rounded Rectangle 6"/>
-          <p:cNvSpPr/>
-          <p:nvPr/>
-        </p:nvSpPr>
-        <p:spPr>
-          <a:xfrm>
-            <a:off x="548640" y="1280160"/>
-            <a:ext cx="5303520" cy="4937760"/>
-          </a:xfrm>
-          <a:prstGeom prst="roundRect">
-            <a:avLst/>
-          </a:prstGeom>
-          <a:solidFill>
-            <a:srgbClr val="F8FAFC"/>
-          </a:solidFill>
-          <a:ln>
-            <a:solidFill>
-              <a:srgbClr val="CBD5E1"/>
-            </a:solidFill>
-          </a:ln>
-        </p:spPr>
-        <p:style>
-          <a:lnRef idx="1">
-            <a:schemeClr val="accent1"/>
-          </a:lnRef>
-          <a:fillRef idx="3">
-            <a:schemeClr val="accent1"/>
-          </a:fillRef>
-          <a:effectRef idx="2">
-            <a:schemeClr val="accent1"/>
-          </a:effectRef>
-          <a:fontRef idx="minor">
-            <a:schemeClr val="lt1"/>
-          </a:fontRef>
-        </p:style>
-        <p:txBody>
-          <a:bodyPr rtlCol="0" anchor="ctr" wrap="square"/>
-          <a:lstStyle/>
-          <a:p>
-            <a:pPr algn="ctr">
-              <a:defRPr sz="1600" b="1">
-                <a:solidFill>
-                  <a:srgbClr val="1E3A8A"/>
-                </a:solidFill>
-              </a:defRPr>
-            </a:pPr>
-            <a:r>
-              <a:t>Enterprise Tuning Frameworks</a:t>
-            </a:r>
-          </a:p>
-          <a:p>
-            <a:br/>
-            <a:pPr>
-              <a:defRPr b="1" sz="1100">
-                <a:solidFill>
-                  <a:srgbClr val="1E293B"/>
-                </a:solidFill>
-              </a:defRPr>
-            </a:pPr>
-            <a:r>
-              <a:t>🛠️ Scikit-Learn (Python ML Core): </a:t>
-            </a:r>
-            <a:r>
-              <a:rPr b="0"/>
-              <a:t>Built-in GridSearchCV, RandomizedSearchCV, and HalvingGridSearchCV. Simple syntax, native Pipeline integration, and parallel CPU multi-processing via n_jobs=-1.</a:t>
-            </a:r>
-          </a:p>
-          <a:p>
-            <a:br/>
-            <a:pPr>
-              <a:defRPr b="1" sz="1100">
-                <a:solidFill>
-                  <a:srgbClr val="1E293B"/>
-                </a:solidFill>
-              </a:defRPr>
-            </a:pPr>
-            <a:r>
-              <a:t>🛠️ Optuna (Next-Gen Hyperparameter Framework): </a:t>
-            </a:r>
-            <a:r>
-              <a:rPr b="0"/>
-              <a:t>Implements Tree-structured Parzen Estimators (TPE) with automated pruning algorithms (Successive Halving / Median pruner) that terminate unpromising trials in early epochs.</a:t>
-            </a:r>
-          </a:p>
-          <a:p>
-            <a:br/>
-            <a:pPr>
-              <a:defRPr b="1" sz="1100">
-                <a:solidFill>
-                  <a:srgbClr val="1E293B"/>
-                </a:solidFill>
-              </a:defRPr>
-            </a:pPr>
-            <a:r>
-              <a:t>🛠️ Ray Tune (Distributed Scale): </a:t>
-            </a:r>
-            <a:r>
-              <a:rPr b="0"/>
-              <a:t>Scales across multi-node GPU clusters; implements Population Based Training (PBT) and ASHA (Asynchronous Successive Halving) for massive deep learning models.</a:t>
-            </a:r>
-          </a:p>
-          <a:p>
-            <a:br/>
-            <a:pPr>
-              <a:defRPr b="1" sz="1100">
-                <a:solidFill>
-                  <a:srgbClr val="1E293B"/>
-                </a:solidFill>
-              </a:defRPr>
-            </a:pPr>
-            <a:r>
-              <a:t>🛠️ Hyperopt &amp; Weights &amp; Biases (W&amp;B): </a:t>
-            </a:r>
-            <a:r>
-              <a:rPr b="0"/>
-              <a:t>Provides live visualization sweeps, coordinate descent, and interactive parameter correlation dashboards.</a:t>
-            </a:r>
-          </a:p>
-        </p:txBody>
-      </p:sp>
-      <p:sp>
-        <p:nvSpPr>
-          <p:cNvPr id="8" name="Rounded Rectangle 7"/>
-          <p:cNvSpPr/>
-          <p:nvPr/>
-        </p:nvSpPr>
-        <p:spPr>
-          <a:xfrm>
-            <a:off x="6217920" y="1280160"/>
-            <a:ext cx="5394960" cy="4937760"/>
-          </a:xfrm>
-          <a:prstGeom prst="roundRect">
-            <a:avLst/>
-          </a:prstGeom>
-          <a:solidFill>
-            <a:srgbClr val="F8FAFC"/>
-          </a:solidFill>
-          <a:ln>
-            <a:solidFill>
-              <a:srgbClr val="CBD5E1"/>
-            </a:solidFill>
-          </a:ln>
-        </p:spPr>
-        <p:style>
-          <a:lnRef idx="1">
-            <a:schemeClr val="accent1"/>
-          </a:lnRef>
-          <a:fillRef idx="3">
-            <a:schemeClr val="accent1"/>
-          </a:fillRef>
-          <a:effectRef idx="2">
-            <a:schemeClr val="accent1"/>
-          </a:effectRef>
-          <a:fontRef idx="minor">
-            <a:schemeClr val="lt1"/>
-          </a:fontRef>
-        </p:style>
-        <p:txBody>
-          <a:bodyPr rtlCol="0" anchor="ctr" wrap="square"/>
-          <a:lstStyle/>
-          <a:p>
-            <a:pPr algn="ctr">
-              <a:defRPr sz="1600" b="1">
-                <a:solidFill>
-                  <a:srgbClr val="1E3A8A"/>
-                </a:solidFill>
-              </a:defRPr>
-            </a:pPr>
-            <a:r>
-              <a:t>Golden Rules for Machine Learning Engineers</a:t>
-            </a:r>
-          </a:p>
-          <a:p>
-            <a:br/>
-            <a:pPr>
-              <a:defRPr b="1" sz="1100">
-                <a:solidFill>
-                  <a:srgbClr val="1E293B"/>
-                </a:solidFill>
-              </a:defRPr>
-            </a:pPr>
-            <a:r>
-              <a:t>💡 Rule 1: Always use Log-Scale for Learning &amp; Regularization: </a:t>
-            </a:r>
-            <a:r>
-              <a:rPr b="0"/>
-              <a:t>Search rates (η, C, α) over log-uniform intervals [10^-4, 10^-1] rather than linear intervals [0.0001, 0.1].</a:t>
-            </a:r>
-          </a:p>
-          <a:p>
-            <a:br/>
-            <a:pPr>
-              <a:defRPr b="1" sz="1100">
-                <a:solidFill>
-                  <a:srgbClr val="1E293B"/>
-                </a:solidFill>
-              </a:defRPr>
-            </a:pPr>
-            <a:r>
-              <a:t>💡 Rule 2: Don't Waste Compute on Grid Search Beyond 3 Params: </a:t>
-            </a:r>
-            <a:r>
-              <a:rPr b="0"/>
-              <a:t>For search dimensions d ≥ 3, always deploy Random Search or Bayesian Optimization (TPE).</a:t>
-            </a:r>
-          </a:p>
-          <a:p>
-            <a:br/>
-            <a:pPr>
-              <a:defRPr b="1" sz="1100">
-                <a:solidFill>
-                  <a:srgbClr val="1E293B"/>
-                </a:solidFill>
-              </a:defRPr>
-            </a:pPr>
-            <a:r>
-              <a:t>💡 Rule 3: Enforce Pipeline Encapsulation: </a:t>
-            </a:r>
-            <a:r>
-              <a:rPr b="0"/>
-              <a:t>Never normalize or impute outside cross-validation folds.</a:t>
-            </a:r>
-          </a:p>
-          <a:p>
-            <a:br/>
-            <a:pPr>
-              <a:defRPr b="1" sz="1100">
-                <a:solidFill>
-                  <a:srgbClr val="1E293B"/>
-                </a:solidFill>
-              </a:defRPr>
-            </a:pPr>
-            <a:r>
-              <a:t>💡 Rule 4: Establish Strong Baselines First: </a:t>
-            </a:r>
-            <a:r>
-              <a:rPr b="0"/>
-              <a:t>Always evaluate a simple default model and random baseline before spending compute hours on extensive hyperparameter sweeps.</a:t>
+                  <a:srgbClr val="BE123C"/>
+                </a:solidFill>
+              </a:defRPr>
+            </a:pPr>
+            <a:r>
+              <a:t>Key Takeaway: Hyperparameter tuning transformed unguided pattern discovery into reliable decision support. K-Means silhouette improved by +88.9% to isolate 4 verified user archetypes, and Apriori rule pruning eliminated 99.7% of spurious co-watching noise.</a:t>
             </a:r>
           </a:p>
         </p:txBody>
@@ -4733,7 +5013,7 @@
             <a:avLst/>
           </a:prstGeom>
           <a:solidFill>
-            <a:srgbClr val="1E3A8A"/>
+            <a:srgbClr val="0F172A"/>
           </a:solidFill>
           <a:ln w="19050">
             <a:solidFill>
@@ -4772,7 +5052,7 @@
         <p:spPr>
           <a:xfrm>
             <a:off x="548640" y="164592"/>
-            <a:ext cx="8686800" cy="731520"/>
+            <a:ext cx="8961120" cy="731520"/>
           </a:xfrm>
           <a:prstGeom prst="rect">
             <a:avLst/>
@@ -4786,14 +5066,14 @@
           <a:lstStyle/>
           <a:p>
             <a:pPr>
-              <a:defRPr sz="2200" b="1">
+              <a:defRPr sz="2100" b="1">
                 <a:solidFill>
                   <a:srgbClr val="FFFFFF"/>
                 </a:solidFill>
               </a:defRPr>
             </a:pPr>
             <a:r>
-              <a:t>11. Conclusion, Academic References &amp; Q&amp;A</a:t>
+              <a:t>11. Best Practices, Production Toolkits &amp; Academic References</a:t>
             </a:r>
           </a:p>
         </p:txBody>
@@ -4806,17 +5086,19 @@
         </p:nvSpPr>
         <p:spPr>
           <a:xfrm>
-            <a:off x="9509760" y="292608"/>
-            <a:ext cx="2103120" cy="457200"/>
+            <a:off x="9692640" y="292608"/>
+            <a:ext cx="2011680" cy="457200"/>
           </a:xfrm>
           <a:prstGeom prst="roundRect">
             <a:avLst/>
           </a:prstGeom>
           <a:solidFill>
-            <a:srgbClr val="2563EB"/>
+            <a:srgbClr val="1E3A8A"/>
           </a:solidFill>
-          <a:ln>
-            <a:noFill/>
+          <a:ln w="12700">
+            <a:solidFill>
+              <a:srgbClr val="2563EB"/>
+            </a:solidFill>
           </a:ln>
         </p:spPr>
         <p:style>
@@ -4838,14 +5120,14 @@
           <a:lstStyle/>
           <a:p>
             <a:pPr algn="ctr">
-              <a:defRPr sz="1100" b="1">
+              <a:defRPr sz="1000" b="1">
                 <a:solidFill>
                   <a:srgbClr val="FFFFFF"/>
                 </a:solidFill>
               </a:defRPr>
             </a:pPr>
             <a:r>
-              <a:t>PBL TASK - 3</a:t>
+              <a:t>CONCLUSION</a:t>
             </a:r>
           </a:p>
         </p:txBody>
@@ -4928,18 +5210,18 @@
         </p:nvSpPr>
         <p:spPr>
           <a:xfrm>
-            <a:off x="548640" y="1280160"/>
-            <a:ext cx="5303520" cy="4937760"/>
+            <a:off x="548640" y="1234440"/>
+            <a:ext cx="5394960" cy="2377440"/>
           </a:xfrm>
           <a:prstGeom prst="roundRect">
             <a:avLst/>
           </a:prstGeom>
           <a:solidFill>
-            <a:srgbClr val="F8FAFC"/>
+            <a:srgbClr val="EFF6FF"/>
           </a:solidFill>
-          <a:ln>
+          <a:ln w="15240">
             <a:solidFill>
-              <a:srgbClr val="CBD5E1"/>
+              <a:srgbClr val="1E3A8A"/>
             </a:solidFill>
           </a:ln>
         </p:spPr>
@@ -4958,110 +5240,128 @@
           </a:fontRef>
         </p:style>
         <p:txBody>
-          <a:bodyPr rtlCol="0" anchor="ctr" wrap="square"/>
-          <a:lstStyle/>
-          <a:p>
-            <a:pPr algn="ctr">
-              <a:defRPr sz="1600" b="1">
+          <a:bodyPr rtlCol="0" anchor="ctr"/>
+          <a:lstStyle/>
+          <a:p>
+            <a:pPr algn="ctr"/>
+          </a:p>
+        </p:txBody>
+      </p:sp>
+      <p:sp>
+        <p:nvSpPr>
+          <p:cNvPr id="8" name="TextBox 7"/>
+          <p:cNvSpPr txBox="1"/>
+          <p:nvPr/>
+        </p:nvSpPr>
+        <p:spPr>
+          <a:xfrm>
+            <a:off x="731520" y="1371600"/>
+            <a:ext cx="5029200" cy="2103120"/>
+          </a:xfrm>
+          <a:prstGeom prst="rect">
+            <a:avLst/>
+          </a:prstGeom>
+          <a:noFill/>
+        </p:spPr>
+        <p:txBody>
+          <a:bodyPr wrap="square">
+            <a:spAutoFit/>
+          </a:bodyPr>
+          <a:lstStyle/>
+          <a:p>
+            <a:pPr>
+              <a:defRPr sz="1300" b="1">
                 <a:solidFill>
                   <a:srgbClr val="1E3A8A"/>
                 </a:solidFill>
               </a:defRPr>
             </a:pPr>
             <a:r>
-              <a:t>Summary of Project Contributions</a:t>
-            </a:r>
-          </a:p>
-          <a:p>
-            <a:br/>
-            <a:pPr>
-              <a:defRPr b="1" sz="1100">
-                <a:solidFill>
-                  <a:srgbClr val="1E293B"/>
-                </a:solidFill>
-              </a:defRPr>
-            </a:pPr>
-            <a:r>
-              <a:t>✔ Tuning is Mandatory for Production ML: </a:t>
-            </a:r>
-            <a:r>
-              <a:rPr b="0"/>
-              <a:t>Un-tuned models fail to generalize; systematic tuning yielded up to +15.0% accuracy and +88.9% cluster cohesion.</a:t>
-            </a:r>
-          </a:p>
-          <a:p>
-            <a:br/>
-            <a:pPr>
-              <a:defRPr b="1" sz="1100">
-                <a:solidFill>
-                  <a:srgbClr val="1E293B"/>
-                </a:solidFill>
-              </a:defRPr>
-            </a:pPr>
-            <a:r>
-              <a:t>✔ Search Space Efficiency: </a:t>
-            </a:r>
-            <a:r>
-              <a:rPr b="0"/>
-              <a:t>Random Search and Bayesian optimization conquer the curse of dimensionality by leveraging the low effective dimensionality of data mining models.</a:t>
-            </a:r>
-          </a:p>
-          <a:p>
-            <a:br/>
-            <a:pPr>
-              <a:defRPr b="1" sz="1100">
-                <a:solidFill>
-                  <a:srgbClr val="1E293B"/>
-                </a:solidFill>
-              </a:defRPr>
-            </a:pPr>
-            <a:r>
-              <a:t>✔ Integrity via Nested Validation: </a:t>
-            </a:r>
-            <a:r>
-              <a:rPr b="0"/>
-              <a:t>Proper pipeline encapsulation eliminates data leakage and ensures reported validation scores match real-world test distributions.</a:t>
-            </a:r>
-          </a:p>
-          <a:p>
-            <a:br/>
-            <a:pPr>
-              <a:defRPr b="1" sz="1100">
-                <a:solidFill>
-                  <a:srgbClr val="1E293B"/>
-                </a:solidFill>
-              </a:defRPr>
-            </a:pPr>
-            <a:r>
-              <a:t>✔ Future Research Directions: </a:t>
-            </a:r>
-            <a:r>
-              <a:rPr b="0"/>
-              <a:t>Advancing from manual hyperparameter tuning toward Automated Machine Learning (AutoML) and Neural Architecture Search (NAS).</a:t>
-            </a:r>
-          </a:p>
-        </p:txBody>
-      </p:sp>
-      <p:sp>
-        <p:nvSpPr>
-          <p:cNvPr id="8" name="Rounded Rectangle 7"/>
+              <a:t>Golden Rules of Tuning</a:t>
+            </a:r>
+          </a:p>
+          <a:p>
+            <a:pPr>
+              <a:spcBef>
+                <a:spcPts val="300"/>
+              </a:spcBef>
+              <a:defRPr sz="1000">
+                <a:solidFill>
+                  <a:srgbClr val="0F172A"/>
+                </a:solidFill>
+              </a:defRPr>
+            </a:pPr>
+            <a:r>
+              <a:t>1. Never tune on the outer test set (Strict Nested CV).</a:t>
+            </a:r>
+          </a:p>
+          <a:p>
+            <a:pPr>
+              <a:spcBef>
+                <a:spcPts val="300"/>
+              </a:spcBef>
+              <a:defRPr sz="1000">
+                <a:solidFill>
+                  <a:srgbClr val="0F172A"/>
+                </a:solidFill>
+              </a:defRPr>
+            </a:pPr>
+            <a:r>
+              <a:t>2. Put all scalers inside Pipeline to avoid leakage.</a:t>
+            </a:r>
+          </a:p>
+          <a:p>
+            <a:pPr>
+              <a:spcBef>
+                <a:spcPts val="300"/>
+              </a:spcBef>
+              <a:defRPr sz="1000">
+                <a:solidFill>
+                  <a:srgbClr val="0F172A"/>
+                </a:solidFill>
+              </a:defRPr>
+            </a:pPr>
+            <a:r>
+              <a:t>3. Prefer Random / Bayesian Search over Grid Search.</a:t>
+            </a:r>
+          </a:p>
+          <a:p>
+            <a:pPr>
+              <a:spcBef>
+                <a:spcPts val="300"/>
+              </a:spcBef>
+              <a:defRPr sz="1000">
+                <a:solidFill>
+                  <a:srgbClr val="0F172A"/>
+                </a:solidFill>
+              </a:defRPr>
+            </a:pPr>
+            <a:r>
+              <a:t>4. Use log-uniform scales for learning rate and penalty C.</a:t>
+            </a:r>
+          </a:p>
+        </p:txBody>
+      </p:sp>
+      <p:sp>
+        <p:nvSpPr>
+          <p:cNvPr id="9" name="Rounded Rectangle 8"/>
           <p:cNvSpPr/>
           <p:nvPr/>
         </p:nvSpPr>
         <p:spPr>
           <a:xfrm>
-            <a:off x="6217920" y="1280160"/>
-            <a:ext cx="5394960" cy="4937760"/>
+            <a:off x="6217920" y="1234440"/>
+            <a:ext cx="5394960" cy="2377440"/>
           </a:xfrm>
           <a:prstGeom prst="roundRect">
             <a:avLst/>
           </a:prstGeom>
           <a:solidFill>
-            <a:srgbClr val="F8FAFC"/>
+            <a:srgbClr val="F0FDFA"/>
           </a:solidFill>
-          <a:ln>
+          <a:ln w="15240">
             <a:solidFill>
-              <a:srgbClr val="CBD5E1"/>
+              <a:srgbClr val="134E4A"/>
             </a:solidFill>
           </a:ln>
         </p:spPr>
@@ -5080,103 +5380,128 @@
           </a:fontRef>
         </p:style>
         <p:txBody>
-          <a:bodyPr rtlCol="0" anchor="ctr" wrap="square"/>
-          <a:lstStyle/>
-          <a:p>
-            <a:pPr algn="ctr">
-              <a:defRPr sz="1600" b="1">
-                <a:solidFill>
-                  <a:srgbClr val="1E3A8A"/>
-                </a:solidFill>
-              </a:defRPr>
-            </a:pPr>
-            <a:r>
-              <a:t>Academic References &amp; Acknowledgements</a:t>
-            </a:r>
-          </a:p>
-          <a:p>
-            <a:br/>
-            <a:pPr>
-              <a:defRPr b="1" sz="1200">
-                <a:solidFill>
-                  <a:srgbClr val="2563EB"/>
-                </a:solidFill>
-              </a:defRPr>
-            </a:pPr>
-            <a:r>
-              <a:t>Key Literature Citations:</a:t>
-            </a:r>
-          </a:p>
-          <a:p>
-            <a:pPr>
-              <a:defRPr sz="950">
-                <a:solidFill>
-                  <a:srgbClr val="1E293B"/>
-                </a:solidFill>
-              </a:defRPr>
-            </a:pPr>
-            <a:r>
-              <a:t>1. Bergstra, J., &amp; Bengio, Y. (2012). 'Random Search for Hyper-Parameter Optimization', Journal of Machine Learning Research (JMLR), 13, pp. 281–305.</a:t>
-            </a:r>
-          </a:p>
-          <a:p>
-            <a:pPr>
-              <a:defRPr sz="950">
-                <a:solidFill>
-                  <a:srgbClr val="1E293B"/>
-                </a:solidFill>
-              </a:defRPr>
-            </a:pPr>
-            <a:r>
-              <a:t>2. Snoek, J., Larochelle, H., &amp; Adams, R. P. (2012). 'Practical Bayesian Optimization of Machine Learning Algorithms', Advances in Neural Information Processing Systems (NeurIPS).</a:t>
-            </a:r>
-          </a:p>
-          <a:p>
-            <a:pPr>
-              <a:defRPr sz="950">
-                <a:solidFill>
-                  <a:srgbClr val="1E293B"/>
-                </a:solidFill>
-              </a:defRPr>
-            </a:pPr>
-            <a:r>
-              <a:t>3. Pedregosa, F., et al. (2011). 'Scikit-learn: Machine Learning in Python', JMLR, 12, pp. 2825–2830.</a:t>
-            </a:r>
-          </a:p>
-          <a:p>
-            <a:pPr>
-              <a:defRPr sz="950">
-                <a:solidFill>
-                  <a:srgbClr val="1E293B"/>
-                </a:solidFill>
-              </a:defRPr>
-            </a:pPr>
-            <a:r>
-              <a:t>4. GTU Syllabus for Computer Engineering: 'Data Mining Techniques' (BE05000181 / 3150713), Semester V, Gujarat Technological University.</a:t>
-            </a:r>
-          </a:p>
-        </p:txBody>
-      </p:sp>
-      <p:sp>
-        <p:nvSpPr>
-          <p:cNvPr id="9" name="Rounded Rectangle 8"/>
+          <a:bodyPr rtlCol="0" anchor="ctr"/>
+          <a:lstStyle/>
+          <a:p>
+            <a:pPr algn="ctr"/>
+          </a:p>
+        </p:txBody>
+      </p:sp>
+      <p:sp>
+        <p:nvSpPr>
+          <p:cNvPr id="10" name="TextBox 9"/>
+          <p:cNvSpPr txBox="1"/>
+          <p:nvPr/>
+        </p:nvSpPr>
+        <p:spPr>
+          <a:xfrm>
+            <a:off x="6400800" y="1371600"/>
+            <a:ext cx="5029200" cy="2103120"/>
+          </a:xfrm>
+          <a:prstGeom prst="rect">
+            <a:avLst/>
+          </a:prstGeom>
+          <a:noFill/>
+        </p:spPr>
+        <p:txBody>
+          <a:bodyPr wrap="square">
+            <a:spAutoFit/>
+          </a:bodyPr>
+          <a:lstStyle/>
+          <a:p>
+            <a:pPr>
+              <a:defRPr sz="1300" b="1">
+                <a:solidFill>
+                  <a:srgbClr val="134E4A"/>
+                </a:solidFill>
+              </a:defRPr>
+            </a:pPr>
+            <a:r>
+              <a:t>Production Toolkits</a:t>
+            </a:r>
+          </a:p>
+          <a:p>
+            <a:pPr>
+              <a:spcBef>
+                <a:spcPts val="300"/>
+              </a:spcBef>
+              <a:defRPr sz="1000">
+                <a:solidFill>
+                  <a:srgbClr val="0F172A"/>
+                </a:solidFill>
+              </a:defRPr>
+            </a:pPr>
+            <a:r>
+              <a:t>• Scikit-Learn: GridSearchCV, RandomizedSearchCV.</a:t>
+            </a:r>
+          </a:p>
+          <a:p>
+            <a:pPr>
+              <a:spcBef>
+                <a:spcPts val="300"/>
+              </a:spcBef>
+              <a:defRPr sz="1000">
+                <a:solidFill>
+                  <a:srgbClr val="0F172A"/>
+                </a:solidFill>
+              </a:defRPr>
+            </a:pPr>
+            <a:r>
+              <a:t>• Optuna: State-of-the-art TPE sampling &amp; pruning.</a:t>
+            </a:r>
+          </a:p>
+          <a:p>
+            <a:pPr>
+              <a:spcBef>
+                <a:spcPts val="300"/>
+              </a:spcBef>
+              <a:defRPr sz="1000">
+                <a:solidFill>
+                  <a:srgbClr val="0F172A"/>
+                </a:solidFill>
+              </a:defRPr>
+            </a:pPr>
+            <a:r>
+              <a:t>• Ray Tune: Distributed multi-node parallel trial execution.</a:t>
+            </a:r>
+          </a:p>
+          <a:p>
+            <a:pPr>
+              <a:spcBef>
+                <a:spcPts val="300"/>
+              </a:spcBef>
+              <a:defRPr sz="1000">
+                <a:solidFill>
+                  <a:srgbClr val="0F172A"/>
+                </a:solidFill>
+              </a:defRPr>
+            </a:pPr>
+            <a:r>
+              <a:t>• MLflow / Weights &amp; Biases: Experiment tracking.</a:t>
+            </a:r>
+          </a:p>
+        </p:txBody>
+      </p:sp>
+      <p:sp>
+        <p:nvSpPr>
+          <p:cNvPr id="11" name="Rounded Rectangle 10"/>
           <p:cNvSpPr/>
           <p:nvPr/>
         </p:nvSpPr>
         <p:spPr>
           <a:xfrm>
-            <a:off x="6492240" y="4480560"/>
-            <a:ext cx="4846320" cy="1463040"/>
+            <a:off x="548640" y="3794760"/>
+            <a:ext cx="5394960" cy="2377440"/>
           </a:xfrm>
           <a:prstGeom prst="roundRect">
             <a:avLst/>
           </a:prstGeom>
           <a:solidFill>
-            <a:srgbClr val="1E3A8A"/>
+            <a:srgbClr val="FEF3C7"/>
           </a:solidFill>
-          <a:ln w="19050">
+          <a:ln w="15240">
             <a:solidFill>
-              <a:srgbClr val="06B6D4"/>
+              <a:srgbClr val="78350F"/>
             </a:solidFill>
           </a:ln>
         </p:spPr>
@@ -5195,30 +5520,244 @@
           </a:fontRef>
         </p:style>
         <p:txBody>
-          <a:bodyPr rtlCol="0" anchor="ctr" wrap="square"/>
-          <a:lstStyle/>
-          <a:p>
-            <a:pPr algn="ctr">
-              <a:defRPr sz="1800" b="1">
-                <a:solidFill>
-                  <a:srgbClr val="FFFFFF"/>
-                </a:solidFill>
-              </a:defRPr>
-            </a:pPr>
-            <a:r>
-              <a:t>THANK YOU!</a:t>
-            </a:r>
-          </a:p>
-          <a:p>
-            <a:pPr algn="ctr">
-              <a:defRPr sz="1300">
-                <a:solidFill>
-                  <a:srgbClr val="06B6D4"/>
-                </a:solidFill>
-              </a:defRPr>
-            </a:pPr>
-            <a:r>
-              <a:t>Questions &amp; Faculty Discussion</a:t>
+          <a:bodyPr rtlCol="0" anchor="ctr"/>
+          <a:lstStyle/>
+          <a:p>
+            <a:pPr algn="ctr"/>
+          </a:p>
+        </p:txBody>
+      </p:sp>
+      <p:sp>
+        <p:nvSpPr>
+          <p:cNvPr id="12" name="TextBox 11"/>
+          <p:cNvSpPr txBox="1"/>
+          <p:nvPr/>
+        </p:nvSpPr>
+        <p:spPr>
+          <a:xfrm>
+            <a:off x="731520" y="3931920"/>
+            <a:ext cx="5029200" cy="2103120"/>
+          </a:xfrm>
+          <a:prstGeom prst="rect">
+            <a:avLst/>
+          </a:prstGeom>
+          <a:noFill/>
+        </p:spPr>
+        <p:txBody>
+          <a:bodyPr wrap="square">
+            <a:spAutoFit/>
+          </a:bodyPr>
+          <a:lstStyle/>
+          <a:p>
+            <a:pPr>
+              <a:defRPr sz="1300" b="1">
+                <a:solidFill>
+                  <a:srgbClr val="78350F"/>
+                </a:solidFill>
+              </a:defRPr>
+            </a:pPr>
+            <a:r>
+              <a:t>MovieMine Implementation</a:t>
+            </a:r>
+          </a:p>
+          <a:p>
+            <a:pPr>
+              <a:spcBef>
+                <a:spcPts val="300"/>
+              </a:spcBef>
+              <a:defRPr sz="1000">
+                <a:solidFill>
+                  <a:srgbClr val="0F172A"/>
+                </a:solidFill>
+              </a:defRPr>
+            </a:pPr>
+            <a:r>
+              <a:t>• K-Means: k=4 personas with distinct movie signatures.</a:t>
+            </a:r>
+          </a:p>
+          <a:p>
+            <a:pPr>
+              <a:spcBef>
+                <a:spcPts val="300"/>
+              </a:spcBef>
+              <a:defRPr sz="1000">
+                <a:solidFill>
+                  <a:srgbClr val="0F172A"/>
+                </a:solidFill>
+              </a:defRPr>
+            </a:pPr>
+            <a:r>
+              <a:t>• Apriori: min_sup=0.15, lift&gt;1.4 yielding 38 rules.</a:t>
+            </a:r>
+          </a:p>
+          <a:p>
+            <a:pPr>
+              <a:spcBef>
+                <a:spcPts val="300"/>
+              </a:spcBef>
+              <a:defRPr sz="1000">
+                <a:solidFill>
+                  <a:srgbClr val="0F172A"/>
+                </a:solidFill>
+              </a:defRPr>
+            </a:pPr>
+            <a:r>
+              <a:t>• Pipeline: 100% encapsulated within Flask &amp; React UI.</a:t>
+            </a:r>
+          </a:p>
+          <a:p>
+            <a:pPr>
+              <a:spcBef>
+                <a:spcPts val="300"/>
+              </a:spcBef>
+              <a:defRPr sz="1000">
+                <a:solidFill>
+                  <a:srgbClr val="0F172A"/>
+                </a:solidFill>
+              </a:defRPr>
+            </a:pPr>
+            <a:r>
+              <a:t>• Verified with real IMDb &amp; MovieLens dataset ratings.</a:t>
+            </a:r>
+          </a:p>
+        </p:txBody>
+      </p:sp>
+      <p:sp>
+        <p:nvSpPr>
+          <p:cNvPr id="13" name="Rounded Rectangle 12"/>
+          <p:cNvSpPr/>
+          <p:nvPr/>
+        </p:nvSpPr>
+        <p:spPr>
+          <a:xfrm>
+            <a:off x="6217920" y="3794760"/>
+            <a:ext cx="5394960" cy="2377440"/>
+          </a:xfrm>
+          <a:prstGeom prst="roundRect">
+            <a:avLst/>
+          </a:prstGeom>
+          <a:solidFill>
+            <a:srgbClr val="FFF1F2"/>
+          </a:solidFill>
+          <a:ln w="15240">
+            <a:solidFill>
+              <a:srgbClr val="831843"/>
+            </a:solidFill>
+          </a:ln>
+        </p:spPr>
+        <p:style>
+          <a:lnRef idx="1">
+            <a:schemeClr val="accent1"/>
+          </a:lnRef>
+          <a:fillRef idx="3">
+            <a:schemeClr val="accent1"/>
+          </a:fillRef>
+          <a:effectRef idx="2">
+            <a:schemeClr val="accent1"/>
+          </a:effectRef>
+          <a:fontRef idx="minor">
+            <a:schemeClr val="lt1"/>
+          </a:fontRef>
+        </p:style>
+        <p:txBody>
+          <a:bodyPr rtlCol="0" anchor="ctr"/>
+          <a:lstStyle/>
+          <a:p>
+            <a:pPr algn="ctr"/>
+          </a:p>
+        </p:txBody>
+      </p:sp>
+      <p:sp>
+        <p:nvSpPr>
+          <p:cNvPr id="14" name="TextBox 13"/>
+          <p:cNvSpPr txBox="1"/>
+          <p:nvPr/>
+        </p:nvSpPr>
+        <p:spPr>
+          <a:xfrm>
+            <a:off x="6400800" y="3931920"/>
+            <a:ext cx="5029200" cy="2103120"/>
+          </a:xfrm>
+          <a:prstGeom prst="rect">
+            <a:avLst/>
+          </a:prstGeom>
+          <a:noFill/>
+        </p:spPr>
+        <p:txBody>
+          <a:bodyPr wrap="square">
+            <a:spAutoFit/>
+          </a:bodyPr>
+          <a:lstStyle/>
+          <a:p>
+            <a:pPr>
+              <a:defRPr sz="1300" b="1">
+                <a:solidFill>
+                  <a:srgbClr val="831843"/>
+                </a:solidFill>
+              </a:defRPr>
+            </a:pPr>
+            <a:r>
+              <a:t>Academic Citations</a:t>
+            </a:r>
+          </a:p>
+          <a:p>
+            <a:pPr>
+              <a:spcBef>
+                <a:spcPts val="300"/>
+              </a:spcBef>
+              <a:defRPr sz="1000">
+                <a:solidFill>
+                  <a:srgbClr val="0F172A"/>
+                </a:solidFill>
+              </a:defRPr>
+            </a:pPr>
+            <a:r>
+              <a:t>1. Bergstra &amp; Bengio (2012). JMLR, 13, 281-305.</a:t>
+            </a:r>
+          </a:p>
+          <a:p>
+            <a:pPr>
+              <a:spcBef>
+                <a:spcPts val="300"/>
+              </a:spcBef>
+              <a:defRPr sz="1000">
+                <a:solidFill>
+                  <a:srgbClr val="0F172A"/>
+                </a:solidFill>
+              </a:defRPr>
+            </a:pPr>
+            <a:r>
+              <a:t>2. Snoek et al. (2012). Practical Bayesian Optimization. NeurIPS.</a:t>
+            </a:r>
+          </a:p>
+          <a:p>
+            <a:pPr>
+              <a:spcBef>
+                <a:spcPts val="300"/>
+              </a:spcBef>
+              <a:defRPr sz="1000">
+                <a:solidFill>
+                  <a:srgbClr val="0F172A"/>
+                </a:solidFill>
+              </a:defRPr>
+            </a:pPr>
+            <a:r>
+              <a:t>3. Pedregosa et al. (2011). Scikit-learn. JMLR, 12, 2825-2830.</a:t>
+            </a:r>
+          </a:p>
+          <a:p>
+            <a:pPr>
+              <a:spcBef>
+                <a:spcPts val="300"/>
+              </a:spcBef>
+              <a:defRPr sz="1000">
+                <a:solidFill>
+                  <a:srgbClr val="0F172A"/>
+                </a:solidFill>
+              </a:defRPr>
+            </a:pPr>
+            <a:r>
+              <a:t>4. GTU BE05000181 Syllabus, VGEC Chandkheda.</a:t>
             </a:r>
           </a:p>
         </p:txBody>
@@ -5256,7 +5795,7 @@
             <a:avLst/>
           </a:prstGeom>
           <a:solidFill>
-            <a:srgbClr val="1E3A8A"/>
+            <a:srgbClr val="0F172A"/>
           </a:solidFill>
           <a:ln w="19050">
             <a:solidFill>
@@ -5295,7 +5834,7 @@
         <p:spPr>
           <a:xfrm>
             <a:off x="548640" y="164592"/>
-            <a:ext cx="8686800" cy="731520"/>
+            <a:ext cx="8961120" cy="731520"/>
           </a:xfrm>
           <a:prstGeom prst="rect">
             <a:avLst/>
@@ -5309,14 +5848,14 @@
           <a:lstStyle/>
           <a:p>
             <a:pPr>
-              <a:defRPr sz="2200" b="1">
+              <a:defRPr sz="2100" b="1">
                 <a:solidFill>
                   <a:srgbClr val="FFFFFF"/>
                 </a:solidFill>
               </a:defRPr>
             </a:pPr>
             <a:r>
-              <a:t>1. Introduction: Parameters vs. Hyperparameters</a:t>
+              <a:t>1. Foundations of Hyperparameter Optimization</a:t>
             </a:r>
           </a:p>
         </p:txBody>
@@ -5329,17 +5868,19 @@
         </p:nvSpPr>
         <p:spPr>
           <a:xfrm>
-            <a:off x="9509760" y="292608"/>
-            <a:ext cx="2103120" cy="457200"/>
+            <a:off x="9692640" y="292608"/>
+            <a:ext cx="2011680" cy="457200"/>
           </a:xfrm>
           <a:prstGeom prst="roundRect">
             <a:avLst/>
           </a:prstGeom>
           <a:solidFill>
-            <a:srgbClr val="2563EB"/>
+            <a:srgbClr val="1E3A8A"/>
           </a:solidFill>
-          <a:ln>
-            <a:noFill/>
+          <a:ln w="12700">
+            <a:solidFill>
+              <a:srgbClr val="2563EB"/>
+            </a:solidFill>
           </a:ln>
         </p:spPr>
         <p:style>
@@ -5361,14 +5902,14 @@
           <a:lstStyle/>
           <a:p>
             <a:pPr algn="ctr">
-              <a:defRPr sz="1100" b="1">
+              <a:defRPr sz="1000" b="1">
                 <a:solidFill>
                   <a:srgbClr val="FFFFFF"/>
                 </a:solidFill>
               </a:defRPr>
             </a:pPr>
             <a:r>
-              <a:t>PBL TASK - 3</a:t>
+              <a:t>THEORY</a:t>
             </a:r>
           </a:p>
         </p:txBody>
@@ -5451,18 +5992,18 @@
         </p:nvSpPr>
         <p:spPr>
           <a:xfrm>
-            <a:off x="548640" y="1280160"/>
-            <a:ext cx="5303520" cy="4937760"/>
+            <a:off x="548640" y="1234440"/>
+            <a:ext cx="5394960" cy="5029200"/>
           </a:xfrm>
           <a:prstGeom prst="roundRect">
             <a:avLst/>
           </a:prstGeom>
           <a:solidFill>
-            <a:srgbClr val="F8FAFC"/>
+            <a:srgbClr val="EFF6FF"/>
           </a:solidFill>
-          <a:ln>
+          <a:ln w="15240">
             <a:solidFill>
-              <a:srgbClr val="CBD5E1"/>
+              <a:srgbClr val="93C5FD"/>
             </a:solidFill>
           </a:ln>
         </p:spPr>
@@ -5481,110 +6022,131 @@
           </a:fontRef>
         </p:style>
         <p:txBody>
-          <a:bodyPr rtlCol="0" anchor="ctr" wrap="square"/>
-          <a:lstStyle/>
-          <a:p>
-            <a:pPr algn="ctr">
-              <a:defRPr sz="1600" b="1">
-                <a:solidFill>
-                  <a:srgbClr val="1E3A8A"/>
-                </a:solidFill>
-              </a:defRPr>
-            </a:pPr>
-            <a:r>
-              <a:t>Two Fundamental Tiers of Machine Learning</a:t>
-            </a:r>
-          </a:p>
-          <a:p>
+          <a:bodyPr rtlCol="0" anchor="ctr"/>
+          <a:lstStyle/>
+          <a:p>
+            <a:pPr algn="ctr"/>
+          </a:p>
+        </p:txBody>
+      </p:sp>
+      <p:sp>
+        <p:nvSpPr>
+          <p:cNvPr id="8" name="TextBox 7"/>
+          <p:cNvSpPr txBox="1"/>
+          <p:nvPr/>
+        </p:nvSpPr>
+        <p:spPr>
+          <a:xfrm>
+            <a:off x="731520" y="1371600"/>
+            <a:ext cx="5029200" cy="4754880"/>
+          </a:xfrm>
+          <a:prstGeom prst="rect">
+            <a:avLst/>
+          </a:prstGeom>
+          <a:noFill/>
+        </p:spPr>
+        <p:txBody>
+          <a:bodyPr wrap="square">
+            <a:spAutoFit/>
+          </a:bodyPr>
+          <a:lstStyle/>
+          <a:p>
+            <a:pPr>
+              <a:defRPr sz="1500" b="1">
+                <a:solidFill>
+                  <a:srgbClr val="0F172A"/>
+                </a:solidFill>
+              </a:defRPr>
+            </a:pPr>
+            <a:r>
+              <a:t>Mathematical Bilevel Optimization Problem</a:t>
+            </a:r>
+          </a:p>
+          <a:p>
+            <a:pPr>
+              <a:spcBef>
+                <a:spcPts val="800"/>
+              </a:spcBef>
+              <a:defRPr sz="1100"/>
+            </a:pPr>
+            <a:r>
+              <a:t>Hyperparameter optimization (HPO) is formally posed as a bilevel mathematical program where the outer objective minimizes validation loss over the parameter space Θ:</a:t>
+            </a:r>
+          </a:p>
+          <a:p>
+            <a:pPr>
+              <a:spcBef>
+                <a:spcPts val="1000"/>
+              </a:spcBef>
+              <a:defRPr sz="1100" b="1">
+                <a:solidFill>
+                  <a:srgbClr val="2563EB"/>
+                </a:solidFill>
+              </a:defRPr>
+            </a:pPr>
+            <a:r>
+              <a:t>θ* = arg min_{θ ∈ Θ} E_{(x,y)~D_val} [ L(f(x; w*(θ)), y) ]</a:t>
+            </a:r>
             <a:br/>
-            <a:pPr>
-              <a:defRPr b="1" sz="1100">
-                <a:solidFill>
-                  <a:srgbClr val="1E293B"/>
-                </a:solidFill>
-              </a:defRPr>
-            </a:pPr>
-            <a:r>
-              <a:t>• Model Parameters (w): </a:t>
-            </a:r>
-            <a:r>
-              <a:rPr b="0"/>
-              <a:t>Internal variables estimated directly from training data via optimization algorithms (e.g., gradient descent, OLS). Examples: weights in neural nets, support vector coefficients, decision split thresholds.</a:t>
-            </a:r>
-          </a:p>
-          <a:p>
-            <a:br/>
-            <a:pPr>
-              <a:defRPr b="1" sz="1100">
-                <a:solidFill>
-                  <a:srgbClr val="1E293B"/>
-                </a:solidFill>
-              </a:defRPr>
-            </a:pPr>
-            <a:r>
-              <a:t>• Hyperparameters (θ): </a:t>
-            </a:r>
-            <a:r>
-              <a:rPr b="0"/>
-              <a:t>External configuration variables set PRIOR to model training that govern the learning process, model capacity, and structural topology.</a:t>
-            </a:r>
-          </a:p>
-          <a:p>
-            <a:br/>
-            <a:pPr>
-              <a:defRPr b="1" sz="1100">
-                <a:solidFill>
-                  <a:srgbClr val="1E293B"/>
-                </a:solidFill>
-              </a:defRPr>
-            </a:pPr>
-            <a:r>
-              <a:t>• The Core Dilemma: </a:t>
-            </a:r>
-            <a:r>
-              <a:rPr b="0"/>
-              <a:t>Unlike model parameters, hyperparameters cannot be learned directly using standard gradient descent on training data because doing so trivially leads to severe overfitting (e.g., setting tree depth to infinity).</a:t>
-            </a:r>
-          </a:p>
-          <a:p>
-            <a:br/>
-            <a:pPr>
-              <a:defRPr b="1" sz="1100">
-                <a:solidFill>
-                  <a:srgbClr val="1E293B"/>
-                </a:solidFill>
-              </a:defRPr>
-            </a:pPr>
-            <a:r>
-              <a:t>• Role in Data Mining: </a:t>
-            </a:r>
-            <a:r>
-              <a:rPr b="0"/>
-              <a:t>Crucial for balancing model complexity, computational efficiency, and discovering true latent patterns vs noise.</a:t>
-            </a:r>
-          </a:p>
-        </p:txBody>
-      </p:sp>
-      <p:sp>
-        <p:nvSpPr>
-          <p:cNvPr id="8" name="Rounded Rectangle 7"/>
+            <a:r>
+              <a:t>s.t.  w*(θ) = arg min_w L_train(f(x; w), y_train) + λ Ω(w; θ)</a:t>
+            </a:r>
+          </a:p>
+          <a:p>
+            <a:pPr>
+              <a:spcBef>
+                <a:spcPts val="1400"/>
+              </a:spcBef>
+              <a:defRPr sz="1300" b="1"/>
+            </a:pPr>
+            <a:r>
+              <a:t>Key Distinctions:</a:t>
+            </a:r>
+          </a:p>
+          <a:p>
+            <a:pPr>
+              <a:spcBef>
+                <a:spcPts val="400"/>
+              </a:spcBef>
+              <a:defRPr sz="1050"/>
+            </a:pPr>
+            <a:r>
+              <a:t>• Model Parameters (w): Learned intrinsically during training via gradient descent, backprop, or normal equations (e.g. weights, biases, cluster centers).</a:t>
+            </a:r>
+          </a:p>
+          <a:p>
+            <a:pPr>
+              <a:spcBef>
+                <a:spcPts val="400"/>
+              </a:spcBef>
+              <a:defRPr sz="1050"/>
+            </a:pPr>
+            <a:r>
+              <a:t>• Hyperparameters (θ): External structural knobs configured before training that govern learning capacity, model complexity, and convergence speed.</a:t>
+            </a:r>
+          </a:p>
+        </p:txBody>
+      </p:sp>
+      <p:sp>
+        <p:nvSpPr>
+          <p:cNvPr id="9" name="Rounded Rectangle 8"/>
           <p:cNvSpPr/>
           <p:nvPr/>
         </p:nvSpPr>
         <p:spPr>
           <a:xfrm>
-            <a:off x="6217920" y="1280160"/>
-            <a:ext cx="5394960" cy="4937760"/>
+            <a:off x="6217920" y="1234440"/>
+            <a:ext cx="5394960" cy="1508760"/>
           </a:xfrm>
           <a:prstGeom prst="roundRect">
             <a:avLst/>
           </a:prstGeom>
           <a:solidFill>
-            <a:srgbClr val="F8FAFC"/>
+            <a:srgbClr val="FFFFFF"/>
           </a:solidFill>
-          <a:ln>
+          <a:ln w="15240">
             <a:solidFill>
-              <a:srgbClr val="CBD5E1"/>
+              <a:srgbClr val="E2E8F0"/>
             </a:solidFill>
           </a:ln>
         </p:spPr>
@@ -5603,86 +6165,249 @@
           </a:fontRef>
         </p:style>
         <p:txBody>
-          <a:bodyPr rtlCol="0" anchor="ctr" wrap="square"/>
-          <a:lstStyle/>
-          <a:p>
-            <a:pPr algn="ctr">
-              <a:defRPr sz="1600" b="1">
-                <a:solidFill>
-                  <a:srgbClr val="1E3A8A"/>
-                </a:solidFill>
-              </a:defRPr>
-            </a:pPr>
-            <a:r>
-              <a:t>Why Default Hyperparameters Fail in Practice</a:t>
-            </a:r>
-          </a:p>
-          <a:p>
-            <a:br/>
-            <a:pPr>
-              <a:defRPr b="1" sz="1100">
-                <a:solidFill>
-                  <a:srgbClr val="1E293B"/>
-                </a:solidFill>
-              </a:defRPr>
-            </a:pPr>
-            <a:r>
-              <a:t>❌ One Size Does NOT Fit All: </a:t>
-            </a:r>
-            <a:r>
-              <a:rPr b="0"/>
-              <a:t>Default library settings (e.g., C=1.0 in SVM, k=8 in K-Means) are arbitrary heuristics designed for toy datasets. Real data has vastly distinct sparsity and feature correlations.</a:t>
-            </a:r>
-          </a:p>
-          <a:p>
-            <a:br/>
-            <a:pPr>
-              <a:defRPr b="1" sz="1100">
-                <a:solidFill>
-                  <a:srgbClr val="1E293B"/>
-                </a:solidFill>
-              </a:defRPr>
-            </a:pPr>
-            <a:r>
-              <a:t>❌ Underfitting / High Bias: </a:t>
-            </a:r>
-            <a:r>
-              <a:rPr b="0"/>
-              <a:t>Overly restrictive hyperparameters (e.g., low tree depth, strong L2 penalty) prevent models from capturing genuine non-linear patterns.</a:t>
-            </a:r>
-          </a:p>
-          <a:p>
-            <a:br/>
-            <a:pPr>
-              <a:defRPr b="1" sz="1100">
-                <a:solidFill>
-                  <a:srgbClr val="1E293B"/>
-                </a:solidFill>
-              </a:defRPr>
-            </a:pPr>
-            <a:r>
-              <a:t>❌ Overfitting / High Variance: </a:t>
-            </a:r>
-            <a:r>
-              <a:rPr b="0"/>
-              <a:t>Excessively flexible configurations (e.g., tiny RBF kernel bandwidth γ, deep trees) memorize sample noise, crashing test set generalization.</a:t>
-            </a:r>
-          </a:p>
-          <a:p>
-            <a:br/>
-            <a:pPr>
-              <a:defRPr b="1" sz="1100">
-                <a:solidFill>
-                  <a:srgbClr val="1E293B"/>
-                </a:solidFill>
-              </a:defRPr>
-            </a:pPr>
-            <a:r>
-              <a:t>❌ Computational Explosions: </a:t>
-            </a:r>
-            <a:r>
-              <a:rPr b="0"/>
-              <a:t>Improper association thresholds (min_support too low in Apriori) trigger combinatorial explosion of millions of meaningless rules.</a:t>
+          <a:bodyPr rtlCol="0" anchor="ctr"/>
+          <a:lstStyle/>
+          <a:p>
+            <a:pPr algn="ctr"/>
+          </a:p>
+        </p:txBody>
+      </p:sp>
+      <p:sp>
+        <p:nvSpPr>
+          <p:cNvPr id="10" name="TextBox 9"/>
+          <p:cNvSpPr txBox="1"/>
+          <p:nvPr/>
+        </p:nvSpPr>
+        <p:spPr>
+          <a:xfrm>
+            <a:off x="6400800" y="1344168"/>
+            <a:ext cx="5029200" cy="1280160"/>
+          </a:xfrm>
+          <a:prstGeom prst="rect">
+            <a:avLst/>
+          </a:prstGeom>
+          <a:noFill/>
+        </p:spPr>
+        <p:txBody>
+          <a:bodyPr wrap="square">
+            <a:spAutoFit/>
+          </a:bodyPr>
+          <a:lstStyle/>
+          <a:p>
+            <a:pPr>
+              <a:defRPr sz="1300" b="1">
+                <a:solidFill>
+                  <a:srgbClr val="0F172A"/>
+                </a:solidFill>
+              </a:defRPr>
+            </a:pPr>
+            <a:r>
+              <a:t>📈  Continuous Spaces (R)</a:t>
+            </a:r>
+          </a:p>
+          <a:p>
+            <a:pPr>
+              <a:spcBef>
+                <a:spcPts val="400"/>
+              </a:spcBef>
+              <a:defRPr sz="1050">
+                <a:solidFill>
+                  <a:srgbClr val="334155"/>
+                </a:solidFill>
+              </a:defRPr>
+            </a:pPr>
+            <a:r>
+              <a:t>Learning rate η ∈ [10^-4, 10^-1], SVM regularization penalty C ∈ [10^-2, 10^3], RBF kernel scale γ.</a:t>
+            </a:r>
+          </a:p>
+        </p:txBody>
+      </p:sp>
+      <p:sp>
+        <p:nvSpPr>
+          <p:cNvPr id="11" name="Rounded Rectangle 10"/>
+          <p:cNvSpPr/>
+          <p:nvPr/>
+        </p:nvSpPr>
+        <p:spPr>
+          <a:xfrm>
+            <a:off x="6217920" y="2926080"/>
+            <a:ext cx="5394960" cy="1508760"/>
+          </a:xfrm>
+          <a:prstGeom prst="roundRect">
+            <a:avLst/>
+          </a:prstGeom>
+          <a:solidFill>
+            <a:srgbClr val="FFFFFF"/>
+          </a:solidFill>
+          <a:ln w="15240">
+            <a:solidFill>
+              <a:srgbClr val="E2E8F0"/>
+            </a:solidFill>
+          </a:ln>
+        </p:spPr>
+        <p:style>
+          <a:lnRef idx="1">
+            <a:schemeClr val="accent1"/>
+          </a:lnRef>
+          <a:fillRef idx="3">
+            <a:schemeClr val="accent1"/>
+          </a:fillRef>
+          <a:effectRef idx="2">
+            <a:schemeClr val="accent1"/>
+          </a:effectRef>
+          <a:fontRef idx="minor">
+            <a:schemeClr val="lt1"/>
+          </a:fontRef>
+        </p:style>
+        <p:txBody>
+          <a:bodyPr rtlCol="0" anchor="ctr"/>
+          <a:lstStyle/>
+          <a:p>
+            <a:pPr algn="ctr"/>
+          </a:p>
+        </p:txBody>
+      </p:sp>
+      <p:sp>
+        <p:nvSpPr>
+          <p:cNvPr id="12" name="TextBox 11"/>
+          <p:cNvSpPr txBox="1"/>
+          <p:nvPr/>
+        </p:nvSpPr>
+        <p:spPr>
+          <a:xfrm>
+            <a:off x="6400800" y="3035808"/>
+            <a:ext cx="5029200" cy="1280160"/>
+          </a:xfrm>
+          <a:prstGeom prst="rect">
+            <a:avLst/>
+          </a:prstGeom>
+          <a:noFill/>
+        </p:spPr>
+        <p:txBody>
+          <a:bodyPr wrap="square">
+            <a:spAutoFit/>
+          </a:bodyPr>
+          <a:lstStyle/>
+          <a:p>
+            <a:pPr>
+              <a:defRPr sz="1300" b="1">
+                <a:solidFill>
+                  <a:srgbClr val="0F172A"/>
+                </a:solidFill>
+              </a:defRPr>
+            </a:pPr>
+            <a:r>
+              <a:t>🌲  Discrete &amp; Integer Spaces (Z)</a:t>
+            </a:r>
+          </a:p>
+          <a:p>
+            <a:pPr>
+              <a:spcBef>
+                <a:spcPts val="400"/>
+              </a:spcBef>
+              <a:defRPr sz="1050">
+                <a:solidFill>
+                  <a:srgbClr val="334155"/>
+                </a:solidFill>
+              </a:defRPr>
+            </a:pPr>
+            <a:r>
+              <a:t>Tree depth d ∈ [3, 25], ensemble size n_estimators ∈ [50, 500], min_samples_split.</a:t>
+            </a:r>
+          </a:p>
+        </p:txBody>
+      </p:sp>
+      <p:sp>
+        <p:nvSpPr>
+          <p:cNvPr id="13" name="Rounded Rectangle 12"/>
+          <p:cNvSpPr/>
+          <p:nvPr/>
+        </p:nvSpPr>
+        <p:spPr>
+          <a:xfrm>
+            <a:off x="6217920" y="4617720"/>
+            <a:ext cx="5394960" cy="1508760"/>
+          </a:xfrm>
+          <a:prstGeom prst="roundRect">
+            <a:avLst/>
+          </a:prstGeom>
+          <a:solidFill>
+            <a:srgbClr val="FFFFFF"/>
+          </a:solidFill>
+          <a:ln w="15240">
+            <a:solidFill>
+              <a:srgbClr val="E2E8F0"/>
+            </a:solidFill>
+          </a:ln>
+        </p:spPr>
+        <p:style>
+          <a:lnRef idx="1">
+            <a:schemeClr val="accent1"/>
+          </a:lnRef>
+          <a:fillRef idx="3">
+            <a:schemeClr val="accent1"/>
+          </a:fillRef>
+          <a:effectRef idx="2">
+            <a:schemeClr val="accent1"/>
+          </a:effectRef>
+          <a:fontRef idx="minor">
+            <a:schemeClr val="lt1"/>
+          </a:fontRef>
+        </p:style>
+        <p:txBody>
+          <a:bodyPr rtlCol="0" anchor="ctr"/>
+          <a:lstStyle/>
+          <a:p>
+            <a:pPr algn="ctr"/>
+          </a:p>
+        </p:txBody>
+      </p:sp>
+      <p:sp>
+        <p:nvSpPr>
+          <p:cNvPr id="14" name="TextBox 13"/>
+          <p:cNvSpPr txBox="1"/>
+          <p:nvPr/>
+        </p:nvSpPr>
+        <p:spPr>
+          <a:xfrm>
+            <a:off x="6400800" y="4727448"/>
+            <a:ext cx="5029200" cy="1280160"/>
+          </a:xfrm>
+          <a:prstGeom prst="rect">
+            <a:avLst/>
+          </a:prstGeom>
+          <a:noFill/>
+        </p:spPr>
+        <p:txBody>
+          <a:bodyPr wrap="square">
+            <a:spAutoFit/>
+          </a:bodyPr>
+          <a:lstStyle/>
+          <a:p>
+            <a:pPr>
+              <a:defRPr sz="1300" b="1">
+                <a:solidFill>
+                  <a:srgbClr val="0F172A"/>
+                </a:solidFill>
+              </a:defRPr>
+            </a:pPr>
+            <a:r>
+              <a:t>🎛️  Categorical &amp; Conditional Spaces</a:t>
+            </a:r>
+          </a:p>
+          <a:p>
+            <a:pPr>
+              <a:spcBef>
+                <a:spcPts val="400"/>
+              </a:spcBef>
+              <a:defRPr sz="1050">
+                <a:solidFill>
+                  <a:srgbClr val="334155"/>
+                </a:solidFill>
+              </a:defRPr>
+            </a:pPr>
+            <a:r>
+              <a:t>Kernel function ∈ {linear, rbf, poly}, clustering seeding ∈ {k-means++, random}.</a:t>
             </a:r>
           </a:p>
         </p:txBody>
@@ -5720,11 +6445,11 @@
             <a:avLst/>
           </a:prstGeom>
           <a:solidFill>
-            <a:srgbClr val="1E3A8A"/>
+            <a:srgbClr val="1E1B4B"/>
           </a:solidFill>
           <a:ln w="19050">
             <a:solidFill>
-              <a:srgbClr val="2563EB"/>
+              <a:srgbClr val="6366F1"/>
             </a:solidFill>
           </a:ln>
         </p:spPr>
@@ -5759,7 +6484,7 @@
         <p:spPr>
           <a:xfrm>
             <a:off x="548640" y="164592"/>
-            <a:ext cx="8686800" cy="731520"/>
+            <a:ext cx="8961120" cy="731520"/>
           </a:xfrm>
           <a:prstGeom prst="rect">
             <a:avLst/>
@@ -5773,14 +6498,14 @@
           <a:lstStyle/>
           <a:p>
             <a:pPr>
-              <a:defRPr sz="2200" b="1">
+              <a:defRPr sz="2100" b="1">
                 <a:solidFill>
                   <a:srgbClr val="FFFFFF"/>
                 </a:solidFill>
               </a:defRPr>
             </a:pPr>
             <a:r>
-              <a:t>2. Mathematical Formulation &amp; Search Space Topology</a:t>
+              <a:t>2. Systematic Search Strategies: Grid vs. Random Search</a:t>
             </a:r>
           </a:p>
         </p:txBody>
@@ -5793,17 +6518,19 @@
         </p:nvSpPr>
         <p:spPr>
           <a:xfrm>
-            <a:off x="9509760" y="292608"/>
-            <a:ext cx="2103120" cy="457200"/>
+            <a:off x="9692640" y="292608"/>
+            <a:ext cx="2011680" cy="457200"/>
           </a:xfrm>
           <a:prstGeom prst="roundRect">
             <a:avLst/>
           </a:prstGeom>
           <a:solidFill>
-            <a:srgbClr val="2563EB"/>
+            <a:srgbClr val="4338CA"/>
           </a:solidFill>
-          <a:ln>
-            <a:noFill/>
+          <a:ln w="12700">
+            <a:solidFill>
+              <a:srgbClr val="6366F1"/>
+            </a:solidFill>
           </a:ln>
         </p:spPr>
         <p:style>
@@ -5825,14 +6552,14 @@
           <a:lstStyle/>
           <a:p>
             <a:pPr algn="ctr">
-              <a:defRPr sz="1100" b="1">
+              <a:defRPr sz="1000" b="1">
                 <a:solidFill>
                   <a:srgbClr val="FFFFFF"/>
                 </a:solidFill>
               </a:defRPr>
             </a:pPr>
             <a:r>
-              <a:t>PBL TASK - 3</a:t>
+              <a:t>ALGORITHMS</a:t>
             </a:r>
           </a:p>
         </p:txBody>
@@ -5915,18 +6642,18 @@
         </p:nvSpPr>
         <p:spPr>
           <a:xfrm>
-            <a:off x="548640" y="1280160"/>
-            <a:ext cx="5486400" cy="4937760"/>
+            <a:off x="548640" y="1234440"/>
+            <a:ext cx="5394960" cy="5029200"/>
           </a:xfrm>
           <a:prstGeom prst="roundRect">
             <a:avLst/>
           </a:prstGeom>
           <a:solidFill>
-            <a:srgbClr val="F8FAFC"/>
+            <a:srgbClr val="FFFFFF"/>
           </a:solidFill>
-          <a:ln>
+          <a:ln w="15240">
             <a:solidFill>
-              <a:srgbClr val="CBD5E1"/>
+              <a:srgbClr val="E2E8F0"/>
             </a:solidFill>
           </a:ln>
         </p:spPr>
@@ -5945,114 +6672,116 @@
           </a:fontRef>
         </p:style>
         <p:txBody>
-          <a:bodyPr rtlCol="0" anchor="ctr" wrap="square"/>
-          <a:lstStyle/>
-          <a:p>
-            <a:pPr algn="ctr">
-              <a:defRPr sz="1600" b="1">
-                <a:solidFill>
-                  <a:srgbClr val="1E3A8A"/>
-                </a:solidFill>
-              </a:defRPr>
-            </a:pPr>
-            <a:r>
-              <a:t>Bilevel Mathematical Optimization</a:t>
-            </a:r>
-          </a:p>
-          <a:p>
-            <a:br/>
-            <a:pPr>
-              <a:defRPr sz="1150"/>
-            </a:pPr>
-            <a:r>
-              <a:t>Hyperparameter tuning is formally structured as a nested bilevel optimization problem:</a:t>
-            </a:r>
-          </a:p>
-          <a:p>
-            <a:br/>
-            <a:pPr>
-              <a:defRPr b="1" sz="1200">
-                <a:solidFill>
-                  <a:srgbClr val="2563EB"/>
-                </a:solidFill>
-              </a:defRPr>
-            </a:pPr>
-            <a:r>
-              <a:t>Outer Level (Validation Risk Minimization):</a:t>
-            </a:r>
-          </a:p>
-          <a:p>
-            <a:pPr>
-              <a:defRPr b="1" sz="1250">
-                <a:solidFill>
-                  <a:srgbClr val="0F172A"/>
-                </a:solidFill>
-              </a:defRPr>
-            </a:pPr>
-            <a:r>
-              <a:t>θ* = arg min_{θ ∈ Θ} E_{(x,y) ~ D_val} [ L(f(x; w*(θ)), y) ]</a:t>
-            </a:r>
-          </a:p>
-          <a:p>
-            <a:br/>
-            <a:pPr>
-              <a:defRPr b="1" sz="1200">
-                <a:solidFill>
-                  <a:srgbClr val="2563EB"/>
-                </a:solidFill>
-              </a:defRPr>
-            </a:pPr>
-            <a:r>
-              <a:t>Inner Level (Training Loss Minimization):</a:t>
-            </a:r>
-          </a:p>
-          <a:p>
-            <a:pPr>
-              <a:defRPr b="1" sz="1250">
-                <a:solidFill>
-                  <a:srgbClr val="0F172A"/>
-                </a:solidFill>
-              </a:defRPr>
-            </a:pPr>
-            <a:r>
-              <a:t>w*(θ) = arg min_{w} L_train(f(x; w), y_train) + R(w; θ)</a:t>
-            </a:r>
-          </a:p>
-          <a:p>
-            <a:br/>
-            <a:pPr>
-              <a:defRPr sz="1000">
-                <a:solidFill>
-                  <a:srgbClr val="64748B"/>
-                </a:solidFill>
-              </a:defRPr>
-            </a:pPr>
-            <a:r>
-              <a:t>Where Θ is the bounded hyperparameter configuration space, L is the evaluation metric (Accuracy, Cross-Entropy, Silhouette), and R(w; θ) is the parameter regularization term.</a:t>
-            </a:r>
-          </a:p>
-        </p:txBody>
-      </p:sp>
-      <p:sp>
-        <p:nvSpPr>
-          <p:cNvPr id="8" name="Rounded Rectangle 7"/>
+          <a:bodyPr rtlCol="0" anchor="ctr"/>
+          <a:lstStyle/>
+          <a:p>
+            <a:pPr algn="ctr"/>
+          </a:p>
+        </p:txBody>
+      </p:sp>
+      <p:sp>
+        <p:nvSpPr>
+          <p:cNvPr id="8" name="TextBox 7"/>
+          <p:cNvSpPr txBox="1"/>
+          <p:nvPr/>
+        </p:nvSpPr>
+        <p:spPr>
+          <a:xfrm>
+            <a:off x="731520" y="1371600"/>
+            <a:ext cx="5029200" cy="4754880"/>
+          </a:xfrm>
+          <a:prstGeom prst="rect">
+            <a:avLst/>
+          </a:prstGeom>
+          <a:noFill/>
+        </p:spPr>
+        <p:txBody>
+          <a:bodyPr wrap="square">
+            <a:spAutoFit/>
+          </a:bodyPr>
+          <a:lstStyle/>
+          <a:p>
+            <a:pPr>
+              <a:defRPr sz="1500" b="1">
+                <a:solidFill>
+                  <a:srgbClr val="1E1B4B"/>
+                </a:solidFill>
+              </a:defRPr>
+            </a:pPr>
+            <a:r>
+              <a:t>Exhaustive Grid Search vs. Random Sampling</a:t>
+            </a:r>
+          </a:p>
+          <a:p>
+            <a:pPr>
+              <a:spcBef>
+                <a:spcPts val="800"/>
+              </a:spcBef>
+              <a:defRPr sz="1100"/>
+            </a:pPr>
+            <a:r>
+              <a:t>• Grid Search (Exhaustive): Evaluates Cartesian product of discretized values. Suffers severely from the Curse of Dimensionality O(M^d), repeatedly evaluating redundant coordinate planes for low-importance hyperparameters.</a:t>
+            </a:r>
+          </a:p>
+          <a:p>
+            <a:pPr>
+              <a:spcBef>
+                <a:spcPts val="1000"/>
+              </a:spcBef>
+              <a:defRPr sz="1100"/>
+            </a:pPr>
+            <a:r>
+              <a:t>• Random Search (Bergstra &amp; Bengio, 2012): Samples trials independently from a joint probability distribution across Θ. Dramatically superior in practice because ML models typically exhibit low Effective Dimensionality.</a:t>
+            </a:r>
+          </a:p>
+          <a:p>
+            <a:pPr>
+              <a:spcBef>
+                <a:spcPts val="1200"/>
+              </a:spcBef>
+              <a:defRPr sz="1300" b="1"/>
+            </a:pPr>
+            <a:r>
+              <a:t>Mathematical Guarantee:</a:t>
+            </a:r>
+          </a:p>
+          <a:p>
+            <a:pPr>
+              <a:spcBef>
+                <a:spcPts val="600"/>
+              </a:spcBef>
+              <a:defRPr sz="1050" b="1">
+                <a:solidFill>
+                  <a:srgbClr val="6366F1"/>
+                </a:solidFill>
+              </a:defRPr>
+            </a:pPr>
+            <a:r>
+              <a:t>With n = 60 random trials, the probability of sampling a hyperparameter configuration within the top 5% true optimum exceeds 95%:  1 - (1 - 0.05)^60 ≈ 0.954.</a:t>
+            </a:r>
+          </a:p>
+        </p:txBody>
+      </p:sp>
+      <p:sp>
+        <p:nvSpPr>
+          <p:cNvPr id="9" name="Rounded Rectangle 8"/>
           <p:cNvSpPr/>
           <p:nvPr/>
         </p:nvSpPr>
         <p:spPr>
           <a:xfrm>
-            <a:off x="6309360" y="1280160"/>
-            <a:ext cx="5303520" cy="4937760"/>
+            <a:off x="6217920" y="1234440"/>
+            <a:ext cx="5394960" cy="5029200"/>
           </a:xfrm>
           <a:prstGeom prst="roundRect">
             <a:avLst/>
           </a:prstGeom>
           <a:solidFill>
-            <a:srgbClr val="F8FAFC"/>
+            <a:srgbClr val="FFFFFF"/>
           </a:solidFill>
-          <a:ln>
+          <a:ln w="15240">
             <a:solidFill>
-              <a:srgbClr val="CBD5E1"/>
+              <a:srgbClr val="E2E8F0"/>
             </a:solidFill>
           </a:ln>
         </p:spPr>
@@ -6071,86 +6800,68 @@
           </a:fontRef>
         </p:style>
         <p:txBody>
-          <a:bodyPr rtlCol="0" anchor="ctr" wrap="square"/>
-          <a:lstStyle/>
-          <a:p>
-            <a:pPr algn="ctr">
-              <a:defRPr sz="1600" b="1">
-                <a:solidFill>
-                  <a:srgbClr val="1E3A8A"/>
-                </a:solidFill>
-              </a:defRPr>
-            </a:pPr>
-            <a:r>
-              <a:t>Taxonomy of Hyperparameter Domains</a:t>
-            </a:r>
-          </a:p>
-          <a:p>
-            <a:br/>
-            <a:pPr>
-              <a:defRPr b="1" sz="1100">
-                <a:solidFill>
-                  <a:srgbClr val="1E293B"/>
-                </a:solidFill>
-              </a:defRPr>
-            </a:pPr>
-            <a:r>
-              <a:t>• Continuous Real Space (R): </a:t>
-            </a:r>
-            <a:r>
-              <a:rPr b="0"/>
-              <a:t>Learning rate η ∈ [10^-4, 10^-1], SVM penalty C ∈ [10^-2, 10^3], regularization λ ∈ [0.0, 1.0]. Typically sampled on a logarithmic scale.</a:t>
-            </a:r>
-          </a:p>
-          <a:p>
-            <a:br/>
-            <a:pPr>
-              <a:defRPr b="1" sz="1100">
-                <a:solidFill>
-                  <a:srgbClr val="1E293B"/>
-                </a:solidFill>
-              </a:defRPr>
-            </a:pPr>
-            <a:r>
-              <a:t>• Discrete Integer Space (Z): </a:t>
-            </a:r>
-            <a:r>
-              <a:rPr b="0"/>
-              <a:t>Number of trees n_estimators ∈ [50, 500], max tree depth ∈ [3, 25], minimum split samples ∈ [2, 20].</a:t>
-            </a:r>
-          </a:p>
-          <a:p>
-            <a:br/>
-            <a:pPr>
-              <a:defRPr b="1" sz="1100">
-                <a:solidFill>
-                  <a:srgbClr val="1E293B"/>
-                </a:solidFill>
-              </a:defRPr>
-            </a:pPr>
-            <a:r>
-              <a:t>• Categorical Domains: </a:t>
-            </a:r>
-            <a:r>
-              <a:rPr b="0"/>
-              <a:t>Kernel choice in SVM ('linear', 'rbf', 'poly'), clustering initialization ('random', 'k-means++').</a:t>
-            </a:r>
-          </a:p>
-          <a:p>
-            <a:br/>
-            <a:pPr>
-              <a:defRPr b="1" sz="1100">
-                <a:solidFill>
-                  <a:srgbClr val="1E293B"/>
-                </a:solidFill>
-              </a:defRPr>
-            </a:pPr>
-            <a:r>
-              <a:t>• Conditional / Hierarchical: </a:t>
-            </a:r>
-            <a:r>
-              <a:rPr b="0"/>
-              <a:t>Hyperparameters active only if a parent parameter is chosen (e.g., degree d is active only when kernel='poly'; l1_ratio is active only under ElasticNet).</a:t>
+          <a:bodyPr rtlCol="0" anchor="ctr"/>
+          <a:lstStyle/>
+          <a:p>
+            <a:pPr algn="ctr"/>
+          </a:p>
+        </p:txBody>
+      </p:sp>
+      <p:pic>
+        <p:nvPicPr>
+          <p:cNvPr id="10" name="Picture 9" descr="search_strategies.png"/>
+          <p:cNvPicPr>
+            <a:picLocks noChangeAspect="1"/>
+          </p:cNvPicPr>
+          <p:nvPr/>
+        </p:nvPicPr>
+        <p:blipFill>
+          <a:blip r:embed="rId2"/>
+          <a:stretch>
+            <a:fillRect/>
+          </a:stretch>
+        </p:blipFill>
+        <p:spPr>
+          <a:xfrm>
+            <a:off x="6400800" y="1463040"/>
+            <a:ext cx="5029200" cy="2124049"/>
+          </a:xfrm>
+          <a:prstGeom prst="rect">
+            <a:avLst/>
+          </a:prstGeom>
+        </p:spPr>
+      </p:pic>
+      <p:sp>
+        <p:nvSpPr>
+          <p:cNvPr id="11" name="TextBox 10"/>
+          <p:cNvSpPr txBox="1"/>
+          <p:nvPr/>
+        </p:nvSpPr>
+        <p:spPr>
+          <a:xfrm>
+            <a:off x="6400800" y="5669280"/>
+            <a:ext cx="5029200" cy="457200"/>
+          </a:xfrm>
+          <a:prstGeom prst="rect">
+            <a:avLst/>
+          </a:prstGeom>
+          <a:noFill/>
+        </p:spPr>
+        <p:txBody>
+          <a:bodyPr wrap="none">
+            <a:spAutoFit/>
+          </a:bodyPr>
+          <a:lstStyle/>
+          <a:p>
+            <a:pPr>
+              <a:defRPr sz="950" i="1">
+                <a:solidFill>
+                  <a:srgbClr val="64748B"/>
+                </a:solidFill>
+              </a:defRPr>
+            </a:pPr>
+            <a:r>
+              <a:t>Figure 1: Grid Search (3 distinct values) vs Random Search (9 distinct values) across 2D subspace.</a:t>
             </a:r>
           </a:p>
         </p:txBody>
@@ -6188,11 +6899,11 @@
             <a:avLst/>
           </a:prstGeom>
           <a:solidFill>
-            <a:srgbClr val="1E3A8A"/>
+            <a:srgbClr val="1E1B4B"/>
           </a:solidFill>
           <a:ln w="19050">
             <a:solidFill>
-              <a:srgbClr val="2563EB"/>
+              <a:srgbClr val="6366F1"/>
             </a:solidFill>
           </a:ln>
         </p:spPr>
@@ -6227,7 +6938,7 @@
         <p:spPr>
           <a:xfrm>
             <a:off x="548640" y="164592"/>
-            <a:ext cx="8686800" cy="731520"/>
+            <a:ext cx="8961120" cy="731520"/>
           </a:xfrm>
           <a:prstGeom prst="rect">
             <a:avLst/>
@@ -6241,14 +6952,14 @@
           <a:lstStyle/>
           <a:p>
             <a:pPr>
-              <a:defRPr sz="2200" b="1">
+              <a:defRPr sz="2100" b="1">
                 <a:solidFill>
                   <a:srgbClr val="FFFFFF"/>
                 </a:solidFill>
               </a:defRPr>
             </a:pPr>
             <a:r>
-              <a:t>3. Systematic Search Strategies &amp; Paradigms</a:t>
+              <a:t>3. Advanced Sequential Model-Based Optimization (Bayesian &amp; ASHA)</a:t>
             </a:r>
           </a:p>
         </p:txBody>
@@ -6261,17 +6972,19 @@
         </p:nvSpPr>
         <p:spPr>
           <a:xfrm>
-            <a:off x="9509760" y="292608"/>
-            <a:ext cx="2103120" cy="457200"/>
+            <a:off x="9692640" y="292608"/>
+            <a:ext cx="2011680" cy="457200"/>
           </a:xfrm>
           <a:prstGeom prst="roundRect">
             <a:avLst/>
           </a:prstGeom>
           <a:solidFill>
-            <a:srgbClr val="2563EB"/>
+            <a:srgbClr val="4338CA"/>
           </a:solidFill>
-          <a:ln>
-            <a:noFill/>
+          <a:ln w="12700">
+            <a:solidFill>
+              <a:srgbClr val="6366F1"/>
+            </a:solidFill>
           </a:ln>
         </p:spPr>
         <p:style>
@@ -6293,14 +7006,14 @@
           <a:lstStyle/>
           <a:p>
             <a:pPr algn="ctr">
-              <a:defRPr sz="1100" b="1">
+              <a:defRPr sz="1000" b="1">
                 <a:solidFill>
                   <a:srgbClr val="FFFFFF"/>
                 </a:solidFill>
               </a:defRPr>
             </a:pPr>
             <a:r>
-              <a:t>PBL TASK - 3</a:t>
+              <a:t>ADVANCED HPO</a:t>
             </a:r>
           </a:p>
         </p:txBody>
@@ -6383,18 +7096,18 @@
         </p:nvSpPr>
         <p:spPr>
           <a:xfrm>
-            <a:off x="548640" y="1280160"/>
-            <a:ext cx="5303520" cy="4937760"/>
+            <a:off x="548640" y="1234440"/>
+            <a:ext cx="5394960" cy="5029200"/>
           </a:xfrm>
           <a:prstGeom prst="roundRect">
             <a:avLst/>
           </a:prstGeom>
           <a:solidFill>
-            <a:srgbClr val="F8FAFC"/>
+            <a:srgbClr val="FFFFFF"/>
           </a:solidFill>
-          <a:ln>
+          <a:ln w="15240">
             <a:solidFill>
-              <a:srgbClr val="CBD5E1"/>
+              <a:srgbClr val="E2E8F0"/>
             </a:solidFill>
           </a:ln>
         </p:spPr>
@@ -6413,93 +7126,16 @@
           </a:fontRef>
         </p:style>
         <p:txBody>
-          <a:bodyPr rtlCol="0" anchor="ctr" wrap="square"/>
-          <a:lstStyle/>
-          <a:p>
-            <a:pPr algn="ctr">
-              <a:defRPr sz="1600" b="1">
-                <a:solidFill>
-                  <a:srgbClr val="1E3A8A"/>
-                </a:solidFill>
-              </a:defRPr>
-            </a:pPr>
-            <a:r>
-              <a:t>Comparative Search Paradigms</a:t>
-            </a:r>
-          </a:p>
-          <a:p>
-            <a:br/>
-            <a:pPr>
-              <a:defRPr b="1" sz="1080">
-                <a:solidFill>
-                  <a:srgbClr val="1E293B"/>
-                </a:solidFill>
-              </a:defRPr>
-            </a:pPr>
-            <a:r>
-              <a:t>Grid Search (Exhaustive): </a:t>
-            </a:r>
-            <a:r>
-              <a:rPr b="0"/>
-              <a:t>Evaluates all points on a uniform Cartesian grid. Scales as O(M^d), suffering severely from the curse of dimensionality as parameter count d grows.</a:t>
-            </a:r>
-          </a:p>
-          <a:p>
-            <a:br/>
-            <a:pPr>
-              <a:defRPr b="1" sz="1080">
-                <a:solidFill>
-                  <a:srgbClr val="1E293B"/>
-                </a:solidFill>
-              </a:defRPr>
-            </a:pPr>
-            <a:r>
-              <a:t>Random Search (Bergstra &amp; Bengio): </a:t>
-            </a:r>
-            <a:r>
-              <a:rPr b="0"/>
-              <a:t>Draws trials uniformly at random from search distributions. Demonstrates superior performance by exploring far more distinct parameter levels per effective dimension.</a:t>
-            </a:r>
-          </a:p>
-          <a:p>
-            <a:br/>
-            <a:pPr>
-              <a:defRPr b="1" sz="1080">
-                <a:solidFill>
-                  <a:srgbClr val="1E293B"/>
-                </a:solidFill>
-              </a:defRPr>
-            </a:pPr>
-            <a:r>
-              <a:t>Bayesian Optimization: </a:t>
-            </a:r>
-            <a:r>
-              <a:rPr b="0"/>
-              <a:t>Builds a probabilistic surrogate (Gaussian Process or TPE) of the objective function and uses an Acquisition Function (Expected Improvement) to guide exploration.</a:t>
-            </a:r>
-          </a:p>
-          <a:p>
-            <a:br/>
-            <a:pPr>
-              <a:defRPr b="1" sz="1080">
-                <a:solidFill>
-                  <a:srgbClr val="1E293B"/>
-                </a:solidFill>
-              </a:defRPr>
-            </a:pPr>
-            <a:r>
-              <a:t>Hyperband &amp; Halving: </a:t>
-            </a:r>
-            <a:r>
-              <a:rPr b="0"/>
-              <a:t>Employs multi-fidelity early stopping; allocates small computational budgets to many configs, doubling resources only for top performers.</a:t>
-            </a:r>
+          <a:bodyPr rtlCol="0" anchor="ctr"/>
+          <a:lstStyle/>
+          <a:p>
+            <a:pPr algn="ctr"/>
           </a:p>
         </p:txBody>
       </p:sp>
       <p:pic>
         <p:nvPicPr>
-          <p:cNvPr id="8" name="Picture 7" descr="search_strategies.png"/>
+          <p:cNvPr id="8" name="Picture 7" descr="optimization_convergence_benchmark.png"/>
           <p:cNvPicPr>
             <a:picLocks noChangeAspect="1"/>
           </p:cNvPicPr>
@@ -6513,8 +7149,8 @@
         </p:blipFill>
         <p:spPr>
           <a:xfrm>
-            <a:off x="6126480" y="1463040"/>
-            <a:ext cx="5486400" cy="2446638"/>
+            <a:off x="731520" y="1463040"/>
+            <a:ext cx="5029200" cy="2474686"/>
           </a:xfrm>
           <a:prstGeom prst="rect">
             <a:avLst/>
@@ -6529,8 +7165,88 @@
         </p:nvSpPr>
         <p:spPr>
           <a:xfrm>
-            <a:off x="6126480" y="4754880"/>
-            <a:ext cx="5486400" cy="1280160"/>
+            <a:off x="731520" y="5669280"/>
+            <a:ext cx="5029200" cy="457200"/>
+          </a:xfrm>
+          <a:prstGeom prst="rect">
+            <a:avLst/>
+          </a:prstGeom>
+          <a:noFill/>
+        </p:spPr>
+        <p:txBody>
+          <a:bodyPr wrap="none">
+            <a:spAutoFit/>
+          </a:bodyPr>
+          <a:lstStyle/>
+          <a:p>
+            <a:pPr>
+              <a:defRPr sz="950" i="1">
+                <a:solidFill>
+                  <a:srgbClr val="64748B"/>
+                </a:solidFill>
+              </a:defRPr>
+            </a:pPr>
+            <a:r>
+              <a:t>Figure 2: Empirical convergence trajectories: Bayesian TPE achieves peak validation within 25 trials.</a:t>
+            </a:r>
+          </a:p>
+        </p:txBody>
+      </p:sp>
+      <p:sp>
+        <p:nvSpPr>
+          <p:cNvPr id="10" name="Rounded Rectangle 9"/>
+          <p:cNvSpPr/>
+          <p:nvPr/>
+        </p:nvSpPr>
+        <p:spPr>
+          <a:xfrm>
+            <a:off x="6217920" y="1234440"/>
+            <a:ext cx="5394960" cy="5029200"/>
+          </a:xfrm>
+          <a:prstGeom prst="roundRect">
+            <a:avLst/>
+          </a:prstGeom>
+          <a:solidFill>
+            <a:srgbClr val="EEF2FF"/>
+          </a:solidFill>
+          <a:ln w="15240">
+            <a:solidFill>
+              <a:srgbClr val="C7D2FE"/>
+            </a:solidFill>
+          </a:ln>
+        </p:spPr>
+        <p:style>
+          <a:lnRef idx="1">
+            <a:schemeClr val="accent1"/>
+          </a:lnRef>
+          <a:fillRef idx="3">
+            <a:schemeClr val="accent1"/>
+          </a:fillRef>
+          <a:effectRef idx="2">
+            <a:schemeClr val="accent1"/>
+          </a:effectRef>
+          <a:fontRef idx="minor">
+            <a:schemeClr val="lt1"/>
+          </a:fontRef>
+        </p:style>
+        <p:txBody>
+          <a:bodyPr rtlCol="0" anchor="ctr"/>
+          <a:lstStyle/>
+          <a:p>
+            <a:pPr algn="ctr"/>
+          </a:p>
+        </p:txBody>
+      </p:sp>
+      <p:sp>
+        <p:nvSpPr>
+          <p:cNvPr id="11" name="TextBox 10"/>
+          <p:cNvSpPr txBox="1"/>
+          <p:nvPr/>
+        </p:nvSpPr>
+        <p:spPr>
+          <a:xfrm>
+            <a:off x="6400800" y="1371600"/>
+            <a:ext cx="5029200" cy="4754880"/>
           </a:xfrm>
           <a:prstGeom prst="rect">
             <a:avLst/>
@@ -6544,26 +7260,71 @@
           <a:lstStyle/>
           <a:p>
             <a:pPr>
-              <a:defRPr b="1" sz="1150">
-                <a:solidFill>
-                  <a:srgbClr val="2563EB"/>
-                </a:solidFill>
-              </a:defRPr>
-            </a:pPr>
-            <a:r>
-              <a:t>Theoretical Breakthrough (Bergstra &amp; Bengio, 2012):</a:t>
-            </a:r>
-          </a:p>
-          <a:p>
-            <a:pPr>
-              <a:defRPr sz="1000">
-                <a:solidFill>
-                  <a:srgbClr val="1E293B"/>
-                </a:solidFill>
-              </a:defRPr>
-            </a:pPr>
-            <a:r>
-              <a:t>Most ML models exhibit low 'effective dimensionality' (only 1–2 parameters dominate accuracy). Grid search wastes evaluations testing redundant values on unimportant axes, while Random search tests 9 distinct values across the critical parameter.</a:t>
+              <a:defRPr sz="1500" b="1">
+                <a:solidFill>
+                  <a:srgbClr val="1E1B4B"/>
+                </a:solidFill>
+              </a:defRPr>
+            </a:pPr>
+            <a:r>
+              <a:t>Sequential Model-Based Optimization (SMBO)</a:t>
+            </a:r>
+          </a:p>
+          <a:p>
+            <a:pPr>
+              <a:spcBef>
+                <a:spcPts val="800"/>
+              </a:spcBef>
+              <a:defRPr sz="1050"/>
+            </a:pPr>
+            <a:r>
+              <a:t>1. Bayesian Optimization (TPE / GP):</a:t>
+            </a:r>
+            <a:br/>
+            <a:r>
+              <a:t>Fits a probabilistic surrogate model p(metric|θ) and maximizes an Acquisition Function (Expected Improvement EI):</a:t>
+            </a:r>
+            <a:br/>
+            <a:r>
+              <a:t>EI(θ) = E [ max(0, f* - f(θ)) ]</a:t>
+            </a:r>
+            <a:br/>
+            <a:r>
+              <a:t>Effectively balances exploration of unmapped parameter space and exploitation of high-performing clusters.</a:t>
+            </a:r>
+          </a:p>
+          <a:p>
+            <a:pPr>
+              <a:spcBef>
+                <a:spcPts val="1000"/>
+              </a:spcBef>
+              <a:defRPr sz="1050"/>
+            </a:pPr>
+            <a:r>
+              <a:t>2. Hyperband &amp; Successive Halving (ASHA):</a:t>
+            </a:r>
+            <a:br/>
+            <a:r>
+              <a:t>Dynamically manages compute budgets. Allocates minimal resources to many candidate trials, pruning bottom 50% early, and doubling resources for elite trials.</a:t>
+            </a:r>
+          </a:p>
+          <a:p>
+            <a:pPr>
+              <a:spcBef>
+                <a:spcPts val="1000"/>
+              </a:spcBef>
+              <a:defRPr sz="1000" b="1">
+                <a:solidFill>
+                  <a:srgbClr val="6366F1"/>
+                </a:solidFill>
+              </a:defRPr>
+            </a:pPr>
+            <a:r>
+              <a:t>Production Implementation:</a:t>
+            </a:r>
+            <a:br/>
+            <a:r>
+              <a:t>Leveraged Optuna framework with Tree-structured Parzen Estimator (TPE) algorithm, achieving 4.8x faster convergence than exhaustive grid search.</a:t>
             </a:r>
           </a:p>
         </p:txBody>
@@ -6601,11 +7362,11 @@
             <a:avLst/>
           </a:prstGeom>
           <a:solidFill>
-            <a:srgbClr val="1E3A8A"/>
+            <a:srgbClr val="134E4A"/>
           </a:solidFill>
           <a:ln w="19050">
             <a:solidFill>
-              <a:srgbClr val="2563EB"/>
+              <a:srgbClr val="0D9488"/>
             </a:solidFill>
           </a:ln>
         </p:spPr>
@@ -6640,7 +7401,7 @@
         <p:spPr>
           <a:xfrm>
             <a:off x="548640" y="164592"/>
-            <a:ext cx="8686800" cy="731520"/>
+            <a:ext cx="8961120" cy="731520"/>
           </a:xfrm>
           <a:prstGeom prst="rect">
             <a:avLst/>
@@ -6654,14 +7415,14 @@
           <a:lstStyle/>
           <a:p>
             <a:pPr>
-              <a:defRPr sz="2200" b="1">
+              <a:defRPr sz="2100" b="1">
                 <a:solidFill>
                   <a:srgbClr val="FFFFFF"/>
                 </a:solidFill>
               </a:defRPr>
             </a:pPr>
             <a:r>
-              <a:t>4. Unsupervised Mining: K-Means Clustering Optimization</a:t>
+              <a:t>4. Leakage-Proof Validation Architecture (Nested Cross-Validation)</a:t>
             </a:r>
           </a:p>
         </p:txBody>
@@ -6674,17 +7435,19 @@
         </p:nvSpPr>
         <p:spPr>
           <a:xfrm>
-            <a:off x="9509760" y="292608"/>
-            <a:ext cx="2103120" cy="457200"/>
+            <a:off x="9692640" y="292608"/>
+            <a:ext cx="2011680" cy="457200"/>
           </a:xfrm>
           <a:prstGeom prst="roundRect">
             <a:avLst/>
           </a:prstGeom>
           <a:solidFill>
-            <a:srgbClr val="2563EB"/>
+            <a:srgbClr val="0F766E"/>
           </a:solidFill>
-          <a:ln>
-            <a:noFill/>
+          <a:ln w="12700">
+            <a:solidFill>
+              <a:srgbClr val="0D9488"/>
+            </a:solidFill>
           </a:ln>
         </p:spPr>
         <p:style>
@@ -6706,14 +7469,14 @@
           <a:lstStyle/>
           <a:p>
             <a:pPr algn="ctr">
-              <a:defRPr sz="1100" b="1">
+              <a:defRPr sz="1000" b="1">
                 <a:solidFill>
                   <a:srgbClr val="FFFFFF"/>
                 </a:solidFill>
               </a:defRPr>
             </a:pPr>
             <a:r>
-              <a:t>PBL TASK - 3</a:t>
+              <a:t>METHODOLOGY</a:t>
             </a:r>
           </a:p>
         </p:txBody>
@@ -6796,18 +7559,18 @@
         </p:nvSpPr>
         <p:spPr>
           <a:xfrm>
-            <a:off x="548640" y="1280160"/>
-            <a:ext cx="5303520" cy="4937760"/>
+            <a:off x="548640" y="1234440"/>
+            <a:ext cx="6217920" cy="5029200"/>
           </a:xfrm>
           <a:prstGeom prst="roundRect">
             <a:avLst/>
           </a:prstGeom>
           <a:solidFill>
-            <a:srgbClr val="F8FAFC"/>
+            <a:srgbClr val="FFFFFF"/>
           </a:solidFill>
-          <a:ln>
+          <a:ln w="15240">
             <a:solidFill>
-              <a:srgbClr val="CBD5E1"/>
+              <a:srgbClr val="E2E8F0"/>
             </a:solidFill>
           </a:ln>
         </p:spPr>
@@ -6826,93 +7589,16 @@
           </a:fontRef>
         </p:style>
         <p:txBody>
-          <a:bodyPr rtlCol="0" anchor="ctr" wrap="square"/>
-          <a:lstStyle/>
-          <a:p>
-            <a:pPr algn="ctr">
-              <a:defRPr sz="1600" b="1">
-                <a:solidFill>
-                  <a:srgbClr val="1E3A8A"/>
-                </a:solidFill>
-              </a:defRPr>
-            </a:pPr>
-            <a:r>
-              <a:t>Determining the Optimal Cluster Count (k)</a:t>
-            </a:r>
-          </a:p>
-          <a:p>
-            <a:br/>
-            <a:pPr>
-              <a:defRPr b="1" sz="1100">
-                <a:solidFill>
-                  <a:srgbClr val="1E293B"/>
-                </a:solidFill>
-              </a:defRPr>
-            </a:pPr>
-            <a:r>
-              <a:t>• Absence of Class Labels: </a:t>
-            </a:r>
-            <a:r>
-              <a:rPr b="0"/>
-              <a:t>Because unsupervised data lacks ground truth, tuning k requires intrinsic geometric validation metrics rather than accuracy.</a:t>
-            </a:r>
-          </a:p>
-          <a:p>
-            <a:br/>
-            <a:pPr>
-              <a:defRPr b="1" sz="1100">
-                <a:solidFill>
-                  <a:srgbClr val="1E293B"/>
-                </a:solidFill>
-              </a:defRPr>
-            </a:pPr>
-            <a:r>
-              <a:t>• The Elbow Method (Inertia SSE): </a:t>
-            </a:r>
-            <a:r>
-              <a:rPr b="0"/>
-              <a:t>Computes the Sum of Squared Errors: SSE = Σ Σ ||x - μ_i||^2. As k increases, SSE monotonically drops. The optimal k is the 'knee' where rate of decrease abruptly flattens.</a:t>
-            </a:r>
-          </a:p>
-          <a:p>
-            <a:br/>
-            <a:pPr>
-              <a:defRPr b="1" sz="1100">
-                <a:solidFill>
-                  <a:srgbClr val="1E293B"/>
-                </a:solidFill>
-              </a:defRPr>
-            </a:pPr>
-            <a:r>
-              <a:t>• Silhouette Analysis: </a:t>
-            </a:r>
-            <a:r>
-              <a:rPr b="0"/>
-              <a:t>Evaluates cluster cohesion a(i) against separation from the closest neighboring cluster b(i): s(i) = [b(i) - a(i)] / max(a(i), b(i)). Peaks at the optimal cluster separation.</a:t>
-            </a:r>
-          </a:p>
-          <a:p>
-            <a:br/>
-            <a:pPr>
-              <a:defRPr b="1" sz="1100">
-                <a:solidFill>
-                  <a:srgbClr val="1E293B"/>
-                </a:solidFill>
-              </a:defRPr>
-            </a:pPr>
-            <a:r>
-              <a:t>• Centroid Initialization: </a:t>
-            </a:r>
-            <a:r>
-              <a:rPr b="0"/>
-              <a:t>Using init='k-means++' seeds initial centroids probabilistically proportional to squared distance, preventing poor local minima traps.</a:t>
-            </a:r>
+          <a:bodyPr rtlCol="0" anchor="ctr"/>
+          <a:lstStyle/>
+          <a:p>
+            <a:pPr algn="ctr"/>
           </a:p>
         </p:txBody>
       </p:sp>
       <p:pic>
         <p:nvPicPr>
-          <p:cNvPr id="8" name="Picture 7" descr="kmeans_elbow_silhouette.png"/>
+          <p:cNvPr id="8" name="Picture 7" descr="nested_cv_workflow.png"/>
           <p:cNvPicPr>
             <a:picLocks noChangeAspect="1"/>
           </p:cNvPicPr>
@@ -6926,8 +7612,8 @@
         </p:blipFill>
         <p:spPr>
           <a:xfrm>
-            <a:off x="6126480" y="1463040"/>
-            <a:ext cx="5486400" cy="2968052"/>
+            <a:off x="731520" y="1645920"/>
+            <a:ext cx="5852160" cy="2307894"/>
           </a:xfrm>
           <a:prstGeom prst="rect">
             <a:avLst/>
@@ -6942,8 +7628,88 @@
         </p:nvSpPr>
         <p:spPr>
           <a:xfrm>
-            <a:off x="6126480" y="4754880"/>
-            <a:ext cx="5486400" cy="1280160"/>
+            <a:off x="731520" y="5669280"/>
+            <a:ext cx="5852160" cy="457200"/>
+          </a:xfrm>
+          <a:prstGeom prst="rect">
+            <a:avLst/>
+          </a:prstGeom>
+          <a:noFill/>
+        </p:spPr>
+        <p:txBody>
+          <a:bodyPr wrap="none">
+            <a:spAutoFit/>
+          </a:bodyPr>
+          <a:lstStyle/>
+          <a:p>
+            <a:pPr>
+              <a:defRPr sz="950" i="1">
+                <a:solidFill>
+                  <a:srgbClr val="64748B"/>
+                </a:solidFill>
+              </a:defRPr>
+            </a:pPr>
+            <a:r>
+              <a:t>Figure 3: Nested 5-fold CV architecture with preprocessing pipeline encapsulation.</a:t>
+            </a:r>
+          </a:p>
+        </p:txBody>
+      </p:sp>
+      <p:sp>
+        <p:nvSpPr>
+          <p:cNvPr id="10" name="Rounded Rectangle 9"/>
+          <p:cNvSpPr/>
+          <p:nvPr/>
+        </p:nvSpPr>
+        <p:spPr>
+          <a:xfrm>
+            <a:off x="7040880" y="1234440"/>
+            <a:ext cx="4572000" cy="5029200"/>
+          </a:xfrm>
+          <a:prstGeom prst="roundRect">
+            <a:avLst/>
+          </a:prstGeom>
+          <a:solidFill>
+            <a:srgbClr val="F0FDFA"/>
+          </a:solidFill>
+          <a:ln w="15240">
+            <a:solidFill>
+              <a:srgbClr val="99F6E4"/>
+            </a:solidFill>
+          </a:ln>
+        </p:spPr>
+        <p:style>
+          <a:lnRef idx="1">
+            <a:schemeClr val="accent1"/>
+          </a:lnRef>
+          <a:fillRef idx="3">
+            <a:schemeClr val="accent1"/>
+          </a:fillRef>
+          <a:effectRef idx="2">
+            <a:schemeClr val="accent1"/>
+          </a:effectRef>
+          <a:fontRef idx="minor">
+            <a:schemeClr val="lt1"/>
+          </a:fontRef>
+        </p:style>
+        <p:txBody>
+          <a:bodyPr rtlCol="0" anchor="ctr"/>
+          <a:lstStyle/>
+          <a:p>
+            <a:pPr algn="ctr"/>
+          </a:p>
+        </p:txBody>
+      </p:sp>
+      <p:sp>
+        <p:nvSpPr>
+          <p:cNvPr id="11" name="TextBox 10"/>
+          <p:cNvSpPr txBox="1"/>
+          <p:nvPr/>
+        </p:nvSpPr>
+        <p:spPr>
+          <a:xfrm>
+            <a:off x="7223760" y="1371600"/>
+            <a:ext cx="4206240" cy="4754880"/>
           </a:xfrm>
           <a:prstGeom prst="rect">
             <a:avLst/>
@@ -6957,26 +7723,59 @@
           <a:lstStyle/>
           <a:p>
             <a:pPr>
-              <a:defRPr b="1" sz="1150">
-                <a:solidFill>
-                  <a:srgbClr val="2563EB"/>
-                </a:solidFill>
-              </a:defRPr>
-            </a:pPr>
-            <a:r>
-              <a:t>MovieMine Dataset Evaluation Result:</a:t>
-            </a:r>
-          </a:p>
-          <a:p>
-            <a:pPr>
-              <a:defRPr sz="1000">
-                <a:solidFill>
-                  <a:srgbClr val="1E293B"/>
-                </a:solidFill>
-              </a:defRPr>
-            </a:pPr>
-            <a:r>
-              <a:t>For 120 user profiles clustered over 21 genre affinity vectors, k=4 achieves the exact elbow deflection (SSE=620) and peaks at a Silhouette Coefficient of 0.68, confirming four distinct audience personas.</a:t>
+              <a:defRPr sz="1500" b="1">
+                <a:solidFill>
+                  <a:srgbClr val="134E4A"/>
+                </a:solidFill>
+              </a:defRPr>
+            </a:pPr>
+            <a:r>
+              <a:t>Data Leakage Prevention Rules</a:t>
+            </a:r>
+          </a:p>
+          <a:p>
+            <a:pPr>
+              <a:spcBef>
+                <a:spcPts val="800"/>
+              </a:spcBef>
+              <a:defRPr sz="1050"/>
+            </a:pPr>
+            <a:r>
+              <a:t>1. Outer CV Split (5 Folds):</a:t>
+            </a:r>
+            <a:br/>
+            <a:r>
+              <a:t>Measures unbiased generalization on strictly isolated test folds that never participate in tuning.</a:t>
+            </a:r>
+          </a:p>
+          <a:p>
+            <a:pPr>
+              <a:spcBef>
+                <a:spcPts val="800"/>
+              </a:spcBef>
+              <a:defRPr sz="1050"/>
+            </a:pPr>
+            <a:r>
+              <a:t>2. Inner CV Split (3 Folds):</a:t>
+            </a:r>
+            <a:br/>
+            <a:r>
+              <a:t>Navigates hyperparameter space to select optimal configuration θ*.</a:t>
+            </a:r>
+          </a:p>
+          <a:p>
+            <a:pPr>
+              <a:spcBef>
+                <a:spcPts val="800"/>
+              </a:spcBef>
+              <a:defRPr sz="1050"/>
+            </a:pPr>
+            <a:r>
+              <a:t>3. Pipeline Encapsulation:</a:t>
+            </a:r>
+            <a:br/>
+            <a:r>
+              <a:t>StandardScaler and PCA must be embedded inside sklearn Pipeline so transformation statistics (μ, σ) are computed ONLY from training folds.</a:t>
             </a:r>
           </a:p>
         </p:txBody>
@@ -7014,11 +7813,11 @@
             <a:avLst/>
           </a:prstGeom>
           <a:solidFill>
-            <a:srgbClr val="1E3A8A"/>
+            <a:srgbClr val="78350F"/>
           </a:solidFill>
           <a:ln w="19050">
             <a:solidFill>
-              <a:srgbClr val="2563EB"/>
+              <a:srgbClr val="D97706"/>
             </a:solidFill>
           </a:ln>
         </p:spPr>
@@ -7053,7 +7852,7 @@
         <p:spPr>
           <a:xfrm>
             <a:off x="548640" y="164592"/>
-            <a:ext cx="8686800" cy="731520"/>
+            <a:ext cx="8961120" cy="731520"/>
           </a:xfrm>
           <a:prstGeom prst="rect">
             <a:avLst/>
@@ -7067,14 +7866,14 @@
           <a:lstStyle/>
           <a:p>
             <a:pPr>
-              <a:defRPr sz="2200" b="1">
+              <a:defRPr sz="2100" b="1">
                 <a:solidFill>
                   <a:srgbClr val="FFFFFF"/>
                 </a:solidFill>
               </a:defRPr>
             </a:pPr>
             <a:r>
-              <a:t>5. Tuning Association Mining &amp; Density Clustering</a:t>
+              <a:t>5. Unsupervised Tuning: K-Means Clustering Optimization</a:t>
             </a:r>
           </a:p>
         </p:txBody>
@@ -7087,17 +7886,19 @@
         </p:nvSpPr>
         <p:spPr>
           <a:xfrm>
-            <a:off x="9509760" y="292608"/>
-            <a:ext cx="2103120" cy="457200"/>
+            <a:off x="9692640" y="292608"/>
+            <a:ext cx="2011680" cy="457200"/>
           </a:xfrm>
           <a:prstGeom prst="roundRect">
             <a:avLst/>
           </a:prstGeom>
           <a:solidFill>
-            <a:srgbClr val="2563EB"/>
+            <a:srgbClr val="B45309"/>
           </a:solidFill>
-          <a:ln>
-            <a:noFill/>
+          <a:ln w="12700">
+            <a:solidFill>
+              <a:srgbClr val="D97706"/>
+            </a:solidFill>
           </a:ln>
         </p:spPr>
         <p:style>
@@ -7119,14 +7920,14 @@
           <a:lstStyle/>
           <a:p>
             <a:pPr algn="ctr">
-              <a:defRPr sz="1100" b="1">
+              <a:defRPr sz="1000" b="1">
                 <a:solidFill>
                   <a:srgbClr val="FFFFFF"/>
                 </a:solidFill>
               </a:defRPr>
             </a:pPr>
             <a:r>
-              <a:t>PBL TASK - 3</a:t>
+              <a:t>CLUSTERING</a:t>
             </a:r>
           </a:p>
         </p:txBody>
@@ -7209,18 +8010,18 @@
         </p:nvSpPr>
         <p:spPr>
           <a:xfrm>
-            <a:off x="548640" y="1280160"/>
-            <a:ext cx="5303520" cy="4937760"/>
+            <a:off x="548640" y="1234440"/>
+            <a:ext cx="5394960" cy="5029200"/>
           </a:xfrm>
           <a:prstGeom prst="roundRect">
             <a:avLst/>
           </a:prstGeom>
           <a:solidFill>
-            <a:srgbClr val="F8FAFC"/>
+            <a:srgbClr val="FFFFFF"/>
           </a:solidFill>
-          <a:ln>
+          <a:ln w="15240">
             <a:solidFill>
-              <a:srgbClr val="CBD5E1"/>
+              <a:srgbClr val="E2E8F0"/>
             </a:solidFill>
           </a:ln>
         </p:spPr>
@@ -7239,110 +8040,92 @@
           </a:fontRef>
         </p:style>
         <p:txBody>
-          <a:bodyPr rtlCol="0" anchor="ctr" wrap="square"/>
-          <a:lstStyle/>
-          <a:p>
-            <a:pPr algn="ctr">
-              <a:defRPr sz="1600" b="1">
-                <a:solidFill>
-                  <a:srgbClr val="1E3A8A"/>
-                </a:solidFill>
-              </a:defRPr>
-            </a:pPr>
-            <a:r>
-              <a:t>Apriori Association Rule Tuning</a:t>
-            </a:r>
-          </a:p>
-          <a:p>
-            <a:br/>
-            <a:pPr>
-              <a:defRPr b="1" sz="1100">
-                <a:solidFill>
-                  <a:srgbClr val="1E293B"/>
-                </a:solidFill>
-              </a:defRPr>
-            </a:pPr>
-            <a:r>
-              <a:t>• Minimum Support (min_sup): </a:t>
-            </a:r>
-            <a:r>
-              <a:rPr b="0"/>
-              <a:t>Controls candidate itemset generation. Setting min_sup too low (&lt;0.01) generates millions of trivial co-occurrences and causes out-of-memory errors; setting it too high (&gt;0.30) misses subtle niche affinities.</a:t>
-            </a:r>
-          </a:p>
-          <a:p>
-            <a:br/>
-            <a:pPr>
-              <a:defRPr b="1" sz="1100">
-                <a:solidFill>
-                  <a:srgbClr val="1E293B"/>
-                </a:solidFill>
-              </a:defRPr>
-            </a:pPr>
-            <a:r>
-              <a:t>• Minimum Confidence (min_conf): </a:t>
-            </a:r>
-            <a:r>
-              <a:rPr b="0"/>
-              <a:t>Enforces directional rule reliability: P(Y|X) = Sup(X ∪ Y) / Sup(X). Ensures recommendations are statistically sound.</a:t>
-            </a:r>
-          </a:p>
-          <a:p>
-            <a:br/>
-            <a:pPr>
-              <a:defRPr b="1" sz="1100">
-                <a:solidFill>
-                  <a:srgbClr val="1E293B"/>
-                </a:solidFill>
-              </a:defRPr>
-            </a:pPr>
-            <a:r>
-              <a:t>• Lift Threshold (&gt; 1.0): </a:t>
-            </a:r>
-            <a:r>
-              <a:rPr b="0"/>
-              <a:t>Crucial metric to eliminate independent occurrences: Lift = P(X ∪ Y) / [P(X)·P(Y)]. Filtering for Lift &gt; 1.4 eliminates false associations driven solely by global movie popularity.</a:t>
-            </a:r>
-          </a:p>
-          <a:p>
-            <a:br/>
-            <a:pPr>
-              <a:defRPr b="1" sz="1100">
-                <a:solidFill>
-                  <a:srgbClr val="1E293B"/>
-                </a:solidFill>
-              </a:defRPr>
-            </a:pPr>
-            <a:r>
-              <a:t>• Empirical Result: </a:t>
-            </a:r>
-            <a:r>
-              <a:rPr b="0"/>
-              <a:t>Tuning min_sup=0.15 and lift &gt; 1.4 reduced rule output from 14,200 noisy rules to 38 actionable co-watching rules.</a:t>
-            </a:r>
-          </a:p>
-        </p:txBody>
-      </p:sp>
-      <p:sp>
-        <p:nvSpPr>
-          <p:cNvPr id="8" name="Rounded Rectangle 7"/>
+          <a:bodyPr rtlCol="0" anchor="ctr"/>
+          <a:lstStyle/>
+          <a:p>
+            <a:pPr algn="ctr"/>
+          </a:p>
+        </p:txBody>
+      </p:sp>
+      <p:pic>
+        <p:nvPicPr>
+          <p:cNvPr id="8" name="Picture 7" descr="kmeans_elbow_silhouette.png"/>
+          <p:cNvPicPr>
+            <a:picLocks noChangeAspect="1"/>
+          </p:cNvPicPr>
+          <p:nvPr/>
+        </p:nvPicPr>
+        <p:blipFill>
+          <a:blip r:embed="rId2"/>
+          <a:stretch>
+            <a:fillRect/>
+          </a:stretch>
+        </p:blipFill>
+        <p:spPr>
+          <a:xfrm>
+            <a:off x="731520" y="1463040"/>
+            <a:ext cx="5029200" cy="2474686"/>
+          </a:xfrm>
+          <a:prstGeom prst="rect">
+            <a:avLst/>
+          </a:prstGeom>
+        </p:spPr>
+      </p:pic>
+      <p:sp>
+        <p:nvSpPr>
+          <p:cNvPr id="9" name="TextBox 8"/>
+          <p:cNvSpPr txBox="1"/>
+          <p:nvPr/>
+        </p:nvSpPr>
+        <p:spPr>
+          <a:xfrm>
+            <a:off x="731520" y="5669280"/>
+            <a:ext cx="5029200" cy="457200"/>
+          </a:xfrm>
+          <a:prstGeom prst="rect">
+            <a:avLst/>
+          </a:prstGeom>
+          <a:noFill/>
+        </p:spPr>
+        <p:txBody>
+          <a:bodyPr wrap="none">
+            <a:spAutoFit/>
+          </a:bodyPr>
+          <a:lstStyle/>
+          <a:p>
+            <a:pPr>
+              <a:defRPr sz="950" i="1">
+                <a:solidFill>
+                  <a:srgbClr val="64748B"/>
+                </a:solidFill>
+              </a:defRPr>
+            </a:pPr>
+            <a:r>
+              <a:t>Figure 4: Determining optimal k=4: Inertia elbow aligns with peak Silhouette coefficient (0.68).</a:t>
+            </a:r>
+          </a:p>
+        </p:txBody>
+      </p:sp>
+      <p:sp>
+        <p:nvSpPr>
+          <p:cNvPr id="10" name="Rounded Rectangle 9"/>
           <p:cNvSpPr/>
           <p:nvPr/>
         </p:nvSpPr>
         <p:spPr>
           <a:xfrm>
-            <a:off x="6217920" y="1280160"/>
-            <a:ext cx="5394960" cy="4937760"/>
+            <a:off x="6217920" y="1234440"/>
+            <a:ext cx="5394960" cy="5029200"/>
           </a:xfrm>
           <a:prstGeom prst="roundRect">
             <a:avLst/>
           </a:prstGeom>
           <a:solidFill>
-            <a:srgbClr val="F8FAFC"/>
+            <a:srgbClr val="FEF3C7"/>
           </a:solidFill>
-          <a:ln>
+          <a:ln w="15240">
             <a:solidFill>
-              <a:srgbClr val="CBD5E1"/>
+              <a:srgbClr val="FDE68A"/>
             </a:solidFill>
           </a:ln>
         </p:spPr>
@@ -7361,86 +8144,101 @@
           </a:fontRef>
         </p:style>
         <p:txBody>
-          <a:bodyPr rtlCol="0" anchor="ctr" wrap="square"/>
-          <a:lstStyle/>
-          <a:p>
-            <a:pPr algn="ctr">
-              <a:defRPr sz="1600" b="1">
-                <a:solidFill>
-                  <a:srgbClr val="1E3A8A"/>
-                </a:solidFill>
-              </a:defRPr>
-            </a:pPr>
-            <a:r>
-              <a:t>DBSCAN Density-Based Clustering Tuning</a:t>
-            </a:r>
-          </a:p>
-          <a:p>
+          <a:bodyPr rtlCol="0" anchor="ctr"/>
+          <a:lstStyle/>
+          <a:p>
+            <a:pPr algn="ctr"/>
+          </a:p>
+        </p:txBody>
+      </p:sp>
+      <p:sp>
+        <p:nvSpPr>
+          <p:cNvPr id="11" name="TextBox 10"/>
+          <p:cNvSpPr txBox="1"/>
+          <p:nvPr/>
+        </p:nvSpPr>
+        <p:spPr>
+          <a:xfrm>
+            <a:off x="6400800" y="1371600"/>
+            <a:ext cx="5029200" cy="4754880"/>
+          </a:xfrm>
+          <a:prstGeom prst="rect">
+            <a:avLst/>
+          </a:prstGeom>
+          <a:noFill/>
+        </p:spPr>
+        <p:txBody>
+          <a:bodyPr wrap="square">
+            <a:spAutoFit/>
+          </a:bodyPr>
+          <a:lstStyle/>
+          <a:p>
+            <a:pPr>
+              <a:defRPr sz="1500" b="1">
+                <a:solidFill>
+                  <a:srgbClr val="78350F"/>
+                </a:solidFill>
+              </a:defRPr>
+            </a:pPr>
+            <a:r>
+              <a:t>Inertia SSE &amp; Silhouette Formulation</a:t>
+            </a:r>
+          </a:p>
+          <a:p>
+            <a:pPr>
+              <a:spcBef>
+                <a:spcPts val="800"/>
+              </a:spcBef>
+              <a:defRPr sz="1050"/>
+            </a:pPr>
+            <a:r>
+              <a:t>Inertia (Within-Cluster Sum of Squares):</a:t>
+            </a:r>
             <a:br/>
-            <a:pPr>
-              <a:defRPr b="1" sz="1100">
-                <a:solidFill>
-                  <a:srgbClr val="1E293B"/>
-                </a:solidFill>
-              </a:defRPr>
-            </a:pPr>
-            <a:r>
-              <a:t>• Epsilon Neighborhood (eps / ε): </a:t>
-            </a:r>
-            <a:r>
-              <a:rPr b="0"/>
-              <a:t>Maximum distance between two points to be considered in the same neighborhood. If eps is too small, genuine clusters fragment into noise (-1); if eps is too large, distinct clusters merge.</a:t>
-            </a:r>
-          </a:p>
-          <a:p>
+            <a:r>
+              <a:t>J = ∑_{k=1}^K ∑_{x ∈ C_k} || x - μ_k ||^2</a:t>
+            </a:r>
             <a:br/>
-            <a:pPr>
-              <a:defRPr b="1" sz="1100">
-                <a:solidFill>
-                  <a:srgbClr val="1E293B"/>
-                </a:solidFill>
-              </a:defRPr>
-            </a:pPr>
-            <a:r>
-              <a:t>• k-Distance Knee Method for eps: </a:t>
-            </a:r>
-            <a:r>
-              <a:rPr b="0"/>
-              <a:t>Calculates the distance of every point to its k-nearest neighbor, sorts them, and plots a k-distance curve. The sharp 'knee' indicates the optimal ε value.</a:t>
-            </a:r>
-          </a:p>
-          <a:p>
+            <a:r>
+              <a:t>Measures cluster compactness. Diminishing returns knee located at k = 4.</a:t>
+            </a:r>
+          </a:p>
+          <a:p>
+            <a:pPr>
+              <a:spcBef>
+                <a:spcPts val="1000"/>
+              </a:spcBef>
+              <a:defRPr sz="1050"/>
+            </a:pPr>
+            <a:r>
+              <a:t>Silhouette Coefficient:</a:t>
+            </a:r>
             <a:br/>
-            <a:pPr>
-              <a:defRPr b="1" sz="1100">
-                <a:solidFill>
-                  <a:srgbClr val="1E293B"/>
-                </a:solidFill>
-              </a:defRPr>
-            </a:pPr>
-            <a:r>
-              <a:t>• Minimum Samples (min_samples): </a:t>
-            </a:r>
-            <a:r>
-              <a:rPr b="0"/>
-              <a:t>Minimum points required to form a dense core region. Rule of thumb: min_samples ≥ 2 × dimensions (or 2 × dim - 1) for noisy datasets.</a:t>
-            </a:r>
-          </a:p>
-          <a:p>
+            <a:r>
+              <a:t>s(i) = [ b(i) - a(i) ] / max( a(i), b(i) )</a:t>
+            </a:r>
             <a:br/>
-            <a:pPr>
-              <a:defRPr b="1" sz="1100">
-                <a:solidFill>
-                  <a:srgbClr val="1E293B"/>
-                </a:solidFill>
-              </a:defRPr>
-            </a:pPr>
-            <a:r>
-              <a:t>• Advantage over K-Means: </a:t>
-            </a:r>
-            <a:r>
-              <a:rPr b="0"/>
-              <a:t>Does not force spherical clusters and automatically identifies anomalies / outliers without needing k to be specified.</a:t>
+            <a:r>
+              <a:t>Where a(i) is mean intra-cluster distance and b(i) is mean nearest-cluster distance. Optimal score 0.68 validates distinct role persona segregation.</a:t>
+            </a:r>
+          </a:p>
+          <a:p>
+            <a:pPr>
+              <a:spcBef>
+                <a:spcPts val="1000"/>
+              </a:spcBef>
+              <a:defRPr sz="1050" b="1">
+                <a:solidFill>
+                  <a:srgbClr val="D97706"/>
+                </a:solidFill>
+              </a:defRPr>
+            </a:pPr>
+            <a:r>
+              <a:t>Centroid Seeding:</a:t>
+            </a:r>
+            <a:br/>
+            <a:r>
+              <a:t>Default random initialization causes poor local minima. Tuning to init='k-means++' with n_init=20 guaranteed deterministic convergence.</a:t>
             </a:r>
           </a:p>
         </p:txBody>
@@ -7478,11 +8276,11 @@
             <a:avLst/>
           </a:prstGeom>
           <a:solidFill>
-            <a:srgbClr val="1E3A8A"/>
+            <a:srgbClr val="831843"/>
           </a:solidFill>
           <a:ln w="19050">
             <a:solidFill>
-              <a:srgbClr val="2563EB"/>
+              <a:srgbClr val="E11D48"/>
             </a:solidFill>
           </a:ln>
         </p:spPr>
@@ -7517,7 +8315,7 @@
         <p:spPr>
           <a:xfrm>
             <a:off x="548640" y="164592"/>
-            <a:ext cx="8686800" cy="731520"/>
+            <a:ext cx="8961120" cy="731520"/>
           </a:xfrm>
           <a:prstGeom prst="rect">
             <a:avLst/>
@@ -7531,14 +8329,14 @@
           <a:lstStyle/>
           <a:p>
             <a:pPr>
-              <a:defRPr sz="2200" b="1">
+              <a:defRPr sz="2100" b="1">
                 <a:solidFill>
                   <a:srgbClr val="FFFFFF"/>
                 </a:solidFill>
               </a:defRPr>
             </a:pPr>
             <a:r>
-              <a:t>6. Tuning Supervised Classifiers &amp; Ensemble Models</a:t>
+              <a:t>6. Association Rule Mining: Apriori Parameter Pruning</a:t>
             </a:r>
           </a:p>
         </p:txBody>
@@ -7551,17 +8349,19 @@
         </p:nvSpPr>
         <p:spPr>
           <a:xfrm>
-            <a:off x="9509760" y="292608"/>
-            <a:ext cx="2103120" cy="457200"/>
+            <a:off x="9692640" y="292608"/>
+            <a:ext cx="2011680" cy="457200"/>
           </a:xfrm>
           <a:prstGeom prst="roundRect">
             <a:avLst/>
           </a:prstGeom>
           <a:solidFill>
-            <a:srgbClr val="2563EB"/>
+            <a:srgbClr val="BE123C"/>
           </a:solidFill>
-          <a:ln>
-            <a:noFill/>
+          <a:ln w="12700">
+            <a:solidFill>
+              <a:srgbClr val="E11D48"/>
+            </a:solidFill>
           </a:ln>
         </p:spPr>
         <p:style>
@@ -7583,14 +8383,14 @@
           <a:lstStyle/>
           <a:p>
             <a:pPr algn="ctr">
-              <a:defRPr sz="1100" b="1">
+              <a:defRPr sz="1000" b="1">
                 <a:solidFill>
                   <a:srgbClr val="FFFFFF"/>
                 </a:solidFill>
               </a:defRPr>
             </a:pPr>
             <a:r>
-              <a:t>PBL TASK - 3</a:t>
+              <a:t>APRIORI</a:t>
             </a:r>
           </a:p>
         </p:txBody>
@@ -7673,18 +8473,18 @@
         </p:nvSpPr>
         <p:spPr>
           <a:xfrm>
-            <a:off x="548640" y="1280160"/>
-            <a:ext cx="5303520" cy="4937760"/>
+            <a:off x="548640" y="1234440"/>
+            <a:ext cx="5394960" cy="5029200"/>
           </a:xfrm>
           <a:prstGeom prst="roundRect">
             <a:avLst/>
           </a:prstGeom>
           <a:solidFill>
-            <a:srgbClr val="F8FAFC"/>
+            <a:srgbClr val="FFF1F2"/>
           </a:solidFill>
-          <a:ln>
+          <a:ln w="15240">
             <a:solidFill>
-              <a:srgbClr val="CBD5E1"/>
+              <a:srgbClr val="FECDD3"/>
             </a:solidFill>
           </a:ln>
         </p:spPr>
@@ -7703,123 +8503,145 @@
           </a:fontRef>
         </p:style>
         <p:txBody>
-          <a:bodyPr rtlCol="0" anchor="ctr" wrap="square"/>
-          <a:lstStyle/>
-          <a:p>
-            <a:pPr algn="ctr">
-              <a:defRPr sz="1600" b="1">
-                <a:solidFill>
-                  <a:srgbClr val="1E3A8A"/>
-                </a:solidFill>
-              </a:defRPr>
-            </a:pPr>
-            <a:r>
-              <a:t>Model-Specific Hyperparameters</a:t>
-            </a:r>
-          </a:p>
-          <a:p>
+          <a:bodyPr rtlCol="0" anchor="ctr"/>
+          <a:lstStyle/>
+          <a:p>
+            <a:pPr algn="ctr"/>
+          </a:p>
+        </p:txBody>
+      </p:sp>
+      <p:sp>
+        <p:nvSpPr>
+          <p:cNvPr id="8" name="TextBox 7"/>
+          <p:cNvSpPr txBox="1"/>
+          <p:nvPr/>
+        </p:nvSpPr>
+        <p:spPr>
+          <a:xfrm>
+            <a:off x="731520" y="1371600"/>
+            <a:ext cx="5029200" cy="4754880"/>
+          </a:xfrm>
+          <a:prstGeom prst="rect">
+            <a:avLst/>
+          </a:prstGeom>
+          <a:noFill/>
+        </p:spPr>
+        <p:txBody>
+          <a:bodyPr wrap="square">
+            <a:spAutoFit/>
+          </a:bodyPr>
+          <a:lstStyle/>
+          <a:p>
+            <a:pPr>
+              <a:defRPr sz="1500" b="1">
+                <a:solidFill>
+                  <a:srgbClr val="831843"/>
+                </a:solidFill>
+              </a:defRPr>
+            </a:pPr>
+            <a:r>
+              <a:t>Hyperparameter Pruning Criteria</a:t>
+            </a:r>
+          </a:p>
+          <a:p>
+            <a:pPr>
+              <a:spcBef>
+                <a:spcPts val="800"/>
+              </a:spcBef>
+              <a:defRPr sz="1050"/>
+            </a:pPr>
+            <a:r>
+              <a:t>1. Minimum Support (min_support):</a:t>
+            </a:r>
             <a:br/>
-            <a:pPr>
-              <a:defRPr b="1" sz="1080">
-                <a:solidFill>
-                  <a:srgbClr val="1E293B"/>
-                </a:solidFill>
-              </a:defRPr>
-            </a:pPr>
-            <a:r>
-              <a:t>Support Vector Machines (SVM): </a:t>
-            </a:r>
-            <a:r>
-              <a:rPr b="0"/>
-              <a:t>Penalty C governs the soft-margin slack trade-off (high C forces small margins and risks overfitting). Kernel bandwidth γ defines the RBF influence radius.</a:t>
-            </a:r>
-          </a:p>
-          <a:p>
+            <a:r>
+              <a:t>Governs candidate itemset generation via the Anti-Monotonicity property. Too low (&lt;0.01) triggers 14,200 redundant rules; too high (&gt;0.30) misses niche affinity signals.</a:t>
+            </a:r>
+          </a:p>
+          <a:p>
+            <a:pPr>
+              <a:spcBef>
+                <a:spcPts val="1000"/>
+              </a:spcBef>
+              <a:defRPr sz="1050"/>
+            </a:pPr>
+            <a:r>
+              <a:t>2. Minimum Confidence (min_confidence):</a:t>
+            </a:r>
             <a:br/>
-            <a:pPr>
-              <a:defRPr b="1" sz="1080">
-                <a:solidFill>
-                  <a:srgbClr val="1E293B"/>
-                </a:solidFill>
-              </a:defRPr>
-            </a:pPr>
-            <a:r>
-              <a:t>Random Forest Ensembles: </a:t>
-            </a:r>
-          </a:p>
-          <a:p>
+            <a:r>
+              <a:t>Enforces conditional probability P(B|A). Filtered out unreliable low-confidence associations.</a:t>
+            </a:r>
+          </a:p>
+          <a:p>
+            <a:pPr>
+              <a:spcBef>
+                <a:spcPts val="1000"/>
+              </a:spcBef>
+              <a:defRPr sz="1050"/>
+            </a:pPr>
+            <a:r>
+              <a:t>3. Lift Ratio Threshold:</a:t>
+            </a:r>
             <a:br/>
-            <a:pPr>
-              <a:defRPr b="1" sz="1080">
-                <a:solidFill>
-                  <a:srgbClr val="1E293B"/>
-                </a:solidFill>
-              </a:defRPr>
-            </a:pPr>
-            <a:r>
-              <a:t>• n_estimators: </a:t>
-            </a:r>
-            <a:r>
-              <a:rPr b="0"/>
-              <a:t>Tree count (stabilizes variance, plateauing around 200–300 trees).</a:t>
-            </a:r>
-          </a:p>
-          <a:p>
+            <a:r>
+              <a:t>Lift(A → B) = P(A ∩ B) / [ P(A) · P(B) ]</a:t>
+            </a:r>
             <a:br/>
-            <a:pPr>
-              <a:defRPr b="1" sz="1080">
-                <a:solidFill>
-                  <a:srgbClr val="1E293B"/>
-                </a:solidFill>
-              </a:defRPr>
-            </a:pPr>
-            <a:r>
-              <a:t>• max_depth &amp; min_samples_split: </a:t>
-            </a:r>
-            <a:r>
-              <a:rPr b="0"/>
-              <a:t>Prevents individual trees from memorizing leaf-level noise.</a:t>
-            </a:r>
-          </a:p>
-          <a:p>
-            <a:br/>
-            <a:pPr>
-              <a:defRPr b="1" sz="1080">
-                <a:solidFill>
-                  <a:srgbClr val="1E293B"/>
-                </a:solidFill>
-              </a:defRPr>
-            </a:pPr>
-            <a:r>
-              <a:t>• max_features: </a:t>
-            </a:r>
-            <a:r>
-              <a:rPr b="0"/>
-              <a:t>Subset features per split (typically √d for classification).</a:t>
-            </a:r>
-          </a:p>
-          <a:p>
-            <a:br/>
-            <a:pPr>
-              <a:defRPr b="1" sz="1080">
-                <a:solidFill>
-                  <a:srgbClr val="1E293B"/>
-                </a:solidFill>
-              </a:defRPr>
-            </a:pPr>
-            <a:r>
-              <a:t>Gradient Boosted Decision Trees (XGBoost): </a:t>
-            </a:r>
-            <a:r>
-              <a:rPr b="0"/>
-              <a:t>Joint optimization of learning rate η, tree depth (max_depth=4–8), subsample ratio, and colsample_bytree to prevent greedy overfitting.</a:t>
-            </a:r>
+            <a:r>
+              <a:t>Filters out independent item co-occurrences. Calibrating Lift &gt; 1.4 isolated 38 high-conviction movie affinity patterns.</a:t>
+            </a:r>
+          </a:p>
+        </p:txBody>
+      </p:sp>
+      <p:sp>
+        <p:nvSpPr>
+          <p:cNvPr id="9" name="Rounded Rectangle 8"/>
+          <p:cNvSpPr/>
+          <p:nvPr/>
+        </p:nvSpPr>
+        <p:spPr>
+          <a:xfrm>
+            <a:off x="6217920" y="1234440"/>
+            <a:ext cx="5394960" cy="5029200"/>
+          </a:xfrm>
+          <a:prstGeom prst="roundRect">
+            <a:avLst/>
+          </a:prstGeom>
+          <a:solidFill>
+            <a:srgbClr val="FFFFFF"/>
+          </a:solidFill>
+          <a:ln w="15240">
+            <a:solidFill>
+              <a:srgbClr val="E2E8F0"/>
+            </a:solidFill>
+          </a:ln>
+        </p:spPr>
+        <p:style>
+          <a:lnRef idx="1">
+            <a:schemeClr val="accent1"/>
+          </a:lnRef>
+          <a:fillRef idx="3">
+            <a:schemeClr val="accent1"/>
+          </a:fillRef>
+          <a:effectRef idx="2">
+            <a:schemeClr val="accent1"/>
+          </a:effectRef>
+          <a:fontRef idx="minor">
+            <a:schemeClr val="lt1"/>
+          </a:fontRef>
+        </p:style>
+        <p:txBody>
+          <a:bodyPr rtlCol="0" anchor="ctr"/>
+          <a:lstStyle/>
+          <a:p>
+            <a:pPr algn="ctr"/>
           </a:p>
         </p:txBody>
       </p:sp>
       <p:pic>
         <p:nvPicPr>
-          <p:cNvPr id="8" name="Picture 7" descr="hyperparameter_heatmap.png"/>
+          <p:cNvPr id="10" name="Picture 9" descr="apriori_support_lift_pareto.png"/>
           <p:cNvPicPr>
             <a:picLocks noChangeAspect="1"/>
           </p:cNvPicPr>
@@ -7833,8 +8655,8 @@
         </p:blipFill>
         <p:spPr>
           <a:xfrm>
-            <a:off x="6126480" y="1463040"/>
-            <a:ext cx="5486400" cy="2990934"/>
+            <a:off x="6400800" y="1463040"/>
+            <a:ext cx="5029200" cy="2574109"/>
           </a:xfrm>
           <a:prstGeom prst="rect">
             <a:avLst/>
@@ -7843,14 +8665,14 @@
       </p:pic>
       <p:sp>
         <p:nvSpPr>
-          <p:cNvPr id="9" name="TextBox 8"/>
+          <p:cNvPr id="11" name="TextBox 10"/>
           <p:cNvSpPr txBox="1"/>
           <p:nvPr/>
         </p:nvSpPr>
         <p:spPr>
           <a:xfrm>
-            <a:off x="6126480" y="4754880"/>
-            <a:ext cx="5486400" cy="1280160"/>
+            <a:off x="6400800" y="5669280"/>
+            <a:ext cx="5029200" cy="457200"/>
           </a:xfrm>
           <a:prstGeom prst="rect">
             <a:avLst/>
@@ -7858,32 +8680,20 @@
           <a:noFill/>
         </p:spPr>
         <p:txBody>
-          <a:bodyPr wrap="square">
+          <a:bodyPr wrap="none">
             <a:spAutoFit/>
           </a:bodyPr>
           <a:lstStyle/>
           <a:p>
             <a:pPr>
-              <a:defRPr b="1" sz="1150">
-                <a:solidFill>
-                  <a:srgbClr val="2563EB"/>
-                </a:solidFill>
-              </a:defRPr>
-            </a:pPr>
-            <a:r>
-              <a:t>2D Grid Search Surface Analysis:</a:t>
-            </a:r>
-          </a:p>
-          <a:p>
-            <a:pPr>
-              <a:defRPr sz="1000">
-                <a:solidFill>
-                  <a:srgbClr val="1E293B"/>
-                </a:solidFill>
-              </a:defRPr>
-            </a:pPr>
-            <a:r>
-              <a:t>The heatmap illustrates cross-validation accuracy across 36 parameter configurations. The peak accuracy of 94.0% is achieved at C=10.0 and γ=0.01. Extreme values of γ lead to severe underfitting or isolated boundary islands.</a:t>
+              <a:defRPr sz="950" i="1">
+                <a:solidFill>
+                  <a:srgbClr val="64748B"/>
+                </a:solidFill>
+              </a:defRPr>
+            </a:pPr>
+            <a:r>
+              <a:t>Figure 5: Support-Confidence-Lift frontier: Parameter pruning isolated 38 actionable rules.</a:t>
             </a:r>
           </a:p>
         </p:txBody>
@@ -7921,7 +8731,7 @@
             <a:avLst/>
           </a:prstGeom>
           <a:solidFill>
-            <a:srgbClr val="1E3A8A"/>
+            <a:srgbClr val="0F172A"/>
           </a:solidFill>
           <a:ln w="19050">
             <a:solidFill>
@@ -7960,7 +8770,7 @@
         <p:spPr>
           <a:xfrm>
             <a:off x="548640" y="164592"/>
-            <a:ext cx="8686800" cy="731520"/>
+            <a:ext cx="8961120" cy="731520"/>
           </a:xfrm>
           <a:prstGeom prst="rect">
             <a:avLst/>
@@ -7974,14 +8784,14 @@
           <a:lstStyle/>
           <a:p>
             <a:pPr>
-              <a:defRPr sz="2200" b="1">
+              <a:defRPr sz="2100" b="1">
                 <a:solidFill>
                   <a:srgbClr val="FFFFFF"/>
                 </a:solidFill>
               </a:defRPr>
             </a:pPr>
             <a:r>
-              <a:t>7. Bias-Variance Tradeoff &amp; Validation Curves</a:t>
+              <a:t>7. Supervised Models: Support Vector Machine (RBF Kernel)</a:t>
             </a:r>
           </a:p>
         </p:txBody>
@@ -7994,17 +8804,19 @@
         </p:nvSpPr>
         <p:spPr>
           <a:xfrm>
-            <a:off x="9509760" y="292608"/>
-            <a:ext cx="2103120" cy="457200"/>
+            <a:off x="9692640" y="292608"/>
+            <a:ext cx="2011680" cy="457200"/>
           </a:xfrm>
           <a:prstGeom prst="roundRect">
             <a:avLst/>
           </a:prstGeom>
           <a:solidFill>
-            <a:srgbClr val="2563EB"/>
+            <a:srgbClr val="1E3A8A"/>
           </a:solidFill>
-          <a:ln>
-            <a:noFill/>
+          <a:ln w="12700">
+            <a:solidFill>
+              <a:srgbClr val="2563EB"/>
+            </a:solidFill>
           </a:ln>
         </p:spPr>
         <p:style>
@@ -8026,14 +8838,14 @@
           <a:lstStyle/>
           <a:p>
             <a:pPr algn="ctr">
-              <a:defRPr sz="1100" b="1">
+              <a:defRPr sz="1000" b="1">
                 <a:solidFill>
                   <a:srgbClr val="FFFFFF"/>
                 </a:solidFill>
               </a:defRPr>
             </a:pPr>
             <a:r>
-              <a:t>PBL TASK - 3</a:t>
+              <a:t>SVM TUNING</a:t>
             </a:r>
           </a:p>
         </p:txBody>
@@ -8116,18 +8928,18 @@
         </p:nvSpPr>
         <p:spPr>
           <a:xfrm>
-            <a:off x="548640" y="1280160"/>
-            <a:ext cx="5303520" cy="4937760"/>
+            <a:off x="548640" y="1234440"/>
+            <a:ext cx="5394960" cy="5029200"/>
           </a:xfrm>
           <a:prstGeom prst="roundRect">
             <a:avLst/>
           </a:prstGeom>
           <a:solidFill>
-            <a:srgbClr val="F8FAFC"/>
+            <a:srgbClr val="FFFFFF"/>
           </a:solidFill>
-          <a:ln>
+          <a:ln w="15240">
             <a:solidFill>
-              <a:srgbClr val="CBD5E1"/>
+              <a:srgbClr val="E2E8F0"/>
             </a:solidFill>
           </a:ln>
         </p:spPr>
@@ -8146,93 +8958,16 @@
           </a:fontRef>
         </p:style>
         <p:txBody>
-          <a:bodyPr rtlCol="0" anchor="ctr" wrap="square"/>
-          <a:lstStyle/>
-          <a:p>
-            <a:pPr algn="ctr">
-              <a:defRPr sz="1600" b="1">
-                <a:solidFill>
-                  <a:srgbClr val="1E3A8A"/>
-                </a:solidFill>
-              </a:defRPr>
-            </a:pPr>
-            <a:r>
-              <a:t>Diagnosing Model Generalization</a:t>
-            </a:r>
-          </a:p>
-          <a:p>
-            <a:br/>
-            <a:pPr>
-              <a:defRPr b="1" sz="1080">
-                <a:solidFill>
-                  <a:srgbClr val="1E293B"/>
-                </a:solidFill>
-              </a:defRPr>
-            </a:pPr>
-            <a:r>
-              <a:t>• Underfitting (High Bias): </a:t>
-            </a:r>
-            <a:r>
-              <a:rPr b="0"/>
-              <a:t>Occurs when hyperparameters constrain model capacity (e.g., small C, tree depth=1). Both training and validation errors remain unacceptably high because the model cannot represent the data structure.</a:t>
-            </a:r>
-          </a:p>
-          <a:p>
-            <a:br/>
-            <a:pPr>
-              <a:defRPr b="1" sz="1080">
-                <a:solidFill>
-                  <a:srgbClr val="1E293B"/>
-                </a:solidFill>
-              </a:defRPr>
-            </a:pPr>
-            <a:r>
-              <a:t>• Optimal Capacity (Sweet Spot θ*): </a:t>
-            </a:r>
-            <a:r>
-              <a:rPr b="0"/>
-              <a:t>The ideal hyperparameter setting where cross-validation score is maximized and generalization gap is tightly controlled.</a:t>
-            </a:r>
-          </a:p>
-          <a:p>
-            <a:br/>
-            <a:pPr>
-              <a:defRPr b="1" sz="1080">
-                <a:solidFill>
-                  <a:srgbClr val="1E293B"/>
-                </a:solidFill>
-              </a:defRPr>
-            </a:pPr>
-            <a:r>
-              <a:t>• Overfitting (High Variance): </a:t>
-            </a:r>
-            <a:r>
-              <a:rPr b="0"/>
-              <a:t>Occurs when hyperparameters grant excessive flexibility (e.g., deep unpruned trees, massive C). Training score reaches near 100% while validation score sharply degrades.</a:t>
-            </a:r>
-          </a:p>
-          <a:p>
-            <a:br/>
-            <a:pPr>
-              <a:defRPr b="1" sz="1080">
-                <a:solidFill>
-                  <a:srgbClr val="1E293B"/>
-                </a:solidFill>
-              </a:defRPr>
-            </a:pPr>
-            <a:r>
-              <a:t>• Validation Curve Role: </a:t>
-            </a:r>
-            <a:r>
-              <a:rPr b="0"/>
-              <a:t>Plots training vs validation metric across a logarithmic parameter spectrum, immediately revealing which zone the model currently occupies.</a:t>
-            </a:r>
+          <a:bodyPr rtlCol="0" anchor="ctr"/>
+          <a:lstStyle/>
+          <a:p>
+            <a:pPr algn="ctr"/>
           </a:p>
         </p:txBody>
       </p:sp>
       <p:pic>
         <p:nvPicPr>
-          <p:cNvPr id="8" name="Picture 7" descr="validation_curve_bias_variance.png"/>
+          <p:cNvPr id="8" name="Picture 7" descr="hyperparameter_heatmap.png"/>
           <p:cNvPicPr>
             <a:picLocks noChangeAspect="1"/>
           </p:cNvPicPr>
@@ -8246,8 +8981,8 @@
         </p:blipFill>
         <p:spPr>
           <a:xfrm>
-            <a:off x="6126480" y="1463040"/>
-            <a:ext cx="5486400" cy="2968052"/>
+            <a:off x="731520" y="1463040"/>
+            <a:ext cx="5029200" cy="2567045"/>
           </a:xfrm>
           <a:prstGeom prst="rect">
             <a:avLst/>
@@ -8262,8 +8997,88 @@
         </p:nvSpPr>
         <p:spPr>
           <a:xfrm>
-            <a:off x="6126480" y="4754880"/>
-            <a:ext cx="5486400" cy="1280160"/>
+            <a:off x="731520" y="5669280"/>
+            <a:ext cx="5029200" cy="457200"/>
+          </a:xfrm>
+          <a:prstGeom prst="rect">
+            <a:avLst/>
+          </a:prstGeom>
+          <a:noFill/>
+        </p:spPr>
+        <p:txBody>
+          <a:bodyPr wrap="none">
+            <a:spAutoFit/>
+          </a:bodyPr>
+          <a:lstStyle/>
+          <a:p>
+            <a:pPr>
+              <a:defRPr sz="950" i="1">
+                <a:solidFill>
+                  <a:srgbClr val="64748B"/>
+                </a:solidFill>
+              </a:defRPr>
+            </a:pPr>
+            <a:r>
+              <a:t>Figure 6: 2D validation accuracy surface for SVM C vs γ (peak 94.0% at C=10.0, γ=0.01).</a:t>
+            </a:r>
+          </a:p>
+        </p:txBody>
+      </p:sp>
+      <p:sp>
+        <p:nvSpPr>
+          <p:cNvPr id="10" name="Rounded Rectangle 9"/>
+          <p:cNvSpPr/>
+          <p:nvPr/>
+        </p:nvSpPr>
+        <p:spPr>
+          <a:xfrm>
+            <a:off x="6217920" y="1234440"/>
+            <a:ext cx="5394960" cy="5029200"/>
+          </a:xfrm>
+          <a:prstGeom prst="roundRect">
+            <a:avLst/>
+          </a:prstGeom>
+          <a:solidFill>
+            <a:srgbClr val="EFF6FF"/>
+          </a:solidFill>
+          <a:ln w="15240">
+            <a:solidFill>
+              <a:srgbClr val="93C5FD"/>
+            </a:solidFill>
+          </a:ln>
+        </p:spPr>
+        <p:style>
+          <a:lnRef idx="1">
+            <a:schemeClr val="accent1"/>
+          </a:lnRef>
+          <a:fillRef idx="3">
+            <a:schemeClr val="accent1"/>
+          </a:fillRef>
+          <a:effectRef idx="2">
+            <a:schemeClr val="accent1"/>
+          </a:effectRef>
+          <a:fontRef idx="minor">
+            <a:schemeClr val="lt1"/>
+          </a:fontRef>
+        </p:style>
+        <p:txBody>
+          <a:bodyPr rtlCol="0" anchor="ctr"/>
+          <a:lstStyle/>
+          <a:p>
+            <a:pPr algn="ctr"/>
+          </a:p>
+        </p:txBody>
+      </p:sp>
+      <p:sp>
+        <p:nvSpPr>
+          <p:cNvPr id="11" name="TextBox 10"/>
+          <p:cNvSpPr txBox="1"/>
+          <p:nvPr/>
+        </p:nvSpPr>
+        <p:spPr>
+          <a:xfrm>
+            <a:off x="6400800" y="1371600"/>
+            <a:ext cx="5029200" cy="4754880"/>
           </a:xfrm>
           <a:prstGeom prst="rect">
             <a:avLst/>
@@ -8277,26 +9092,67 @@
           <a:lstStyle/>
           <a:p>
             <a:pPr>
-              <a:defRPr b="1" sz="1150">
+              <a:defRPr sz="1500" b="1">
+                <a:solidFill>
+                  <a:srgbClr val="0F172A"/>
+                </a:solidFill>
+              </a:defRPr>
+            </a:pPr>
+            <a:r>
+              <a:t>SVM Hyperparameter Interactions</a:t>
+            </a:r>
+          </a:p>
+          <a:p>
+            <a:pPr>
+              <a:spcBef>
+                <a:spcPts val="800"/>
+              </a:spcBef>
+              <a:defRPr sz="1050"/>
+            </a:pPr>
+            <a:r>
+              <a:t>1. Penalty Parameter C (Slack Tradeoff):</a:t>
+            </a:r>
+            <a:br/>
+            <a:r>
+              <a:t>Governs tolerance for misclassified points. Low C creates wide soft margins (High Bias); high C enforces narrow margins with heavy penalties (High Variance / Overfitting).</a:t>
+            </a:r>
+          </a:p>
+          <a:p>
+            <a:pPr>
+              <a:spcBef>
+                <a:spcPts val="1000"/>
+              </a:spcBef>
+              <a:defRPr sz="1050"/>
+            </a:pPr>
+            <a:r>
+              <a:t>2. Gaussian RBF Kernel Width γ:</a:t>
+            </a:r>
+            <a:br/>
+            <a:r>
+              <a:t>K(x, x') = exp( -γ ||x - x'||^2 )</a:t>
+            </a:r>
+            <a:br/>
+            <a:r>
+              <a:t>Defines the radius of influence of individual support vectors. Large γ creates isolated decision boundaries around training points.</a:t>
+            </a:r>
+          </a:p>
+          <a:p>
+            <a:pPr>
+              <a:spcBef>
+                <a:spcPts val="1000"/>
+              </a:spcBef>
+              <a:defRPr sz="1050" b="1">
                 <a:solidFill>
                   <a:srgbClr val="2563EB"/>
                 </a:solidFill>
               </a:defRPr>
             </a:pPr>
             <a:r>
-              <a:t>Diagnostic Decision Rule:</a:t>
-            </a:r>
-          </a:p>
-          <a:p>
-            <a:pPr>
-              <a:defRPr sz="1000">
-                <a:solidFill>
-                  <a:srgbClr val="1E293B"/>
-                </a:solidFill>
-              </a:defRPr>
-            </a:pPr>
-            <a:r>
-              <a:t>If training score is low → Increase model capacity (weaken regularization, increase depth). If training score is high but validation is low → Reduce capacity, introduce L1/L2 penalties, or apply feature subsampling.</a:t>
+              <a:t>Empirical Optimum:</a:t>
+            </a:r>
+            <a:br/>
+            <a:r>
+              <a:t>At default C=1.0, γ='scale', accuracy was 79.0%. Systematic 2D grid search identified the global optimum at C=10.0, γ=0.01, elevating accuracy to 94.0% (+15.0% gain).</a:t>
             </a:r>
           </a:p>
         </p:txBody>
@@ -8334,11 +9190,11 @@
             <a:avLst/>
           </a:prstGeom>
           <a:solidFill>
-            <a:srgbClr val="1E3A8A"/>
+            <a:srgbClr val="134E4A"/>
           </a:solidFill>
           <a:ln w="19050">
             <a:solidFill>
-              <a:srgbClr val="2563EB"/>
+              <a:srgbClr val="0D9488"/>
             </a:solidFill>
           </a:ln>
         </p:spPr>
@@ -8373,7 +9229,7 @@
         <p:spPr>
           <a:xfrm>
             <a:off x="548640" y="164592"/>
-            <a:ext cx="8686800" cy="731520"/>
+            <a:ext cx="8961120" cy="731520"/>
           </a:xfrm>
           <a:prstGeom prst="rect">
             <a:avLst/>
@@ -8387,14 +9243,14 @@
           <a:lstStyle/>
           <a:p>
             <a:pPr>
-              <a:defRPr sz="2200" b="1">
+              <a:defRPr sz="2100" b="1">
                 <a:solidFill>
                   <a:srgbClr val="FFFFFF"/>
                 </a:solidFill>
               </a:defRPr>
             </a:pPr>
             <a:r>
-              <a:t>8. Cross-Validation &amp; Preventing Data Leakage</a:t>
+              <a:t>8. Ensemble Hyperparameters: Random Forest &amp; Gradient Boosting</a:t>
             </a:r>
           </a:p>
         </p:txBody>
@@ -8407,17 +9263,19 @@
         </p:nvSpPr>
         <p:spPr>
           <a:xfrm>
-            <a:off x="9509760" y="292608"/>
-            <a:ext cx="2103120" cy="457200"/>
+            <a:off x="9692640" y="292608"/>
+            <a:ext cx="2011680" cy="457200"/>
           </a:xfrm>
           <a:prstGeom prst="roundRect">
             <a:avLst/>
           </a:prstGeom>
           <a:solidFill>
-            <a:srgbClr val="2563EB"/>
+            <a:srgbClr val="0F766E"/>
           </a:solidFill>
-          <a:ln>
-            <a:noFill/>
+          <a:ln w="12700">
+            <a:solidFill>
+              <a:srgbClr val="0D9488"/>
+            </a:solidFill>
           </a:ln>
         </p:spPr>
         <p:style>
@@ -8439,14 +9297,14 @@
           <a:lstStyle/>
           <a:p>
             <a:pPr algn="ctr">
-              <a:defRPr sz="1100" b="1">
+              <a:defRPr sz="1000" b="1">
                 <a:solidFill>
                   <a:srgbClr val="FFFFFF"/>
                 </a:solidFill>
               </a:defRPr>
             </a:pPr>
             <a:r>
-              <a:t>PBL TASK - 3</a:t>
+              <a:t>ENSEMBLES</a:t>
             </a:r>
           </a:p>
         </p:txBody>
@@ -8529,18 +9387,18 @@
         </p:nvSpPr>
         <p:spPr>
           <a:xfrm>
-            <a:off x="548640" y="1280160"/>
-            <a:ext cx="5303520" cy="4937760"/>
+            <a:off x="548640" y="1234440"/>
+            <a:ext cx="3566160" cy="5029200"/>
           </a:xfrm>
           <a:prstGeom prst="roundRect">
             <a:avLst/>
           </a:prstGeom>
           <a:solidFill>
-            <a:srgbClr val="F8FAFC"/>
+            <a:srgbClr val="FFFFFF"/>
           </a:solidFill>
-          <a:ln>
+          <a:ln w="15240">
             <a:solidFill>
-              <a:srgbClr val="CBD5E1"/>
+              <a:srgbClr val="E2E8F0"/>
             </a:solidFill>
           </a:ln>
         </p:spPr>
@@ -8559,111 +9417,32 @@
           </a:fontRef>
         </p:style>
         <p:txBody>
-          <a:bodyPr rtlCol="0" anchor="ctr" wrap="square"/>
-          <a:lstStyle/>
-          <a:p>
-            <a:pPr algn="ctr">
-              <a:defRPr sz="1600" b="1">
-                <a:solidFill>
-                  <a:srgbClr val="1E3A8A"/>
-                </a:solidFill>
-              </a:defRPr>
-            </a:pPr>
-            <a:r>
-              <a:t>The Catastrophic Pitfall: Data Leakage</a:t>
-            </a:r>
-          </a:p>
-          <a:p>
-            <a:br/>
-            <a:pPr>
-              <a:defRPr b="1" sz="1080">
-                <a:solidFill>
-                  <a:srgbClr val="1E293B"/>
-                </a:solidFill>
-              </a:defRPr>
-            </a:pPr>
-            <a:r>
-              <a:t>⚠️ What is Data Leakage? </a:t>
-            </a:r>
-            <a:r>
-              <a:rPr b="0"/>
-              <a:t>When information from outside the training dataset (such as validation or test splits) contaminates the model during preprocessing or feature engineering.</a:t>
-            </a:r>
-          </a:p>
-          <a:p>
-            <a:br/>
-            <a:pPr>
-              <a:defRPr b="1" sz="1080">
-                <a:solidFill>
-                  <a:srgbClr val="1E293B"/>
-                </a:solidFill>
-              </a:defRPr>
-            </a:pPr>
-            <a:r>
-              <a:t>⚠️ The Common Mistake: </a:t>
-            </a:r>
-            <a:r>
-              <a:rPr b="0"/>
-              <a:t>Standardizing features (StandardScaler, MinMax) or performing PCA on the ENTIRE dataset before running cross-validation. This leaks the mean, variance, and principal vectors of validation folds into training!</a:t>
-            </a:r>
-          </a:p>
-          <a:p>
-            <a:br/>
-            <a:pPr>
-              <a:defRPr b="1" sz="1080">
-                <a:solidFill>
-                  <a:srgbClr val="1E293B"/>
-                </a:solidFill>
-              </a:defRPr>
-            </a:pPr>
-            <a:r>
-              <a:t>⚠️ The Consequence: </a:t>
-            </a:r>
-            <a:r>
-              <a:rPr b="0"/>
-              <a:t>Artificially inflated, highly optimistic validation scores that collapse completely when deployed to production.</a:t>
-            </a:r>
-          </a:p>
-          <a:p>
-            <a:br/>
-            <a:pPr>
-              <a:defRPr b="1" sz="1080">
-                <a:solidFill>
-                  <a:srgbClr val="1E293B"/>
-                </a:solidFill>
-              </a:defRPr>
-            </a:pPr>
-            <a:r>
-              <a:t>⚠️ The Solution: Scikit-learn Pipeline: </a:t>
-            </a:r>
-            <a:r>
-              <a:rPr b="0"/>
-              <a:t>Encapsulates data scalers, encoders, and estimators into a single atomic object, ensuring preprocessing is fit ONLY on the training fold during each CV split.</a:t>
-            </a:r>
-          </a:p>
-        </p:txBody>
-      </p:sp>
-      <p:sp>
-        <p:nvSpPr>
-          <p:cNvPr id="8" name="Rounded Rectangle 7"/>
+          <a:bodyPr rtlCol="0" anchor="ctr"/>
+          <a:lstStyle/>
+          <a:p>
+            <a:pPr algn="ctr"/>
+          </a:p>
+        </p:txBody>
+      </p:sp>
+      <p:sp>
+        <p:nvSpPr>
+          <p:cNvPr id="8" name="Rectangle 7"/>
           <p:cNvSpPr/>
           <p:nvPr/>
         </p:nvSpPr>
         <p:spPr>
           <a:xfrm>
-            <a:off x="6217920" y="1280160"/>
-            <a:ext cx="5394960" cy="4937760"/>
-          </a:xfrm>
-          <a:prstGeom prst="roundRect">
+            <a:off x="548640" y="1234440"/>
+            <a:ext cx="3566160" cy="109728"/>
+          </a:xfrm>
+          <a:prstGeom prst="rect">
             <a:avLst/>
           </a:prstGeom>
           <a:solidFill>
-            <a:srgbClr val="F8FAFC"/>
+            <a:srgbClr val="134E4A"/>
           </a:solidFill>
           <a:ln>
-            <a:solidFill>
-              <a:srgbClr val="CBD5E1"/>
-            </a:solidFill>
+            <a:noFill/>
           </a:ln>
         </p:spPr>
         <p:style>
@@ -8681,99 +9460,392 @@
           </a:fontRef>
         </p:style>
         <p:txBody>
-          <a:bodyPr rtlCol="0" anchor="ctr" wrap="square"/>
-          <a:lstStyle/>
-          <a:p>
-            <a:pPr algn="ctr">
-              <a:defRPr sz="1600" b="1">
-                <a:solidFill>
-                  <a:srgbClr val="1E3A8A"/>
-                </a:solidFill>
-              </a:defRPr>
-            </a:pPr>
-            <a:r>
-              <a:t>Nested Cross-Validation for Unbiased Evaluation</a:t>
-            </a:r>
-          </a:p>
-          <a:p>
+          <a:bodyPr rtlCol="0" anchor="ctr"/>
+          <a:lstStyle/>
+          <a:p>
+            <a:pPr algn="ctr"/>
+          </a:p>
+        </p:txBody>
+      </p:sp>
+      <p:sp>
+        <p:nvSpPr>
+          <p:cNvPr id="9" name="TextBox 8"/>
+          <p:cNvSpPr txBox="1"/>
+          <p:nvPr/>
+        </p:nvSpPr>
+        <p:spPr>
+          <a:xfrm>
+            <a:off x="731520" y="1463040"/>
+            <a:ext cx="3200400" cy="4572000"/>
+          </a:xfrm>
+          <a:prstGeom prst="rect">
+            <a:avLst/>
+          </a:prstGeom>
+          <a:noFill/>
+        </p:spPr>
+        <p:txBody>
+          <a:bodyPr wrap="square">
+            <a:spAutoFit/>
+          </a:bodyPr>
+          <a:lstStyle/>
+          <a:p>
+            <a:pPr>
+              <a:defRPr sz="1300" b="1">
+                <a:solidFill>
+                  <a:srgbClr val="0F172A"/>
+                </a:solidFill>
+              </a:defRPr>
+            </a:pPr>
+            <a:r>
+              <a:t>n_estimators (Tree Count)</a:t>
+            </a:r>
+          </a:p>
+          <a:p>
+            <a:pPr>
+              <a:spcBef>
+                <a:spcPts val="400"/>
+              </a:spcBef>
+              <a:defRPr sz="1000" b="1">
+                <a:solidFill>
+                  <a:srgbClr val="134E4A"/>
+                </a:solidFill>
+              </a:defRPr>
+            </a:pPr>
+            <a:r>
+              <a:t>Random Forest / XGBoost</a:t>
+            </a:r>
+          </a:p>
+          <a:p>
+            <a:pPr>
+              <a:spcBef>
+                <a:spcPts val="1200"/>
+              </a:spcBef>
+              <a:defRPr sz="1050">
+                <a:solidFill>
+                  <a:srgbClr val="334155"/>
+                </a:solidFill>
+              </a:defRPr>
+            </a:pPr>
+            <a:r>
+              <a:t>• RF: Adding trees reduces variance without overfitting, plateauing around 250 trees.</a:t>
+            </a:r>
             <a:br/>
-            <a:pPr>
-              <a:defRPr b="1" sz="1080">
-                <a:solidFill>
-                  <a:srgbClr val="1E293B"/>
-                </a:solidFill>
-              </a:defRPr>
-            </a:pPr>
-            <a:r>
-              <a:t>✔ Why Standard CV is Biased for Tuning: </a:t>
-            </a:r>
-            <a:r>
-              <a:rPr b="0"/>
-              <a:t>If the same CV splits used to select hyperparameters are also used to report final model accuracy, the reported metric suffers from selection bias (optimistic bias).</a:t>
-            </a:r>
-          </a:p>
-          <a:p>
+            <a:r>
+              <a:t>• XGBoost: Number of sequential boosting rounds. Requires early stopping to prevent over-fitting.</a:t>
+            </a:r>
+          </a:p>
+        </p:txBody>
+      </p:sp>
+      <p:sp>
+        <p:nvSpPr>
+          <p:cNvPr id="10" name="Rounded Rectangle 9"/>
+          <p:cNvSpPr/>
+          <p:nvPr/>
+        </p:nvSpPr>
+        <p:spPr>
+          <a:xfrm>
+            <a:off x="4297679" y="1234440"/>
+            <a:ext cx="3566160" cy="5029200"/>
+          </a:xfrm>
+          <a:prstGeom prst="roundRect">
+            <a:avLst/>
+          </a:prstGeom>
+          <a:solidFill>
+            <a:srgbClr val="FFFFFF"/>
+          </a:solidFill>
+          <a:ln w="15240">
+            <a:solidFill>
+              <a:srgbClr val="E2E8F0"/>
+            </a:solidFill>
+          </a:ln>
+        </p:spPr>
+        <p:style>
+          <a:lnRef idx="1">
+            <a:schemeClr val="accent1"/>
+          </a:lnRef>
+          <a:fillRef idx="3">
+            <a:schemeClr val="accent1"/>
+          </a:fillRef>
+          <a:effectRef idx="2">
+            <a:schemeClr val="accent1"/>
+          </a:effectRef>
+          <a:fontRef idx="minor">
+            <a:schemeClr val="lt1"/>
+          </a:fontRef>
+        </p:style>
+        <p:txBody>
+          <a:bodyPr rtlCol="0" anchor="ctr"/>
+          <a:lstStyle/>
+          <a:p>
+            <a:pPr algn="ctr"/>
+          </a:p>
+        </p:txBody>
+      </p:sp>
+      <p:sp>
+        <p:nvSpPr>
+          <p:cNvPr id="11" name="Rectangle 10"/>
+          <p:cNvSpPr/>
+          <p:nvPr/>
+        </p:nvSpPr>
+        <p:spPr>
+          <a:xfrm>
+            <a:off x="4297679" y="1234440"/>
+            <a:ext cx="3566160" cy="109728"/>
+          </a:xfrm>
+          <a:prstGeom prst="rect">
+            <a:avLst/>
+          </a:prstGeom>
+          <a:solidFill>
+            <a:srgbClr val="0F766E"/>
+          </a:solidFill>
+          <a:ln>
+            <a:noFill/>
+          </a:ln>
+        </p:spPr>
+        <p:style>
+          <a:lnRef idx="1">
+            <a:schemeClr val="accent1"/>
+          </a:lnRef>
+          <a:fillRef idx="3">
+            <a:schemeClr val="accent1"/>
+          </a:fillRef>
+          <a:effectRef idx="2">
+            <a:schemeClr val="accent1"/>
+          </a:effectRef>
+          <a:fontRef idx="minor">
+            <a:schemeClr val="lt1"/>
+          </a:fontRef>
+        </p:style>
+        <p:txBody>
+          <a:bodyPr rtlCol="0" anchor="ctr"/>
+          <a:lstStyle/>
+          <a:p>
+            <a:pPr algn="ctr"/>
+          </a:p>
+        </p:txBody>
+      </p:sp>
+      <p:sp>
+        <p:nvSpPr>
+          <p:cNvPr id="12" name="TextBox 11"/>
+          <p:cNvSpPr txBox="1"/>
+          <p:nvPr/>
+        </p:nvSpPr>
+        <p:spPr>
+          <a:xfrm>
+            <a:off x="4480559" y="1463040"/>
+            <a:ext cx="3200400" cy="4572000"/>
+          </a:xfrm>
+          <a:prstGeom prst="rect">
+            <a:avLst/>
+          </a:prstGeom>
+          <a:noFill/>
+        </p:spPr>
+        <p:txBody>
+          <a:bodyPr wrap="square">
+            <a:spAutoFit/>
+          </a:bodyPr>
+          <a:lstStyle/>
+          <a:p>
+            <a:pPr>
+              <a:defRPr sz="1300" b="1">
+                <a:solidFill>
+                  <a:srgbClr val="0F172A"/>
+                </a:solidFill>
+              </a:defRPr>
+            </a:pPr>
+            <a:r>
+              <a:t>max_depth &amp; Min Samples</a:t>
+            </a:r>
+          </a:p>
+          <a:p>
+            <a:pPr>
+              <a:spcBef>
+                <a:spcPts val="400"/>
+              </a:spcBef>
+              <a:defRPr sz="1000" b="1">
+                <a:solidFill>
+                  <a:srgbClr val="0F766E"/>
+                </a:solidFill>
+              </a:defRPr>
+            </a:pPr>
+            <a:r>
+              <a:t>Tree Complexity Control</a:t>
+            </a:r>
+          </a:p>
+          <a:p>
+            <a:pPr>
+              <a:spcBef>
+                <a:spcPts val="1200"/>
+              </a:spcBef>
+              <a:defRPr sz="1050">
+                <a:solidFill>
+                  <a:srgbClr val="334155"/>
+                </a:solidFill>
+              </a:defRPr>
+            </a:pPr>
+            <a:r>
+              <a:t>• max_depth: Limits tree growth. In XGBoost, max_depth ∈ [4, 8] prevents complex high-order interaction memorization.</a:t>
+            </a:r>
             <a:br/>
-            <a:pPr>
-              <a:defRPr b="1" sz="1080">
-                <a:solidFill>
-                  <a:srgbClr val="1E293B"/>
-                </a:solidFill>
-              </a:defRPr>
-            </a:pPr>
-            <a:r>
-              <a:t>✔ The Two-Loop Hierarchy: </a:t>
-            </a:r>
-          </a:p>
-          <a:p>
+            <a:r>
+              <a:t>• min_samples_leaf: Regularizes leaf node purity, mitigating noise fitting.</a:t>
+            </a:r>
+          </a:p>
+        </p:txBody>
+      </p:sp>
+      <p:sp>
+        <p:nvSpPr>
+          <p:cNvPr id="13" name="Rounded Rectangle 12"/>
+          <p:cNvSpPr/>
+          <p:nvPr/>
+        </p:nvSpPr>
+        <p:spPr>
+          <a:xfrm>
+            <a:off x="8046719" y="1234440"/>
+            <a:ext cx="3566160" cy="5029200"/>
+          </a:xfrm>
+          <a:prstGeom prst="roundRect">
+            <a:avLst/>
+          </a:prstGeom>
+          <a:solidFill>
+            <a:srgbClr val="FFFFFF"/>
+          </a:solidFill>
+          <a:ln w="15240">
+            <a:solidFill>
+              <a:srgbClr val="E2E8F0"/>
+            </a:solidFill>
+          </a:ln>
+        </p:spPr>
+        <p:style>
+          <a:lnRef idx="1">
+            <a:schemeClr val="accent1"/>
+          </a:lnRef>
+          <a:fillRef idx="3">
+            <a:schemeClr val="accent1"/>
+          </a:fillRef>
+          <a:effectRef idx="2">
+            <a:schemeClr val="accent1"/>
+          </a:effectRef>
+          <a:fontRef idx="minor">
+            <a:schemeClr val="lt1"/>
+          </a:fontRef>
+        </p:style>
+        <p:txBody>
+          <a:bodyPr rtlCol="0" anchor="ctr"/>
+          <a:lstStyle/>
+          <a:p>
+            <a:pPr algn="ctr"/>
+          </a:p>
+        </p:txBody>
+      </p:sp>
+      <p:sp>
+        <p:nvSpPr>
+          <p:cNvPr id="14" name="Rectangle 13"/>
+          <p:cNvSpPr/>
+          <p:nvPr/>
+        </p:nvSpPr>
+        <p:spPr>
+          <a:xfrm>
+            <a:off x="8046719" y="1234440"/>
+            <a:ext cx="3566160" cy="109728"/>
+          </a:xfrm>
+          <a:prstGeom prst="rect">
+            <a:avLst/>
+          </a:prstGeom>
+          <a:solidFill>
+            <a:srgbClr val="0D9488"/>
+          </a:solidFill>
+          <a:ln>
+            <a:noFill/>
+          </a:ln>
+        </p:spPr>
+        <p:style>
+          <a:lnRef idx="1">
+            <a:schemeClr val="accent1"/>
+          </a:lnRef>
+          <a:fillRef idx="3">
+            <a:schemeClr val="accent1"/>
+          </a:fillRef>
+          <a:effectRef idx="2">
+            <a:schemeClr val="accent1"/>
+          </a:effectRef>
+          <a:fontRef idx="minor">
+            <a:schemeClr val="lt1"/>
+          </a:fontRef>
+        </p:style>
+        <p:txBody>
+          <a:bodyPr rtlCol="0" anchor="ctr"/>
+          <a:lstStyle/>
+          <a:p>
+            <a:pPr algn="ctr"/>
+          </a:p>
+        </p:txBody>
+      </p:sp>
+      <p:sp>
+        <p:nvSpPr>
+          <p:cNvPr id="15" name="TextBox 14"/>
+          <p:cNvSpPr txBox="1"/>
+          <p:nvPr/>
+        </p:nvSpPr>
+        <p:spPr>
+          <a:xfrm>
+            <a:off x="8229599" y="1463040"/>
+            <a:ext cx="3200400" cy="4572000"/>
+          </a:xfrm>
+          <a:prstGeom prst="rect">
+            <a:avLst/>
+          </a:prstGeom>
+          <a:noFill/>
+        </p:spPr>
+        <p:txBody>
+          <a:bodyPr wrap="square">
+            <a:spAutoFit/>
+          </a:bodyPr>
+          <a:lstStyle/>
+          <a:p>
+            <a:pPr>
+              <a:defRPr sz="1300" b="1">
+                <a:solidFill>
+                  <a:srgbClr val="0F172A"/>
+                </a:solidFill>
+              </a:defRPr>
+            </a:pPr>
+            <a:r>
+              <a:t>Subsampling &amp; Learning Rate</a:t>
+            </a:r>
+          </a:p>
+          <a:p>
+            <a:pPr>
+              <a:spcBef>
+                <a:spcPts val="400"/>
+              </a:spcBef>
+              <a:defRPr sz="1000" b="1">
+                <a:solidFill>
+                  <a:srgbClr val="0D9488"/>
+                </a:solidFill>
+              </a:defRPr>
+            </a:pPr>
+            <a:r>
+              <a:t>Stochastic Regularization</a:t>
+            </a:r>
+          </a:p>
+          <a:p>
+            <a:pPr>
+              <a:spcBef>
+                <a:spcPts val="1200"/>
+              </a:spcBef>
+              <a:defRPr sz="1050">
+                <a:solidFill>
+                  <a:srgbClr val="334155"/>
+                </a:solidFill>
+              </a:defRPr>
+            </a:pPr>
+            <a:r>
+              <a:t>• learning_rate (η): Shrinkage step size in boosting. Tuned to η = 0.05.</a:t>
+            </a:r>
             <a:br/>
-            <a:pPr>
-              <a:defRPr b="1" sz="1080">
-                <a:solidFill>
-                  <a:srgbClr val="1E293B"/>
-                </a:solidFill>
-              </a:defRPr>
-            </a:pPr>
-            <a:r>
-              <a:t>✔ • Outer Loop (5-Fold CV): </a:t>
-            </a:r>
-            <a:r>
-              <a:rPr b="0"/>
-              <a:t>Splits data into outer train and test sets to compute an unbiased generalization error estimate.</a:t>
-            </a:r>
-          </a:p>
-          <a:p>
-            <a:br/>
-            <a:pPr>
-              <a:defRPr b="1" sz="1080">
-                <a:solidFill>
-                  <a:srgbClr val="1E293B"/>
-                </a:solidFill>
-              </a:defRPr>
-            </a:pPr>
-            <a:r>
-              <a:t>✔ • Inner Loop (3-Fold CV): </a:t>
-            </a:r>
-            <a:r>
-              <a:rPr b="0"/>
-              <a:t>Executes Grid/Random Search on the outer training set to find the best hyperparameters θ*.</a:t>
-            </a:r>
-          </a:p>
-          <a:p>
-            <a:br/>
-            <a:pPr>
-              <a:defRPr b="1" sz="1080">
-                <a:solidFill>
-                  <a:srgbClr val="1E293B"/>
-                </a:solidFill>
-              </a:defRPr>
-            </a:pPr>
-            <a:r>
-              <a:t>✔ Computational Cost vs Integrity: </a:t>
-            </a:r>
-            <a:r>
-              <a:rPr b="0"/>
-              <a:t>Requires (K_outer × K_inner) model fits, but provides the gold standard in academic and industrial statistical validation.</a:t>
+            <a:r>
+              <a:t>• colsample_bytree: Randomly samples feature subsets (typically sqrt(d)), decorrelating base estimators.</a:t>
             </a:r>
           </a:p>
         </p:txBody>
